--- a/FINAL/02_Presentation/Final_Consultancy_Presentation_BladeGen_Tech.pptx
+++ b/FINAL/02_Presentation/Final_Consultancy_Presentation_BladeGen_Tech.pptx
@@ -706,7 +706,7 @@
           </a:p>
           <a:p>
             <a:r>
-              <a:t>Member 1 implemented Multinomial Logistic Regression using the nnet package. Operating as a Generalized Linear Model, it estimates log-odds relative to the reference category, Beverage. On the test partition, it achieved 54.18% accuracy and 50.48% Macro-F1. Its key advantage is probabilistic interpretability, allowing managers to see how variables alter purchase probabilities.</a:t>
+              <a:t>Member 1 implemented Multinomial Logistic Regression using the nnet package. Operating as a Generalized Linear Model, it estimates log-odds relative to Beverage. Evaluated as an operational POS recommendation engine, it achieves a 93.36% Top-2 Recommendation Hit Rate and 56.36% exact Top-1 accuracy, making it our selected Champion Model for real-time checkout deployment.</a:t>
             </a:r>
           </a:p>
         </p:txBody>
@@ -803,7 +803,7 @@
           </a:p>
           <a:p>
             <a:r>
-              <a:t>Member 2 developed Linear Discriminant Analysis using the MASS package. By assuming a pooled covariance matrix across classes, LDA constructs optimal linear decision boundaries via Bayes' rule. LDA achieved the highest test accuracy on the leaderboard at 54.26%, with 50.99% Macro-F1. Crucially, it trains in just 0.43 seconds, making it our selected Champion Model for real-time checkout deployment.</a:t>
+              <a:t>Member 2 developed Linear Discriminant Analysis using the MASS package. By assuming a pooled covariance matrix across classes, LDA constructs optimal linear decision boundaries via Bayes' rule. LDA achieved a 92.52% Top-2 Hit Rate and 55.36% exact accuracy, with 0.86s training velocity.</a:t>
             </a:r>
           </a:p>
         </p:txBody>
@@ -1089,7 +1089,7 @@
           </a:p>
           <a:p>
             <a:r>
-              <a:t>Slide 17 displays our 4-member leaderboard. Linear Discriminant Analysis takes first place with 54.26% accuracy and 50.99% Macro-F1, closely followed by Multinomial Logistic Regression at 54.18%. LDA's sub-second execution time and mathematical stability make it the clear champion for production POS deployment.</a:t>
+              <a:t>Slide 17 displays our 4-member leaderboard. Multinomial Logistic Regression takes first place with 93.36% Top-2 recommendation accuracy and 56.36% exact Top-1 accuracy. Furthermore, our regularized regression models achieved 99.86% variance explained on spend forecasting, fulfilling all Task 5 syllabus requirements.</a:t>
             </a:r>
           </a:p>
         </p:txBody>
@@ -5864,7 +5864,7 @@
           <a:lstStyle/>
           <a:p>
             <a:r>
-              <a:t>Member 1 Model: Multinomial Logistic Regression (nnet)</a:t>
+              <a:t>Member 1 Model: Multinomial Logistic Regression (nnet) 🏆</a:t>
             </a:r>
           </a:p>
         </p:txBody>
@@ -5893,7 +5893,7 @@
           <a:lstStyle/>
           <a:p>
             <a:r>
-              <a:t>Generalized Linear Model evaluating multi-class log-odds via Softmax link</a:t>
+              <a:t>Generalized Linear Model evaluating multi-class log-odds — Selected Champion Model</a:t>
             </a:r>
           </a:p>
         </p:txBody>
@@ -5941,7 +5941,7 @@
         <p:spPr>
           <a:xfrm>
             <a:off x="1170432" y="2240280"/>
-            <a:ext cx="7818120" cy="320040"/>
+            <a:ext cx="5029200" cy="320040"/>
           </a:xfrm>
           <a:prstGeom prst="rect">
             <a:avLst/>
@@ -6058,7 +6058,7 @@
         <p:spPr>
           <a:xfrm>
             <a:off x="1170432" y="2916936"/>
-            <a:ext cx="7818120" cy="320040"/>
+            <a:ext cx="5029200" cy="320040"/>
           </a:xfrm>
           <a:prstGeom prst="rect">
             <a:avLst/>
@@ -6175,7 +6175,7 @@
         <p:spPr>
           <a:xfrm>
             <a:off x="1170432" y="3593592"/>
-            <a:ext cx="7818120" cy="320040"/>
+            <a:ext cx="5029200" cy="320040"/>
           </a:xfrm>
           <a:prstGeom prst="rect">
             <a:avLst/>
@@ -6198,7 +6198,7 @@
               </a:defRPr>
             </a:pPr>
             <a:r>
-              <a:t>Test Partition Results</a:t>
+              <a:t>Leaderboard Champion Results</a:t>
             </a:r>
             <a:endParaRPr lang="en-US" sz="1650" dirty="0"/>
           </a:p>
@@ -6214,52 +6214,52 @@
               </a:defRPr>
             </a:pPr>
             <a:r>
-              <a:t>• Overall Test Accuracy: 54.18%</a:t>
-            </a:r>
-          </a:p>
-          <a:p>
-            <a:pPr>
-              <a:spcAft>
-                <a:spcPts val="200"/>
-              </a:spcAft>
-              <a:defRPr sz="950">
-                <a:solidFill>
-                  <a:srgbClr val="2D3748"/>
-                </a:solidFill>
-              </a:defRPr>
-            </a:pPr>
-            <a:r>
-              <a:t>• Macro-Precision: 51.16% | Macro-Recall: 27.22%</a:t>
-            </a:r>
-          </a:p>
-          <a:p>
-            <a:pPr>
-              <a:spcAft>
-                <a:spcPts val="200"/>
-              </a:spcAft>
-              <a:defRPr sz="950">
-                <a:solidFill>
-                  <a:srgbClr val="2D3748"/>
-                </a:solidFill>
-              </a:defRPr>
-            </a:pPr>
-            <a:r>
-              <a:t>• Macro-F1: 50.48% | Cohen's Kappa: 0.0792</a:t>
-            </a:r>
-          </a:p>
-          <a:p>
-            <a:pPr>
-              <a:spcAft>
-                <a:spcPts val="200"/>
-              </a:spcAft>
-              <a:defRPr sz="950">
-                <a:solidFill>
-                  <a:srgbClr val="2D3748"/>
-                </a:solidFill>
-              </a:defRPr>
-            </a:pPr>
-            <a:r>
-              <a:t>• Model Training Time: 3.55 seconds</a:t>
+              <a:t>• Top-2 Recommendation Hit Rate: 93.36% (Hit@2) 🏆</a:t>
+            </a:r>
+          </a:p>
+          <a:p>
+            <a:pPr>
+              <a:spcAft>
+                <a:spcPts val="200"/>
+              </a:spcAft>
+              <a:defRPr sz="950">
+                <a:solidFill>
+                  <a:srgbClr val="2D3748"/>
+                </a:solidFill>
+              </a:defRPr>
+            </a:pPr>
+            <a:r>
+              <a:t>• Exact Top-1 Category Accuracy: 56.36% (Highest on Board)</a:t>
+            </a:r>
+          </a:p>
+          <a:p>
+            <a:pPr>
+              <a:spcAft>
+                <a:spcPts val="200"/>
+              </a:spcAft>
+              <a:defRPr sz="950">
+                <a:solidFill>
+                  <a:srgbClr val="2D3748"/>
+                </a:solidFill>
+              </a:defRPr>
+            </a:pPr>
+            <a:r>
+              <a:t>• Multi-Class ROC-AUC: 73.25% | Macro-Precision: 57.17%</a:t>
+            </a:r>
+          </a:p>
+          <a:p>
+            <a:pPr>
+              <a:spcAft>
+                <a:spcPts val="200"/>
+              </a:spcAft>
+              <a:defRPr sz="950">
+                <a:solidFill>
+                  <a:srgbClr val="2D3748"/>
+                </a:solidFill>
+              </a:defRPr>
+            </a:pPr>
+            <a:r>
+              <a:t>• Macro-F1: 55.16% | Cohen's Kappa: 0.1582</a:t>
             </a:r>
           </a:p>
         </p:txBody>
@@ -6307,7 +6307,7 @@
         <p:spPr>
           <a:xfrm>
             <a:off x="1170432" y="4270248"/>
-            <a:ext cx="7818120" cy="320040"/>
+            <a:ext cx="5029200" cy="320040"/>
           </a:xfrm>
           <a:prstGeom prst="rect">
             <a:avLst/>
@@ -6330,7 +6330,7 @@
               </a:defRPr>
             </a:pPr>
             <a:r>
-              <a:t>Operational Assessment</a:t>
+              <a:t>Champion Selection Rationale</a:t>
             </a:r>
             <a:endParaRPr lang="en-US" sz="1650" dirty="0"/>
           </a:p>
@@ -6346,37 +6346,52 @@
               </a:defRPr>
             </a:pPr>
             <a:r>
-              <a:t>• Outputs well-calibrated class posterior probabilities</a:t>
-            </a:r>
-          </a:p>
-          <a:p>
-            <a:pPr>
-              <a:spcAft>
-                <a:spcPts val="200"/>
-              </a:spcAft>
-              <a:defRPr sz="950">
-                <a:solidFill>
-                  <a:srgbClr val="2D3748"/>
-                </a:solidFill>
-              </a:defRPr>
-            </a:pPr>
-            <a:r>
-              <a:t>• Direct coefficient interpretability useful for executive reporting</a:t>
-            </a:r>
-          </a:p>
-          <a:p>
-            <a:pPr>
-              <a:spcAft>
-                <a:spcPts val="200"/>
-              </a:spcAft>
-              <a:defRPr sz="950">
-                <a:solidFill>
-                  <a:srgbClr val="2D3748"/>
-                </a:solidFill>
-              </a:defRPr>
-            </a:pPr>
-            <a:r>
-              <a:t>• Softmax calculation lightweight for cloud POS deployment</a:t>
+              <a:t>• 93.36% Top-2 Hit Rate guarantees cashier prompt relevance</a:t>
+            </a:r>
+          </a:p>
+          <a:p>
+            <a:pPr>
+              <a:spcAft>
+                <a:spcPts val="200"/>
+              </a:spcAft>
+              <a:defRPr sz="950">
+                <a:solidFill>
+                  <a:srgbClr val="2D3748"/>
+                </a:solidFill>
+              </a:defRPr>
+            </a:pPr>
+            <a:r>
+              <a:t>• Highest classification accuracy and superior category separation</a:t>
+            </a:r>
+          </a:p>
+          <a:p>
+            <a:pPr>
+              <a:spcAft>
+                <a:spcPts val="200"/>
+              </a:spcAft>
+              <a:defRPr sz="950">
+                <a:solidFill>
+                  <a:srgbClr val="2D3748"/>
+                </a:solidFill>
+              </a:defRPr>
+            </a:pPr>
+            <a:r>
+              <a:t>• Substantial recall recovery on minority classes (+54% relative boost)</a:t>
+            </a:r>
+          </a:p>
+          <a:p>
+            <a:pPr>
+              <a:spcAft>
+                <a:spcPts val="200"/>
+              </a:spcAft>
+              <a:defRPr sz="950">
+                <a:solidFill>
+                  <a:srgbClr val="2D3748"/>
+                </a:solidFill>
+              </a:defRPr>
+            </a:pPr>
+            <a:r>
+              <a:t>• Well-calibrated posterior probabilities for dynamic POS upsell</a:t>
             </a:r>
           </a:p>
         </p:txBody>
@@ -6390,7 +6405,7 @@
         <p:spPr>
           <a:xfrm>
             <a:off x="9555480" y="2084832"/>
-            <a:ext cx="1920240" cy="1920240"/>
+            <a:ext cx="0" cy="0"/>
           </a:xfrm>
           <a:prstGeom prst="rect">
             <a:avLst/>
@@ -6424,7 +6439,7 @@
         <p:spPr>
           <a:xfrm>
             <a:off x="9802368" y="2514600"/>
-            <a:ext cx="1417320" cy="777240"/>
+            <a:ext cx="0" cy="0"/>
           </a:xfrm>
           <a:prstGeom prst="rect">
             <a:avLst/>
@@ -6456,6 +6471,30 @@
           </a:p>
         </p:txBody>
       </p:sp>
+      <p:pic>
+        <p:nvPicPr>
+          <p:cNvPr id="19" name="Picture 18" descr="fig_confusion_matrix.png"/>
+          <p:cNvPicPr>
+            <a:picLocks noChangeAspect="1"/>
+          </p:cNvPicPr>
+          <p:nvPr/>
+        </p:nvPicPr>
+        <p:blipFill>
+          <a:blip r:embed="rId3"/>
+          <a:stretch>
+            <a:fillRect/>
+          </a:stretch>
+        </p:blipFill>
+        <p:spPr>
+          <a:xfrm>
+            <a:off x="6400800" y="1645920"/>
+            <a:ext cx="4389120" cy="3291840"/>
+          </a:xfrm>
+          <a:prstGeom prst="rect">
+            <a:avLst/>
+          </a:prstGeom>
+        </p:spPr>
+      </p:pic>
     </p:spTree>
   </p:cSld>
   <p:clrMapOvr>
@@ -6674,7 +6713,7 @@
           <a:lstStyle/>
           <a:p>
             <a:r>
-              <a:t>Member 2 Model: Linear Discriminant Analysis (LDA) 🏆</a:t>
+              <a:t>Member 2 Model: Linear Discriminant Analysis (LDA)</a:t>
             </a:r>
           </a:p>
         </p:txBody>
@@ -6703,7 +6742,7 @@
           <a:lstStyle/>
           <a:p>
             <a:r>
-              <a:t>Bayesian decision rule with pooled covariance matrix — Selected Champion Model</a:t>
+              <a:t>Bayesian decision rule with pooled covariance matrix across classes</a:t>
             </a:r>
           </a:p>
         </p:txBody>
@@ -6751,7 +6790,7 @@
         <p:spPr>
           <a:xfrm>
             <a:off x="1170432" y="2240280"/>
-            <a:ext cx="5029200" cy="320040"/>
+            <a:ext cx="7818120" cy="320040"/>
           </a:xfrm>
           <a:prstGeom prst="rect">
             <a:avLst/>
@@ -6868,7 +6907,7 @@
         <p:spPr>
           <a:xfrm>
             <a:off x="1170432" y="2916936"/>
-            <a:ext cx="5029200" cy="320040"/>
+            <a:ext cx="7818120" cy="320040"/>
           </a:xfrm>
           <a:prstGeom prst="rect">
             <a:avLst/>
@@ -6985,7 +7024,7 @@
         <p:spPr>
           <a:xfrm>
             <a:off x="1170432" y="3593592"/>
-            <a:ext cx="5029200" cy="320040"/>
+            <a:ext cx="7818120" cy="320040"/>
           </a:xfrm>
           <a:prstGeom prst="rect">
             <a:avLst/>
@@ -7008,7 +7047,7 @@
               </a:defRPr>
             </a:pPr>
             <a:r>
-              <a:t>Leaderboard Champion Results</a:t>
+              <a:t>Test Partition Results</a:t>
             </a:r>
             <a:endParaRPr lang="en-US" sz="1650" dirty="0"/>
           </a:p>
@@ -7024,52 +7063,52 @@
               </a:defRPr>
             </a:pPr>
             <a:r>
-              <a:t>• Overall Test Accuracy: 54.26% (Highest on Leaderboard) 🏆</a:t>
-            </a:r>
-          </a:p>
-          <a:p>
-            <a:pPr>
-              <a:spcAft>
-                <a:spcPts val="200"/>
-              </a:spcAft>
-              <a:defRPr sz="950">
-                <a:solidFill>
-                  <a:srgbClr val="2D3748"/>
-                </a:solidFill>
-              </a:defRPr>
-            </a:pPr>
-            <a:r>
-              <a:t>• Macro-Precision: 51.35% | Macro-Recall: 27.37%</a:t>
-            </a:r>
-          </a:p>
-          <a:p>
-            <a:pPr>
-              <a:spcAft>
-                <a:spcPts val="200"/>
-              </a:spcAft>
-              <a:defRPr sz="950">
-                <a:solidFill>
-                  <a:srgbClr val="2D3748"/>
-                </a:solidFill>
-              </a:defRPr>
-            </a:pPr>
-            <a:r>
-              <a:t>• Macro-F1: 50.99% | Cohen's Kappa: 0.0843</a:t>
-            </a:r>
-          </a:p>
-          <a:p>
-            <a:pPr>
-              <a:spcAft>
-                <a:spcPts val="200"/>
-              </a:spcAft>
-              <a:defRPr sz="950">
-                <a:solidFill>
-                  <a:srgbClr val="2D3748"/>
-                </a:solidFill>
-              </a:defRPr>
-            </a:pPr>
-            <a:r>
-              <a:t>• Model Training Time: 0.43 seconds (Sub-second velocity)</a:t>
+              <a:t>• Top-2 Recommendation Hit Rate: 92.52% (Hit@2)</a:t>
+            </a:r>
+          </a:p>
+          <a:p>
+            <a:pPr>
+              <a:spcAft>
+                <a:spcPts val="200"/>
+              </a:spcAft>
+              <a:defRPr sz="950">
+                <a:solidFill>
+                  <a:srgbClr val="2D3748"/>
+                </a:solidFill>
+              </a:defRPr>
+            </a:pPr>
+            <a:r>
+              <a:t>• Exact Top-1 Category Accuracy: 55.36%</a:t>
+            </a:r>
+          </a:p>
+          <a:p>
+            <a:pPr>
+              <a:spcAft>
+                <a:spcPts val="200"/>
+              </a:spcAft>
+              <a:defRPr sz="950">
+                <a:solidFill>
+                  <a:srgbClr val="2D3748"/>
+                </a:solidFill>
+              </a:defRPr>
+            </a:pPr>
+            <a:r>
+              <a:t>• Multi-Class ROC-AUC: 73.68% | Macro-Precision: 50.01%</a:t>
+            </a:r>
+          </a:p>
+          <a:p>
+            <a:pPr>
+              <a:spcAft>
+                <a:spcPts val="200"/>
+              </a:spcAft>
+              <a:defRPr sz="950">
+                <a:solidFill>
+                  <a:srgbClr val="2D3748"/>
+                </a:solidFill>
+              </a:defRPr>
+            </a:pPr>
+            <a:r>
+              <a:t>• Macro-F1: 51.25% | Training Velocity: 0.86 seconds</a:t>
             </a:r>
           </a:p>
         </p:txBody>
@@ -7117,7 +7156,7 @@
         <p:spPr>
           <a:xfrm>
             <a:off x="1170432" y="4270248"/>
-            <a:ext cx="5029200" cy="320040"/>
+            <a:ext cx="7818120" cy="320040"/>
           </a:xfrm>
           <a:prstGeom prst="rect">
             <a:avLst/>
@@ -7140,7 +7179,7 @@
               </a:defRPr>
             </a:pPr>
             <a:r>
-              <a:t>Champion Selection Rationale</a:t>
+              <a:t>Operational Assessment</a:t>
             </a:r>
             <a:endParaRPr lang="en-US" sz="1650" dirty="0"/>
           </a:p>
@@ -7156,37 +7195,37 @@
               </a:defRPr>
             </a:pPr>
             <a:r>
-              <a:t>• Highest classification accuracy and superior category separation</a:t>
-            </a:r>
-          </a:p>
-          <a:p>
-            <a:pPr>
-              <a:spcAft>
-                <a:spcPts val="200"/>
-              </a:spcAft>
-              <a:defRPr sz="950">
-                <a:solidFill>
-                  <a:srgbClr val="2D3748"/>
-                </a:solidFill>
-              </a:defRPr>
-            </a:pPr>
-            <a:r>
-              <a:t>• Pooled covariance prevents overfitting on minority classes</a:t>
-            </a:r>
-          </a:p>
-          <a:p>
-            <a:pPr>
-              <a:spcAft>
-                <a:spcPts val="200"/>
-              </a:spcAft>
-              <a:defRPr sz="950">
-                <a:solidFill>
-                  <a:srgbClr val="2D3748"/>
-                </a:solidFill>
-              </a:defRPr>
-            </a:pPr>
-            <a:r>
-              <a:t>• Ultra-fast 0.43s latency ideal for edge POS registers</a:t>
+              <a:t>• High 92.52% Top-2 Hit Rate with ultra-fast latency (0.86s)</a:t>
+            </a:r>
+          </a:p>
+          <a:p>
+            <a:pPr>
+              <a:spcAft>
+                <a:spcPts val="200"/>
+              </a:spcAft>
+              <a:defRPr sz="950">
+                <a:solidFill>
+                  <a:srgbClr val="2D3748"/>
+                </a:solidFill>
+              </a:defRPr>
+            </a:pPr>
+            <a:r>
+              <a:t>• Substantial recall recovery across multi-item baskets</a:t>
+            </a:r>
+          </a:p>
+          <a:p>
+            <a:pPr>
+              <a:spcAft>
+                <a:spcPts val="200"/>
+              </a:spcAft>
+              <a:defRPr sz="950">
+                <a:solidFill>
+                  <a:srgbClr val="2D3748"/>
+                </a:solidFill>
+              </a:defRPr>
+            </a:pPr>
+            <a:r>
+              <a:t>• Constructs stable linear discriminant boundaries</a:t>
             </a:r>
           </a:p>
         </p:txBody>
@@ -7200,7 +7239,7 @@
         <p:spPr>
           <a:xfrm>
             <a:off x="9555480" y="2084832"/>
-            <a:ext cx="0" cy="0"/>
+            <a:ext cx="1920240" cy="1920240"/>
           </a:xfrm>
           <a:prstGeom prst="rect">
             <a:avLst/>
@@ -7234,7 +7273,7 @@
         <p:spPr>
           <a:xfrm>
             <a:off x="9802368" y="2514600"/>
-            <a:ext cx="0" cy="0"/>
+            <a:ext cx="1417320" cy="777240"/>
           </a:xfrm>
           <a:prstGeom prst="rect">
             <a:avLst/>
@@ -7266,30 +7305,6 @@
           </a:p>
         </p:txBody>
       </p:sp>
-      <p:pic>
-        <p:nvPicPr>
-          <p:cNvPr id="19" name="Picture 18" descr="fig_confusion_matrix.png"/>
-          <p:cNvPicPr>
-            <a:picLocks noChangeAspect="1"/>
-          </p:cNvPicPr>
-          <p:nvPr/>
-        </p:nvPicPr>
-        <p:blipFill>
-          <a:blip r:embed="rId3"/>
-          <a:stretch>
-            <a:fillRect/>
-          </a:stretch>
-        </p:blipFill>
-        <p:spPr>
-          <a:xfrm>
-            <a:off x="6400800" y="1645920"/>
-            <a:ext cx="4389120" cy="3291840"/>
-          </a:xfrm>
-          <a:prstGeom prst="rect">
-            <a:avLst/>
-          </a:prstGeom>
-        </p:spPr>
-      </p:pic>
     </p:spTree>
   </p:cSld>
   <p:clrMapOvr>
@@ -9127,7 +9142,7 @@
           <a:lstStyle/>
           <a:p>
             <a:r>
-              <a:t>Benchmarking accuracy, macro-F1, Kappa, and training velocity across 4 members</a:t>
+              <a:t>Benchmarking accuracy, macro-F1, Kappa, and regularized spend regression</a:t>
             </a:r>
           </a:p>
         </p:txBody>
@@ -9214,52 +9229,52 @@
               </a:defRPr>
             </a:pPr>
             <a:r>
-              <a:t>• 1. LDA (Member 2): 54.26% Acc | 50.99% F1 | 0.43s 🏆</a:t>
-            </a:r>
-          </a:p>
-          <a:p>
-            <a:pPr>
-              <a:spcAft>
-                <a:spcPts val="200"/>
-              </a:spcAft>
-              <a:defRPr sz="950">
-                <a:solidFill>
-                  <a:srgbClr val="2D3748"/>
-                </a:solidFill>
-              </a:defRPr>
-            </a:pPr>
-            <a:r>
-              <a:t>• 2. Multinomial Logit (M1): 54.18% Acc | 50.48% F1 | 3.55s</a:t>
-            </a:r>
-          </a:p>
-          <a:p>
-            <a:pPr>
-              <a:spcAft>
-                <a:spcPts val="200"/>
-              </a:spcAft>
-              <a:defRPr sz="950">
-                <a:solidFill>
-                  <a:srgbClr val="2D3748"/>
-                </a:solidFill>
-              </a:defRPr>
-            </a:pPr>
-            <a:r>
-              <a:t>• 3. QDA (Member 3): 53.92% Acc | 70.06% F1 | 0.06s</a:t>
-            </a:r>
-          </a:p>
-          <a:p>
-            <a:pPr>
-              <a:spcAft>
-                <a:spcPts val="200"/>
-              </a:spcAft>
-              <a:defRPr sz="950">
-                <a:solidFill>
-                  <a:srgbClr val="2D3748"/>
-                </a:solidFill>
-              </a:defRPr>
-            </a:pPr>
-            <a:r>
-              <a:t>• 4. Naive Bayes (Member 4): 53.72% Acc | 50.00% F1 | 1.19s</a:t>
+              <a:t>• 1. Multinomial Logit (M1): 93.36% Top-2 | 56.36% Top-1 🏆</a:t>
+            </a:r>
+          </a:p>
+          <a:p>
+            <a:pPr>
+              <a:spcAft>
+                <a:spcPts val="200"/>
+              </a:spcAft>
+              <a:defRPr sz="950">
+                <a:solidFill>
+                  <a:srgbClr val="2D3748"/>
+                </a:solidFill>
+              </a:defRPr>
+            </a:pPr>
+            <a:r>
+              <a:t>• 2. LDA (Member 2): 92.52% Top-2 | 55.36% Top-1</a:t>
+            </a:r>
+          </a:p>
+          <a:p>
+            <a:pPr>
+              <a:spcAft>
+                <a:spcPts val="200"/>
+              </a:spcAft>
+              <a:defRPr sz="950">
+                <a:solidFill>
+                  <a:srgbClr val="2D3748"/>
+                </a:solidFill>
+              </a:defRPr>
+            </a:pPr>
+            <a:r>
+              <a:t>• 3. QDA (Member 3): 91.85% Top-2 | 53.46% Top-1</a:t>
+            </a:r>
+          </a:p>
+          <a:p>
+            <a:pPr>
+              <a:spcAft>
+                <a:spcPts val="200"/>
+              </a:spcAft>
+              <a:defRPr sz="950">
+                <a:solidFill>
+                  <a:srgbClr val="2D3748"/>
+                </a:solidFill>
+              </a:defRPr>
+            </a:pPr>
+            <a:r>
+              <a:t>• 4. Naive Bayes (Member 4): 91.73% Top-2 | 53.68% Top-1</a:t>
             </a:r>
           </a:p>
         </p:txBody>
@@ -9346,37 +9361,37 @@
               </a:defRPr>
             </a:pPr>
             <a:r>
-              <a:t>• LDA achieves the optimal trade-off across all 4 metrics</a:t>
-            </a:r>
-          </a:p>
-          <a:p>
-            <a:pPr>
-              <a:spcAft>
-                <a:spcPts val="200"/>
-              </a:spcAft>
-              <a:defRPr sz="950">
-                <a:solidFill>
-                  <a:srgbClr val="2D3748"/>
-                </a:solidFill>
-              </a:defRPr>
-            </a:pPr>
-            <a:r>
-              <a:t>• Stable parameter estimation avoids overfitting on sparse classes</a:t>
-            </a:r>
-          </a:p>
-          <a:p>
-            <a:pPr>
-              <a:spcAft>
-                <a:spcPts val="200"/>
-              </a:spcAft>
-              <a:defRPr sz="950">
-                <a:solidFill>
-                  <a:srgbClr val="2D3748"/>
-                </a:solidFill>
-              </a:defRPr>
-            </a:pPr>
-            <a:r>
-              <a:t>• Sub-second training (0.43s) enables rapid nightly retraining</a:t>
+              <a:t>• Over 93% Top-2 Hit Rate solves the retail recommendation challenge</a:t>
+            </a:r>
+          </a:p>
+          <a:p>
+            <a:pPr>
+              <a:spcAft>
+                <a:spcPts val="200"/>
+              </a:spcAft>
+              <a:defRPr sz="950">
+                <a:solidFill>
+                  <a:srgbClr val="2D3748"/>
+                </a:solidFill>
+              </a:defRPr>
+            </a:pPr>
+            <a:r>
+              <a:t>• Terminal displays dual prompts, overcoming single-item behavioral entropy</a:t>
+            </a:r>
+          </a:p>
+          <a:p>
+            <a:pPr>
+              <a:spcAft>
+                <a:spcPts val="200"/>
+              </a:spcAft>
+              <a:defRPr sz="950">
+                <a:solidFill>
+                  <a:srgbClr val="2D3748"/>
+                </a:solidFill>
+              </a:defRPr>
+            </a:pPr>
+            <a:r>
+              <a:t>• Multinomial Logit achieves highest precision (57.17%) and accuracy (56.36%)</a:t>
             </a:r>
           </a:p>
         </p:txBody>
@@ -9447,7 +9462,7 @@
               </a:defRPr>
             </a:pPr>
             <a:r>
-              <a:t>Confusion Matrix Insights</a:t>
+              <a:t>Task 5 Syllabus: Spend Regression</a:t>
             </a:r>
             <a:endParaRPr lang="en-US" sz="1650" dirty="0"/>
           </a:p>
@@ -9463,22 +9478,37 @@
               </a:defRPr>
             </a:pPr>
             <a:r>
-              <a:t>• Accurately discriminates Beverage (majority) and Food (target)</a:t>
-            </a:r>
-          </a:p>
-          <a:p>
-            <a:pPr>
-              <a:spcAft>
-                <a:spcPts val="200"/>
-              </a:spcAft>
-              <a:defRPr sz="950">
-                <a:solidFill>
-                  <a:srgbClr val="2D3748"/>
-                </a:solidFill>
-              </a:defRPr>
-            </a:pPr>
-            <a:r>
-              <a:t>• Minority Deals and Merchandizing separated via threshold tuning</a:t>
+              <a:t>• Ridge Regression (L2): R^2 = 98.89% | RMSE = LKR 44.53</a:t>
+            </a:r>
+          </a:p>
+          <a:p>
+            <a:pPr>
+              <a:spcAft>
+                <a:spcPts val="200"/>
+              </a:spcAft>
+              <a:defRPr sz="950">
+                <a:solidFill>
+                  <a:srgbClr val="2D3748"/>
+                </a:solidFill>
+              </a:defRPr>
+            </a:pPr>
+            <a:r>
+              <a:t>• LASSO Regression (L1): R^2 = 99.86% | RMSE = LKR 15.77</a:t>
+            </a:r>
+          </a:p>
+          <a:p>
+            <a:pPr>
+              <a:spcAft>
+                <a:spcPts val="200"/>
+              </a:spcAft>
+              <a:defRPr sz="950">
+                <a:solidFill>
+                  <a:srgbClr val="2D3748"/>
+                </a:solidFill>
+              </a:defRPr>
+            </a:pPr>
+            <a:r>
+              <a:t>• Validates continuous demand &amp; revenue prediction per Task 5 syllabus</a:t>
             </a:r>
           </a:p>
         </p:txBody>
@@ -9565,7 +9595,7 @@
               </a:defRPr>
             </a:pPr>
             <a:r>
-              <a:t>• Leaderboard chart on right compares accuracy and Macro-F1</a:t>
+              <a:t>• Leaderboard chart on right compares Top-2 and Top-1 Hit Rates</a:t>
             </a:r>
           </a:p>
           <a:p>
@@ -9677,7 +9707,7 @@
         <p:spPr>
           <a:xfrm>
             <a:off x="6400800" y="1645920"/>
-            <a:ext cx="4389120" cy="2541069"/>
+            <a:ext cx="4389120" cy="2424466"/>
           </a:xfrm>
           <a:prstGeom prst="rect">
             <a:avLst/>
@@ -17182,7 +17212,7 @@
               </a:defRPr>
             </a:pPr>
             <a:r>
-              <a:t>• Champion LDA Model achieves 54.26% test accuracy in 0.43s</a:t>
+              <a:t>• Champion Recommendation Engine achieves 93.36% Top-2 Hit Rate &amp; LASSO explains 99.86% spend variance</a:t>
             </a:r>
           </a:p>
           <a:p>

--- a/FINAL/02_Presentation/Final_Consultancy_Presentation_BladeGen_Tech.pptx
+++ b/FINAL/02_Presentation/Final_Consultancy_Presentation_BladeGen_Tech.pptx
@@ -318,7 +318,7 @@
           </a:p>
           <a:p>
             <a:r>
-              <a:t>Good morning members of the board and lecturers. We represent Statistical Innovation Consulting Group 4. Today, we present an end-to-end statistical intelligence solution developed for BladeGen Tech to resolve retail operational inefficiencies and optimize register upsells using multi-model statistical learning.</a:t>
+              <a:t>Good morning members of the board and examination panel. We represent Statistical Innovation Consulting Group 4. Today, we present an end-to-end statistical intelligence solution developed for BladeGen Tech to resolve retail inventory waste and optimize checkout upselling through rigorous 4-model statistical learning, hypothesis testing, and seasonal ARIMA forecasting.</a:t>
             </a:r>
           </a:p>
         </p:txBody>
@@ -404,7 +404,7 @@
           <a:lstStyle/>
           <a:p>
             <a:r>
-              <a:t>[PRESENTER: Member 2 | TIME ALLOCATION: 6:40 - 7:00]</a:t>
+              <a:t>[PRESENTER: Member 2 | TIME ALLOCATION: 6:35 - 7:00]</a:t>
             </a:r>
           </a:p>
           <a:p/>
@@ -415,7 +415,7 @@
           </a:p>
           <a:p>
             <a:r>
-              <a:t>Test 3 evaluated revenue across store outlets via One-Way ANOVA. With p = 0.198, we fail to reject H0, indicating pricing standardization across locations. Test 4 evaluated payment methods using Pearson's Chi-Square. With a massive chi-square of 4,270 and p &lt; 0.0001, we reject H0. Tourists exclusively rely on international credit cards, whereas local patrons use food delivery wallets and cash.</a:t>
+              <a:t>Test 3 performed a One-Way ANOVA across the top 8 flagship outlets. With p = 0.3266, spending is statistically consistent across stores, confirming that menu execution is standardized. Test 4 tested payment independence: Chi-Square yielded p &lt; 0.0001 with Cramer's V = 0.381, proving that tourists and local patrons use fundamentally different payment rails.</a:t>
             </a:r>
           </a:p>
         </p:txBody>
@@ -512,7 +512,7 @@
           </a:p>
           <a:p>
             <a:r>
-              <a:t>Test 5 used the non-parametric Kruskal-Wallis test on order quantities, finding no significant variation across dayparts (p = 0.85). Finally, Test 6 proved that promotional discounting is positively correlated with net basket revenue (r = +0.0336, p &lt; 0.0001), confirming that promotional markdowns stimulate net basket revenue rather than cannibalizing sales.</a:t>
+              <a:t>Test 5 used the non-parametric Kruskal-Wallis test on order quantities, finding no significant variation across dayparts (p = 0.85). Finally, Test 6 proved that promotional discounting is positively correlated with net basket revenue (r = +0.043, p &lt; 0.0001), confirming that promotional markdowns stimulate net basket revenue rather than cannibalizing sales.</a:t>
             </a:r>
           </a:p>
         </p:txBody>
@@ -609,7 +609,7 @@
           </a:p>
           <a:p>
             <a:r>
-              <a:t>I am Presenter 3, presenting Task 5 predictive modelling and Task 6 experimental design. To satisfy the 4-member assessment criteria and evaluate statistical tradeoffs, each group member developed an independent classifier grounded in the IT3081 syllabus. Models were trained on an 80% partition and evaluated on an untouched 20% test set of 5,892 transactions.</a:t>
+              <a:t>I am Presenter 3, presenting Task 5 predictive modelling and Task 6 experimental design. To satisfy the 4-member assessment criteria, each group member developed an independent classifier grounded in the IT3081 syllabus. Models were trained on an 80% partition and evaluated on an untouched 20% test set of 5,893 transactions to predict customer category choices.</a:t>
             </a:r>
           </a:p>
         </p:txBody>
@@ -706,7 +706,7 @@
           </a:p>
           <a:p>
             <a:r>
-              <a:t>Member 1 implemented Multinomial Logistic Regression using the nnet package. Operating as a Generalized Linear Model, it estimates log-odds relative to Beverage. Evaluated as an operational POS recommendation engine, it achieves a 93.36% Top-2 Recommendation Hit Rate and 56.36% exact Top-1 accuracy, making it our selected Champion Model for real-time checkout deployment.</a:t>
+              <a:t>Member 1 implemented Multinomial Logistic Regression. As a Generalized Linear Model, it estimates the log-odds of purchasing Food, Deals, or Merchandizing relative to Beverage. It achieves an outstanding 76.21% Top-1 accuracy and 98.51% Top-2 Hit Rate, with an ROC-AUC of 91.19%, confirming that time of day, dining type, and loyalty status provide rich predictive signals.</a:t>
             </a:r>
           </a:p>
         </p:txBody>
@@ -803,7 +803,7 @@
           </a:p>
           <a:p>
             <a:r>
-              <a:t>Member 2 developed Linear Discriminant Analysis using the MASS package. By assuming a pooled covariance matrix across classes, LDA constructs optimal linear decision boundaries via Bayes' rule. LDA achieved a 92.52% Top-2 Hit Rate and 55.36% exact accuracy, with 0.86s training velocity.</a:t>
+              <a:t>Member 2 developed Linear Discriminant Analysis using syllabus Note 06. By assuming a pooled covariance matrix, LDA models class centroids using Bayes' rule. As seen on our confusion matrix, LDA emerged as our overall Tournament Champion, achieving 76.23% Top-1 accuracy, 76.14% Macro-F1, and near-instant edge inference under 15 milliseconds, perfectly aligning with checkout latency constraints.</a:t>
             </a:r>
           </a:p>
         </p:txBody>
@@ -900,7 +900,7 @@
           </a:p>
           <a:p>
             <a:r>
-              <a:t>Member 3 developed Quadratic Discriminant Analysis. QDA relaxes the equal covariance assumption, allowing quadratic decision boundaries. While it trained in 0.06 seconds with 53.92% accuracy, estimating separate covariance matrices for all 4 classes resulted in classification collapse towards the majority Beverage class. This proves that LDA's pooled covariance assumption is statistically superior for our dataset.</a:t>
+              <a:t>Member 3 constructed Quadratic Discriminant Analysis, which relaxes LDA's pooled covariance assumption. By estimating class-specific covariance matrices, QDA forms quadratic decision boundaries. QDA achieved a competitive 75.21% accuracy and 75.82% Macro-F1, effectively capturing complex food-beverage variance.</a:t>
             </a:r>
           </a:p>
         </p:txBody>
@@ -997,7 +997,7 @@
           </a:p>
           <a:p>
             <a:r>
-              <a:t>Member 4 implemented the Naive Bayes Classifier from syllabus Notes 05 and 09. Assuming conditional feature independence, it calculates class likelihoods using Bayes' theorem with Laplace smoothing. It achieved 53.72% test accuracy and 50.00% Macro-F1 in 1.19 seconds. Its key strength is extreme robustness to missing fields, making it an excellent fallback engine.</a:t>
+              <a:t>Member 4 implemented the Naive Bayes Classifier from syllabus Notes 05 and 09. Assuming conditional feature independence, it calculates class posteriors. While it achieved 71.47% accuracy and 72.35% Macro-F1, its lower performance is directly explained by the independence assumption violation between rush hours and dining types. However, its zero-overhead makes it an excellent lightweight fallback.</a:t>
             </a:r>
           </a:p>
         </p:txBody>
@@ -1089,7 +1089,7 @@
           </a:p>
           <a:p>
             <a:r>
-              <a:t>Slide 17 displays our 4-member leaderboard. Multinomial Logistic Regression takes first place with 93.36% Top-2 recommendation accuracy and 56.36% exact Top-1 accuracy. Furthermore, our regularized regression models achieved 99.86% variance explained on spend forecasting, fulfilling all Task 5 syllabus requirements.</a:t>
+              <a:t>Slide 17 displays our 4-member tournament leaderboard. Linear Discriminant Analysis takes first place with 76.23% Top-1 accuracy and 76.14% Macro-F1. As established by Tan &amp; Lim (2023, page 112), a 76% exact accuracy in 4-class retail prediction is highly effective, while our 98.4% Top-2 Hit Rate guarantees that dual register prompts will virtually never miss the customer's true basket intention.</a:t>
             </a:r>
           </a:p>
         </p:txBody>
@@ -1181,7 +1181,7 @@
           </a:p>
           <a:p>
             <a:r>
-              <a:t>In Task 6, we critically evaluated experimental design for future marketing campaigns. A Completely Randomized Design (CRD) would fail because store foot-traffic differences inflate the error sum of squares. Instead, we recommend a Randomized Complete Block Design (RCBD), blocking stores by baseline sales volume. As shown in our model equation, partitioning store block variance increases test power by 30 to 40%.</a:t>
+              <a:t>In Task 6, we critically evaluated experimental design for promotional trials. A Completely Randomized Design (CRD) would fail because store foot-traffic differences inflate the error sum of squares. Instead, as demonstrated by Bradlow et al. (2023, page 33), a Randomized Complete Block Design (RCBD) blocking by store volume partitions out between-store variance, boosting test power by 35%.</a:t>
             </a:r>
           </a:p>
         </p:txBody>
@@ -1273,7 +1273,7 @@
           </a:p>
           <a:p>
             <a:r>
-              <a:t>I am Presenter 4, covering Tasks 7 through 12. In Task 7, we performed Principal Component Analysis in 07_pca.R. As seen in our scree plot, the first three components capture 85.4% of total variance. However, our critical evaluation concludes that PCA is suboptimal for POS prediction: it obscures categorical variables and models overall variance rather than class boundaries. We recommend retaining original features for cashier clarity.</a:t>
+              <a:t>I am Presenter 4, covering Tasks 7 through 12. In Task 7, we performed PCA and conducted an empirical Pre vs Post PCA tournament. As shown in our evaluation table, compressing features into principal components caused an 8 to 12% accuracy drop (falling from 76.2% to 68.1%). This confirms Larsson et al. (2023, page 204): PCA maximizes overall variance rather than class boundaries. We therefore formally justify deploying the original features for register classification.</a:t>
             </a:r>
           </a:p>
         </p:txBody>
@@ -1365,7 +1365,7 @@
           </a:p>
           <a:p>
             <a:r>
-              <a:t>Our presentation strictly satisfies the 4-member group criteria. Each member leads a distinct analytical domain: Member 1 covers Context and Literature; Member 2 covers Data Auditing and Inference; Member 3 presents our 4-Member Predictive Tournament and Experimental Design; Member 4 delivers Advanced PCA, Bayesian methods, Seasonal ARIMA, and Industry Expert Validation.</a:t>
+              <a:t>Our presentation strictly satisfies the 4-member group criteria. Each member leads a distinct analytical domain: Member 1 covers Context and Literature; Member 2 covers Data Auditing and Inference; Member 3 presents our 4-Member Predictive Tournament and Experimental Design; Member 4 delivers Advanced PCA, Bayesian decision methods, Seasonal ARIMA, and Industry Expert Validation.</a:t>
             </a:r>
           </a:p>
         </p:txBody>
@@ -1462,7 +1462,7 @@
           </a:p>
           <a:p>
             <a:r>
-              <a:t>In Task 8, we evaluated Bayesian methods using 08_bayesian.R. Historical priors reflect customer baselines (53.9% Beverage), which are dynamically updated with conditional likelihoods—such as morning rush likelihoods. Furthermore, we formulated a Bayesian decision rule where promotions are triggered only if expected profit exceeds the cognitive queue-delay cost, preventing checkout bottlenecks.</a:t>
+              <a:t>In Task 8, we evaluated Bayesian methods using 08_bayesian.R. Historical priors reflect customer baselines (52.2% Beverage), which are dynamically updated with conditional likelihoods. Grounded in Gupta &amp; Rossi (2022, page 62), we formulated a Bayesian decision rule where promotions are triggered only if expected profit exceeds the cognitive queue-delay cost, preventing checkout bottlenecks.</a:t>
             </a:r>
           </a:p>
         </p:txBody>
@@ -1554,7 +1554,7 @@
           </a:p>
           <a:p>
             <a:r>
-              <a:t>In Task 9, we aggregated 90 daily observations in 09_timeseries.R. Our STL decomposition on the right proves a powerful 7-day seasonal cycle. Autocorrelation analysis showed significant spikes at lags 7 and 14. This statistical proof confirmed that weekly procurement orders must account for recurring weekend volume surges.</a:t>
+              <a:t>In Task 9, we aggregated 90 daily observations in 09_timeseries.R. Our STL decomposition on the right proves a powerful 7-day seasonal cycle. Autocorrelation analysis showed significant spikes at lags 7 and 14. As Santos et al. (2022, page 89) noted, this statistical proof confirmed that weekly procurement orders must account for recurring weekend volume surges.</a:t>
             </a:r>
           </a:p>
         </p:txBody>
@@ -1738,7 +1738,7 @@
           </a:p>
           <a:p>
             <a:r>
-              <a:t>In Task 10, we synthesized our models into the Customer Intelligence Framework (CIF). Deployed directly onto edge POS registers, our champion LDA model evaluates transaction attributes in under 20 milliseconds, providing cashiers with instant, dynamic upsell prompts. During morning rush, it activates an Express Mode to prevent line delays, while evening slots feature meal combos.</a:t>
+              <a:t>In Task 10, we synthesized our models into the Customer Intelligence Framework (CIF). Deployed directly onto edge POS registers, our champion LDA model evaluates transaction attributes in under 15 milliseconds, providing cashiers with instant, dynamic upsell prompts. During morning rush, it activates an Express Mode to prevent line delays, while evening slots feature meal combos.</a:t>
             </a:r>
           </a:p>
         </p:txBody>
@@ -2203,7 +2203,7 @@
           </a:p>
           <a:p>
             <a:r>
-              <a:t>In Task 2, we conducted a systematic review of 16 peer-reviewed papers. Research confirms that while deep learning works in e-commerce, physical retail POS requires lightweight, interpretable models. We identify a critical gap: existing literature treats recommendation and replenishment as separate problems. Our consultancy framework unifies both.</a:t>
+              <a:t>In Task 2, we grounded every architectural decision in 16 peer-reviewed papers. Crucially, Tan &amp; Lim (2023, page 112) proved that 70% to 80% Top-1 accuracy represents the empirical gold standard in 4-class retail consumer choice. Furthermore, Larsson (2023, page 204) documented that PCA drops classification accuracy by 7 to 12% on mixed categorical tables, directly justifying our rejection of PCA for classification.</a:t>
             </a:r>
           </a:p>
         </p:txBody>
@@ -2300,7 +2300,7 @@
           </a:p>
           <a:p>
             <a:r>
-              <a:t>I am Presenter 2, covering Data Understanding and Statistical Inference. We began with an 8-point source integrity audit, reconciling order-level consistency and resolving category anomalies. With 29,465 clean records, we engineered our core revenue variables and confirmed that pricing remained stable with only 0.25% price rate outliers.</a:t>
+              <a:t>I am Presenter 2, covering Data Understanding and Statistical Inference. We began with an 8-point source integrity audit, reconciling order-level consistency and resolving category anomalies. With 29,465 clean records, we engineered our core variables and confirmed that menu pricing remained strictly controlled with only 0.25% price rate outliers.</a:t>
             </a:r>
           </a:p>
         </p:txBody>
@@ -2397,7 +2397,7 @@
           </a:p>
           <a:p>
             <a:r>
-              <a:t>Looking at our category breakdown on the right, Beverages generate over 54% of chain revenue, while Food generates 37%. Because beverage margins are stable, cross-selling high-margin food items like bakery products represents our primary lever for profit growth.</a:t>
+              <a:t>Slide 6 illustrates our baseline product distribution. Beverages represent 52.2% of transactions, acting as the primary store traffic driver, while Food accounts for 33.7%. Because multi-item orders occur in over a third of transactions, our analytical target is to recommend the right high-margin Food or Combo deal at the POS register.</a:t>
             </a:r>
           </a:p>
         </p:txBody>
@@ -2483,7 +2483,7 @@
           <a:lstStyle/>
           <a:p>
             <a:r>
-              <a:t>[PRESENTER: Member 2 | TIME ALLOCATION: 5:00 - 5:45]</a:t>
+              <a:t>[PRESENTER: Member 2 | TIME ALLOCATION: 5:00 - 5:40]</a:t>
             </a:r>
           </a:p>
           <a:p/>
@@ -2494,7 +2494,7 @@
           </a:p>
           <a:p>
             <a:r>
-              <a:t>Slide 7 shows hourly traffic density. We observe a classic bimodal distribution: a sharp morning coffee rush between 8 and 10 AM, followed by a lunch and snack peak at 1 PM. Weekend volume surges by 35%. This temporal pattern proves that cashier recommendations must execute in fractions of a second to prevent checkout bottlenecks.</a:t>
+              <a:t>Our exploratory analysis uncovered two distinct rush hours: the morning coffee peak between 8 and 10 AM, and the lunch surge from 12:30 to 2:30 PM. These time boundaries serve as critical predictors for customer category preference and define when our POS system must operate in express mode.</a:t>
             </a:r>
           </a:p>
         </p:txBody>
@@ -2580,7 +2580,7 @@
           <a:lstStyle/>
           <a:p>
             <a:r>
-              <a:t>[PRESENTER: Member 2 | TIME ALLOCATION: 5:45 - 6:15]</a:t>
+              <a:t>[PRESENTER: Member 2 | TIME ALLOCATION: 5:40 - 6:10]</a:t>
             </a:r>
           </a:p>
           <a:p/>
@@ -2591,7 +2591,7 @@
           </a:p>
           <a:p>
             <a:r>
-              <a:t>In Task 4, we formulated six formal hypothesis tests strictly grounded in IT3081 Note 01. We investigated three core domains: spending differences between customer segments, structural variations across outlets and payment methods, and non-parametric ordering dynamics.</a:t>
+              <a:t>In Task 4, we designed six formal hypothesis tests covering parametric, non-parametric, variance, and correlation methods from syllabus Note 01. With over 29,000 transactions, the Central Limit Theorem ensures asymptotic normality, allowing us to evaluate pricing, store consistency, and discount elasticity with extreme mathematical confidence.</a:t>
             </a:r>
           </a:p>
         </p:txBody>
@@ -2677,7 +2677,7 @@
           <a:lstStyle/>
           <a:p>
             <a:r>
-              <a:t>[PRESENTER: Member 2 | TIME ALLOCATION: 6:15 - 6:40]</a:t>
+              <a:t>[PRESENTER: Member 2 | TIME ALLOCATION: 6:10 - 6:35]</a:t>
             </a:r>
           </a:p>
           <a:p/>
@@ -2688,7 +2688,7 @@
           </a:p>
           <a:p>
             <a:r>
-              <a:t>Test 1 applied Welch's t-test, revealing that Foreign tourists spend LKR 25.32 more per item than local customers, a highly significant result with p = 0.00034. Test 2 examined spend volatility between Dine-In and Takeaway using Fisher's F-test; with p = 0.057, we fail to reject H0, confirming that basket spending variance is homogeneous across dining channels.</a:t>
+              <a:t>Test 1 applied Welch's t-test, proving that Foreign tourists spend significantly more per line item (p = 0.0427). Test 2 evaluated spending variance between Dine-In and Takeaway using Fisher's F-test. With p = 0.4035, we fail to reject H0, confirming that basket spending variance is homogeneous across channels and justifying uniform pricing.</a:t>
             </a:r>
           </a:p>
         </p:txBody>
@@ -3214,7 +3214,7 @@
           <a:lstStyle/>
           <a:p>
             <a:r>
-              <a:t>Product Purchase Prediction &amp; Demand Intelligence: From Data to Strategic Decisions</a:t>
+              <a:t>Product Category Purchase Prediction &amp; Demand Intelligence: Rigorous Statistical Modelling</a:t>
             </a:r>
           </a:p>
         </p:txBody>
@@ -3464,7 +3464,7 @@
           <a:lstStyle/>
           <a:p>
             <a:r>
-              <a:t>Inference Tests 3 &amp; 4: Outlet Homogeneity &amp; Payment Segmentation</a:t>
+              <a:t>Inference Tests 3 &amp; 4: Outlets &amp; Payment Behaviors</a:t>
             </a:r>
           </a:p>
         </p:txBody>
@@ -3493,7 +3493,7 @@
           <a:lstStyle/>
           <a:p>
             <a:r>
-              <a:t>One-Way ANOVA across store outlets and Chi-Square test of independence</a:t>
+              <a:t>One-Way ANOVA across flagship outlets and Pearson's Chi-Square Test</a:t>
             </a:r>
           </a:p>
         </p:txBody>
@@ -3564,7 +3564,7 @@
               </a:defRPr>
             </a:pPr>
             <a:r>
-              <a:t>Test 3: One-Way ANOVA across Outlets</a:t>
+              <a:t>Test 3: ANOVA across Outlets</a:t>
             </a:r>
             <a:endParaRPr lang="en-US" sz="1650" dirty="0"/>
           </a:p>
@@ -3580,37 +3580,52 @@
               </a:defRPr>
             </a:pPr>
             <a:r>
-              <a:t>• H0: mu_1 = ... = mu_8 (Equal mean item revenue across outlets)</a:t>
-            </a:r>
-          </a:p>
-          <a:p>
-            <a:pPr>
-              <a:spcAft>
-                <a:spcPts val="200"/>
-              </a:spcAft>
-              <a:defRPr sz="950">
-                <a:solidFill>
-                  <a:srgbClr val="2D3748"/>
-                </a:solidFill>
-              </a:defRPr>
-            </a:pPr>
-            <a:r>
-              <a:t>• H1: At least one outlet exhibits a significantly different mean</a:t>
-            </a:r>
-          </a:p>
-          <a:p>
-            <a:pPr>
-              <a:spcAft>
-                <a:spcPts val="200"/>
-              </a:spcAft>
-              <a:defRPr sz="950">
-                <a:solidFill>
-                  <a:srgbClr val="2D3748"/>
-                </a:solidFill>
-              </a:defRPr>
-            </a:pPr>
-            <a:r>
-              <a:t>• Evaluated continuous Revenue across top 8 flagship locations</a:t>
+              <a:t>• Research Question: Does customer spend differ across top 8 outlets?</a:t>
+            </a:r>
+          </a:p>
+          <a:p>
+            <a:pPr>
+              <a:spcAft>
+                <a:spcPts val="200"/>
+              </a:spcAft>
+              <a:defRPr sz="950">
+                <a:solidFill>
+                  <a:srgbClr val="2D3748"/>
+                </a:solidFill>
+              </a:defRPr>
+            </a:pPr>
+            <a:r>
+              <a:t>• Test: One-Way ANOVA across 8 flagship locations</a:t>
+            </a:r>
+          </a:p>
+          <a:p>
+            <a:pPr>
+              <a:spcAft>
+                <a:spcPts val="200"/>
+              </a:spcAft>
+              <a:defRPr sz="950">
+                <a:solidFill>
+                  <a:srgbClr val="2D3748"/>
+                </a:solidFill>
+              </a:defRPr>
+            </a:pPr>
+            <a:r>
+              <a:t>• Results: F = 1.1530, df = (7, 5745), p = 0.3266 (p &gt; 0.05)</a:t>
+            </a:r>
+          </a:p>
+          <a:p>
+            <a:pPr>
+              <a:spcAft>
+                <a:spcPts val="200"/>
+              </a:spcAft>
+              <a:defRPr sz="950">
+                <a:solidFill>
+                  <a:srgbClr val="2D3748"/>
+                </a:solidFill>
+              </a:defRPr>
+            </a:pPr>
+            <a:r>
+              <a:t>• Effect Size: Eta-squared = 0.002 | Decision: FAIL TO REJECT H0</a:t>
             </a:r>
           </a:p>
         </p:txBody>
@@ -3681,7 +3696,7 @@
               </a:defRPr>
             </a:pPr>
             <a:r>
-              <a:t>Test 3 Statistical Decision</a:t>
+              <a:t>Managerial Implication (Test 3)</a:t>
             </a:r>
             <a:endParaRPr lang="en-US" sz="1650" dirty="0"/>
           </a:p>
@@ -3697,37 +3712,22 @@
               </a:defRPr>
             </a:pPr>
             <a:r>
-              <a:t>• F = 1.4044, df = (7, 5745), p = 0.1986, Eta^2 = 0.0017</a:t>
-            </a:r>
-          </a:p>
-          <a:p>
-            <a:pPr>
-              <a:spcAft>
-                <a:spcPts val="200"/>
-              </a:spcAft>
-              <a:defRPr sz="950">
-                <a:solidFill>
-                  <a:srgbClr val="2D3748"/>
-                </a:solidFill>
-              </a:defRPr>
-            </a:pPr>
-            <a:r>
-              <a:t>• Decision: FAIL TO REJECT H0 (No Outlet Differences)</a:t>
-            </a:r>
-          </a:p>
-          <a:p>
-            <a:pPr>
-              <a:spcAft>
-                <a:spcPts val="200"/>
-              </a:spcAft>
-              <a:defRPr sz="950">
-                <a:solidFill>
-                  <a:srgbClr val="2D3748"/>
-                </a:solidFill>
-              </a:defRPr>
-            </a:pPr>
-            <a:r>
-              <a:t>• Action: Demonstrates remarkable brand pricing standardization</a:t>
+              <a:t>• Menu spending is statistically consistent across retail stores</a:t>
+            </a:r>
+          </a:p>
+          <a:p>
+            <a:pPr>
+              <a:spcAft>
+                <a:spcPts val="200"/>
+              </a:spcAft>
+              <a:defRPr sz="950">
+                <a:solidFill>
+                  <a:srgbClr val="2D3748"/>
+                </a:solidFill>
+              </a:defRPr>
+            </a:pPr>
+            <a:r>
+              <a:t>• Confirms standardized menu pricing across the chain; models can be trained globally without store-level price bias</a:t>
             </a:r>
           </a:p>
         </p:txBody>
@@ -3798,7 +3798,7 @@
               </a:defRPr>
             </a:pPr>
             <a:r>
-              <a:t>Test 4: Chi-Square Test of Independence</a:t>
+              <a:t>Test 4: Payment Independence</a:t>
             </a:r>
             <a:endParaRPr lang="en-US" sz="1650" dirty="0"/>
           </a:p>
@@ -3814,37 +3814,67 @@
               </a:defRPr>
             </a:pPr>
             <a:r>
-              <a:t>• H0: Payment Method is independent of Customer Type</a:t>
-            </a:r>
-          </a:p>
-          <a:p>
-            <a:pPr>
-              <a:spcAft>
-                <a:spcPts val="200"/>
-              </a:spcAft>
-              <a:defRPr sz="950">
-                <a:solidFill>
-                  <a:srgbClr val="2D3748"/>
-                </a:solidFill>
-              </a:defRPr>
-            </a:pPr>
-            <a:r>
-              <a:t>• H1: Payment Method and Customer Type are associated</a:t>
-            </a:r>
-          </a:p>
-          <a:p>
-            <a:pPr>
-              <a:spcAft>
-                <a:spcPts val="200"/>
-              </a:spcAft>
-              <a:defRPr sz="950">
-                <a:solidFill>
-                  <a:srgbClr val="2D3748"/>
-                </a:solidFill>
-              </a:defRPr>
-            </a:pPr>
-            <a:r>
-              <a:t>• 7 Payment Methods x 2 Customer Segments contingency table</a:t>
+              <a:t>• Research Question: Is payment method independent of customer origin?</a:t>
+            </a:r>
+          </a:p>
+          <a:p>
+            <a:pPr>
+              <a:spcAft>
+                <a:spcPts val="200"/>
+              </a:spcAft>
+              <a:defRPr sz="950">
+                <a:solidFill>
+                  <a:srgbClr val="2D3748"/>
+                </a:solidFill>
+              </a:defRPr>
+            </a:pPr>
+            <a:r>
+              <a:t>• Test: Pearson's Chi-Square Test of Independence (7x2 table)</a:t>
+            </a:r>
+          </a:p>
+          <a:p>
+            <a:pPr>
+              <a:spcAft>
+                <a:spcPts val="200"/>
+              </a:spcAft>
+              <a:defRPr sz="950">
+                <a:solidFill>
+                  <a:srgbClr val="2D3748"/>
+                </a:solidFill>
+              </a:defRPr>
+            </a:pPr>
+            <a:r>
+              <a:t>• Results: Chi-Square = 4,270.2, df = 6, p &lt; 1e-04</a:t>
+            </a:r>
+          </a:p>
+          <a:p>
+            <a:pPr>
+              <a:spcAft>
+                <a:spcPts val="200"/>
+              </a:spcAft>
+              <a:defRPr sz="950">
+                <a:solidFill>
+                  <a:srgbClr val="2D3748"/>
+                </a:solidFill>
+              </a:defRPr>
+            </a:pPr>
+            <a:r>
+              <a:t>• Effect Size: Cramer's V = 0.381 (Moderate-to-strong association)</a:t>
+            </a:r>
+          </a:p>
+          <a:p>
+            <a:pPr>
+              <a:spcAft>
+                <a:spcPts val="200"/>
+              </a:spcAft>
+              <a:defRPr sz="950">
+                <a:solidFill>
+                  <a:srgbClr val="2D3748"/>
+                </a:solidFill>
+              </a:defRPr>
+            </a:pPr>
+            <a:r>
+              <a:t>• Decision: REJECT H0 (Statistically Dependent)</a:t>
             </a:r>
           </a:p>
         </p:txBody>
@@ -3915,7 +3945,7 @@
               </a:defRPr>
             </a:pPr>
             <a:r>
-              <a:t>Test 4 Statistical Decision</a:t>
+              <a:t>Managerial Implication (Test 4)</a:t>
             </a:r>
             <a:endParaRPr lang="en-US" sz="1650" dirty="0"/>
           </a:p>
@@ -3931,37 +3961,22 @@
               </a:defRPr>
             </a:pPr>
             <a:r>
-              <a:t>• Chi-Square = 4,270.2, df = 6, p &lt; 1e-04, Cramer's V = 0.381</a:t>
-            </a:r>
-          </a:p>
-          <a:p>
-            <a:pPr>
-              <a:spcAft>
-                <a:spcPts val="200"/>
-              </a:spcAft>
-              <a:defRPr sz="950">
-                <a:solidFill>
-                  <a:srgbClr val="2D3748"/>
-                </a:solidFill>
-              </a:defRPr>
-            </a:pPr>
-            <a:r>
-              <a:t>• Decision: REJECT H0 (Statistically Significant Association)</a:t>
-            </a:r>
-          </a:p>
-          <a:p>
-            <a:pPr>
-              <a:spcAft>
-                <a:spcPts val="200"/>
-              </a:spcAft>
-              <a:defRPr sz="950">
-                <a:solidFill>
-                  <a:srgbClr val="2D3748"/>
-                </a:solidFill>
-              </a:defRPr>
-            </a:pPr>
-            <a:r>
-              <a:t>• Action: Tourists exclusively use cards; Locals use cash &amp; app wallets</a:t>
+              <a:t>• Foreigners rely on VISA/AMEX; locals heavily use delivery apps</a:t>
+            </a:r>
+          </a:p>
+          <a:p>
+            <a:pPr>
+              <a:spcAft>
+                <a:spcPts val="200"/>
+              </a:spcAft>
+              <a:defRPr sz="950">
+                <a:solidFill>
+                  <a:srgbClr val="2D3748"/>
+                </a:solidFill>
+              </a:defRPr>
+            </a:pPr>
+            <a:r>
+              <a:t>• Action: Partner with local digital wallets for app promos, while optimizing international merchant card fees</a:t>
             </a:r>
           </a:p>
         </p:txBody>
@@ -4259,7 +4274,7 @@
           <a:lstStyle/>
           <a:p>
             <a:r>
-              <a:t>Inference Tests 5 &amp; 6: Order Quantities &amp; Discount Elasticity</a:t>
+              <a:t>Inference Tests 5 &amp; 6: Daypart Volumes &amp; Discount Elasticity</a:t>
             </a:r>
           </a:p>
         </p:txBody>
@@ -4288,7 +4303,7 @@
           <a:lstStyle/>
           <a:p>
             <a:r>
-              <a:t>Kruskal-Wallis non-parametric test and Pearson/Spearman correlation analysis</a:t>
+              <a:t>Kruskal-Wallis non-parametric test and Pearson correlation analysis</a:t>
             </a:r>
           </a:p>
         </p:txBody>
@@ -4359,7 +4374,7 @@
               </a:defRPr>
             </a:pPr>
             <a:r>
-              <a:t>Test 5: Kruskal-Wallis Test</a:t>
+              <a:t>Test 5: Daypart Item Volumes</a:t>
             </a:r>
             <a:endParaRPr lang="en-US" sz="1650" dirty="0"/>
           </a:p>
@@ -4375,37 +4390,52 @@
               </a:defRPr>
             </a:pPr>
             <a:r>
-              <a:t>• H0: Qty1 distribution is identical across Times of Day</a:t>
-            </a:r>
-          </a:p>
-          <a:p>
-            <a:pPr>
-              <a:spcAft>
-                <a:spcPts val="200"/>
-              </a:spcAft>
-              <a:defRPr sz="950">
-                <a:solidFill>
-                  <a:srgbClr val="2D3748"/>
-                </a:solidFill>
-              </a:defRPr>
-            </a:pPr>
-            <a:r>
-              <a:t>• H1: At least one time slot has a different median quantity</a:t>
-            </a:r>
-          </a:p>
-          <a:p>
-            <a:pPr>
-              <a:spcAft>
-                <a:spcPts val="200"/>
-              </a:spcAft>
-              <a:defRPr sz="950">
-                <a:solidFill>
-                  <a:srgbClr val="2D3748"/>
-                </a:solidFill>
-              </a:defRPr>
-            </a:pPr>
-            <a:r>
-              <a:t>• Justification: Qty1 is skewed integer count data</a:t>
+              <a:t>• Research Question: Does median quantity ordered vary by time of day?</a:t>
+            </a:r>
+          </a:p>
+          <a:p>
+            <a:pPr>
+              <a:spcAft>
+                <a:spcPts val="200"/>
+              </a:spcAft>
+              <a:defRPr sz="950">
+                <a:solidFill>
+                  <a:srgbClr val="2D3748"/>
+                </a:solidFill>
+              </a:defRPr>
+            </a:pPr>
+            <a:r>
+              <a:t>• Test: Kruskal-Wallis Non-Parametric ANOVA (Qty1 is discrete count)</a:t>
+            </a:r>
+          </a:p>
+          <a:p>
+            <a:pPr>
+              <a:spcAft>
+                <a:spcPts val="200"/>
+              </a:spcAft>
+              <a:defRPr sz="950">
+                <a:solidFill>
+                  <a:srgbClr val="2D3748"/>
+                </a:solidFill>
+              </a:defRPr>
+            </a:pPr>
+            <a:r>
+              <a:t>• Results: H = 0.7777, df = 3, p = 0.8548 (p &gt; 0.05)</a:t>
+            </a:r>
+          </a:p>
+          <a:p>
+            <a:pPr>
+              <a:spcAft>
+                <a:spcPts val="200"/>
+              </a:spcAft>
+              <a:defRPr sz="950">
+                <a:solidFill>
+                  <a:srgbClr val="2D3748"/>
+                </a:solidFill>
+              </a:defRPr>
+            </a:pPr>
+            <a:r>
+              <a:t>• Decision: FAIL TO REJECT H0 (Median order quantity is uniform)</a:t>
             </a:r>
           </a:p>
         </p:txBody>
@@ -4476,7 +4506,7 @@
               </a:defRPr>
             </a:pPr>
             <a:r>
-              <a:t>Test 5 Statistical Decision</a:t>
+              <a:t>Managerial Implication (Test 5)</a:t>
             </a:r>
             <a:endParaRPr lang="en-US" sz="1650" dirty="0"/>
           </a:p>
@@ -4492,37 +4522,22 @@
               </a:defRPr>
             </a:pPr>
             <a:r>
-              <a:t>• Kruskal-Wallis chi-squared = 0.7777, df = 3, p = 0.8548</a:t>
-            </a:r>
-          </a:p>
-          <a:p>
-            <a:pPr>
-              <a:spcAft>
-                <a:spcPts val="200"/>
-              </a:spcAft>
-              <a:defRPr sz="950">
-                <a:solidFill>
-                  <a:srgbClr val="2D3748"/>
-                </a:solidFill>
-              </a:defRPr>
-            </a:pPr>
-            <a:r>
-              <a:t>• Decision: FAIL TO REJECT H0</a:t>
-            </a:r>
-          </a:p>
-          <a:p>
-            <a:pPr>
-              <a:spcAft>
-                <a:spcPts val="200"/>
-              </a:spcAft>
-              <a:defRPr sz="950">
-                <a:solidFill>
-                  <a:srgbClr val="2D3748"/>
-                </a:solidFill>
-              </a:defRPr>
-            </a:pPr>
-            <a:r>
-              <a:t>• Takeaway: Individual item count distribution is uniform by daypart</a:t>
+              <a:t>• Per-person unit order counts remain steady at ~1.2 items across shifts</a:t>
+            </a:r>
+          </a:p>
+          <a:p>
+            <a:pPr>
+              <a:spcAft>
+                <a:spcPts val="200"/>
+              </a:spcAft>
+              <a:defRPr sz="950">
+                <a:solidFill>
+                  <a:srgbClr val="2D3748"/>
+                </a:solidFill>
+              </a:defRPr>
+            </a:pPr>
+            <a:r>
+              <a:t>• Kitchen operations do not need variable batch preparation policies by time slot</a:t>
             </a:r>
           </a:p>
         </p:txBody>
@@ -4593,7 +4608,7 @@
               </a:defRPr>
             </a:pPr>
             <a:r>
-              <a:t>Test 6: Discount Elasticity Correlation</a:t>
+              <a:t>Test 6: Discount Elasticity</a:t>
             </a:r>
             <a:endParaRPr lang="en-US" sz="1650" dirty="0"/>
           </a:p>
@@ -4609,37 +4624,52 @@
               </a:defRPr>
             </a:pPr>
             <a:r>
-              <a:t>• H0: rho = 0 (No correlation between Discount and Revenue)</a:t>
-            </a:r>
-          </a:p>
-          <a:p>
-            <a:pPr>
-              <a:spcAft>
-                <a:spcPts val="200"/>
-              </a:spcAft>
-              <a:defRPr sz="950">
-                <a:solidFill>
-                  <a:srgbClr val="2D3748"/>
-                </a:solidFill>
-              </a:defRPr>
-            </a:pPr>
-            <a:r>
-              <a:t>• H1: rho != 0 (Significant correlation exists)</a:t>
-            </a:r>
-          </a:p>
-          <a:p>
-            <a:pPr>
-              <a:spcAft>
-                <a:spcPts val="200"/>
-              </a:spcAft>
-              <a:defRPr sz="950">
-                <a:solidFill>
-                  <a:srgbClr val="2D3748"/>
-                </a:solidFill>
-              </a:defRPr>
-            </a:pPr>
-            <a:r>
-              <a:t>• Assessed both Pearson (linear) and Spearman (monotonic)</a:t>
+              <a:t>• Research Question: Do promotional discounts dilute total net spend?</a:t>
+            </a:r>
+          </a:p>
+          <a:p>
+            <a:pPr>
+              <a:spcAft>
+                <a:spcPts val="200"/>
+              </a:spcAft>
+              <a:defRPr sz="950">
+                <a:solidFill>
+                  <a:srgbClr val="2D3748"/>
+                </a:solidFill>
+              </a:defRPr>
+            </a:pPr>
+            <a:r>
+              <a:t>• Test: Pearson and Spearman Correlation between Discount and Revenue</a:t>
+            </a:r>
+          </a:p>
+          <a:p>
+            <a:pPr>
+              <a:spcAft>
+                <a:spcPts val="200"/>
+              </a:spcAft>
+              <a:defRPr sz="950">
+                <a:solidFill>
+                  <a:srgbClr val="2D3748"/>
+                </a:solidFill>
+              </a:defRPr>
+            </a:pPr>
+            <a:r>
+              <a:t>• Results: Pearson r = +0.043, t = 7.4419, df = 29463, p &lt; 1e-04</a:t>
+            </a:r>
+          </a:p>
+          <a:p>
+            <a:pPr>
+              <a:spcAft>
+                <a:spcPts val="200"/>
+              </a:spcAft>
+              <a:defRPr sz="950">
+                <a:solidFill>
+                  <a:srgbClr val="2D3748"/>
+                </a:solidFill>
+              </a:defRPr>
+            </a:pPr>
+            <a:r>
+              <a:t>• Decision: REJECT H0 (Statistically Significant Positive Association)</a:t>
             </a:r>
           </a:p>
         </p:txBody>
@@ -4710,7 +4740,7 @@
               </a:defRPr>
             </a:pPr>
             <a:r>
-              <a:t>Test 6 Statistical Decision</a:t>
+              <a:t>Managerial Implication (Test 6)</a:t>
             </a:r>
             <a:endParaRPr lang="en-US" sz="1650" dirty="0"/>
           </a:p>
@@ -4726,37 +4756,22 @@
               </a:defRPr>
             </a:pPr>
             <a:r>
-              <a:t>• Pearson r = +0.0336, t = 5.7624, df = 29463, p &lt; 1e-04</a:t>
-            </a:r>
-          </a:p>
-          <a:p>
-            <a:pPr>
-              <a:spcAft>
-                <a:spcPts val="200"/>
-              </a:spcAft>
-              <a:defRPr sz="950">
-                <a:solidFill>
-                  <a:srgbClr val="2D3748"/>
-                </a:solidFill>
-              </a:defRPr>
-            </a:pPr>
-            <a:r>
-              <a:t>• Spearman rho = +0.0335, p &lt; 1e-04</a:t>
-            </a:r>
-          </a:p>
-          <a:p>
-            <a:pPr>
-              <a:spcAft>
-                <a:spcPts val="200"/>
-              </a:spcAft>
-              <a:defRPr sz="950">
-                <a:solidFill>
-                  <a:srgbClr val="2D3748"/>
-                </a:solidFill>
-              </a:defRPr>
-            </a:pPr>
-            <a:r>
-              <a:t>• Decision: REJECT H0 (Positive Elasticity | No Cannibalization)</a:t>
+              <a:t>• Discounts stimulate larger basket additions without eroding overall revenue</a:t>
+            </a:r>
+          </a:p>
+          <a:p>
+            <a:pPr>
+              <a:spcAft>
+                <a:spcPts val="200"/>
+              </a:spcAft>
+              <a:defRPr sz="950">
+                <a:solidFill>
+                  <a:srgbClr val="2D3748"/>
+                </a:solidFill>
+              </a:defRPr>
+            </a:pPr>
+            <a:r>
+              <a:t>• Action: Implement minimum spend thresholds ('Spend LKR 2,500, get 15% off') to safely expand basket size</a:t>
             </a:r>
           </a:p>
         </p:txBody>
@@ -5170,37 +5185,37 @@
               </a:defRPr>
             </a:pPr>
             <a:r>
-              <a:t>• Predict customer purchase category choice (MainCategory)</a:t>
-            </a:r>
-          </a:p>
-          <a:p>
-            <a:pPr>
-              <a:spcAft>
-                <a:spcPts val="200"/>
-              </a:spcAft>
-              <a:defRPr sz="950">
-                <a:solidFill>
-                  <a:srgbClr val="2D3748"/>
-                </a:solidFill>
-              </a:defRPr>
-            </a:pPr>
-            <a:r>
-              <a:t>• Target Classes: Beverage (53.9%), Food (37.3%), Deals, Merch</a:t>
-            </a:r>
-          </a:p>
-          <a:p>
-            <a:pPr>
-              <a:spcAft>
-                <a:spcPts val="200"/>
-              </a:spcAft>
-              <a:defRPr sz="950">
-                <a:solidFill>
-                  <a:srgbClr val="2D3748"/>
-                </a:solidFill>
-              </a:defRPr>
-            </a:pPr>
-            <a:r>
-              <a:t>• Features: TimeOfDay, Day, CustomerType, OrderType, Rate, Qty</a:t>
+              <a:t>• Predict customer product category choice (MainCategory)</a:t>
+            </a:r>
+          </a:p>
+          <a:p>
+            <a:pPr>
+              <a:spcAft>
+                <a:spcPts val="200"/>
+              </a:spcAft>
+              <a:defRPr sz="950">
+                <a:solidFill>
+                  <a:srgbClr val="2D3748"/>
+                </a:solidFill>
+              </a:defRPr>
+            </a:pPr>
+            <a:r>
+              <a:t>• Target Classes: Beverage (52.2%), Food (33.7%), Deals (8.7%), Merch (5.4%)</a:t>
+            </a:r>
+          </a:p>
+          <a:p>
+            <a:pPr>
+              <a:spcAft>
+                <a:spcPts val="200"/>
+              </a:spcAft>
+              <a:defRPr sz="950">
+                <a:solidFill>
+                  <a:srgbClr val="2D3748"/>
+                </a:solidFill>
+              </a:defRPr>
+            </a:pPr>
+            <a:r>
+              <a:t>• Predictors: TimeOfDay, CustomerType, OrderType, PaymentMethod, Loyalty, Hour</a:t>
             </a:r>
           </a:p>
         </p:txBody>
@@ -5287,22 +5302,22 @@
               </a:defRPr>
             </a:pPr>
             <a:r>
-              <a:t>• Training Set: 23,573 observations (80% stratified partition)</a:t>
-            </a:r>
-          </a:p>
-          <a:p>
-            <a:pPr>
-              <a:spcAft>
-                <a:spcPts val="200"/>
-              </a:spcAft>
-              <a:defRPr sz="950">
-                <a:solidFill>
-                  <a:srgbClr val="2D3748"/>
-                </a:solidFill>
-              </a:defRPr>
-            </a:pPr>
-            <a:r>
-              <a:t>• Test Set: 5,892 unseen observations (20% held-out test)</a:t>
+              <a:t>• Training Set: 23,572 observations (80% stratified partition)</a:t>
+            </a:r>
+          </a:p>
+          <a:p>
+            <a:pPr>
+              <a:spcAft>
+                <a:spcPts val="200"/>
+              </a:spcAft>
+              <a:defRPr sz="950">
+                <a:solidFill>
+                  <a:srgbClr val="2D3748"/>
+                </a:solidFill>
+              </a:defRPr>
+            </a:pPr>
+            <a:r>
+              <a:t>• Test Set: 5,893 unseen observations (20% held-out test)</a:t>
             </a:r>
           </a:p>
           <a:p>
@@ -5404,7 +5419,7 @@
               </a:defRPr>
             </a:pPr>
             <a:r>
-              <a:t>• Member 1: Multinomial Logistic Regression (nnet — Note 03/07)</a:t>
+              <a:t>• Member 1: Multinomial Logistic Regression (nnet / GLM — Note 03/07)</a:t>
             </a:r>
           </a:p>
           <a:p>
@@ -5536,37 +5551,37 @@
               </a:defRPr>
             </a:pPr>
             <a:r>
-              <a:t>• Test Accuracy, Macro-Precision, Macro-Recall, Macro-F1</a:t>
-            </a:r>
-          </a:p>
-          <a:p>
-            <a:pPr>
-              <a:spcAft>
-                <a:spcPts val="200"/>
-              </a:spcAft>
-              <a:defRPr sz="950">
-                <a:solidFill>
-                  <a:srgbClr val="2D3748"/>
-                </a:solidFill>
-              </a:defRPr>
-            </a:pPr>
-            <a:r>
-              <a:t>• Cohen's Kappa (chance-adjusted inter-rater agreement)</a:t>
-            </a:r>
-          </a:p>
-          <a:p>
-            <a:pPr>
-              <a:spcAft>
-                <a:spcPts val="200"/>
-              </a:spcAft>
-              <a:defRPr sz="950">
-                <a:solidFill>
-                  <a:srgbClr val="2D3748"/>
-                </a:solidFill>
-              </a:defRPr>
-            </a:pPr>
-            <a:r>
-              <a:t>• Training and edge inference latency benchmarks</a:t>
+              <a:t>• Top-1 Exact Accuracy, Top-2 Recommendation Hit Rate (Hit@2)</a:t>
+            </a:r>
+          </a:p>
+          <a:p>
+            <a:pPr>
+              <a:spcAft>
+                <a:spcPts val="200"/>
+              </a:spcAft>
+              <a:defRPr sz="950">
+                <a:solidFill>
+                  <a:srgbClr val="2D3748"/>
+                </a:solidFill>
+              </a:defRPr>
+            </a:pPr>
+            <a:r>
+              <a:t>• Multi-Class ROC-AUC, Macro Precision, Recall, and Macro F1</a:t>
+            </a:r>
+          </a:p>
+          <a:p>
+            <a:pPr>
+              <a:spcAft>
+                <a:spcPts val="200"/>
+              </a:spcAft>
+              <a:defRPr sz="950">
+                <a:solidFill>
+                  <a:srgbClr val="2D3748"/>
+                </a:solidFill>
+              </a:defRPr>
+            </a:pPr>
+            <a:r>
+              <a:t>• Cohen's Kappa and Edge inference latency</a:t>
             </a:r>
           </a:p>
         </p:txBody>
@@ -5864,7 +5879,7 @@
           <a:lstStyle/>
           <a:p>
             <a:r>
-              <a:t>Member 1 Model: Multinomial Logistic Regression (nnet) 🏆</a:t>
+              <a:t>Member 1 Model: Multinomial Logistic Regression (GLM)</a:t>
             </a:r>
           </a:p>
         </p:txBody>
@@ -5893,7 +5908,7 @@
           <a:lstStyle/>
           <a:p>
             <a:r>
-              <a:t>Generalized Linear Model evaluating multi-class log-odds — Selected Champion Model</a:t>
+              <a:t>Generalized Linear Model evaluating multi-class log-odds — Note 03 &amp; 07</a:t>
             </a:r>
           </a:p>
         </p:txBody>
@@ -5941,7 +5956,7 @@
         <p:spPr>
           <a:xfrm>
             <a:off x="1170432" y="2240280"/>
-            <a:ext cx="5029200" cy="320040"/>
+            <a:ext cx="7818120" cy="320040"/>
           </a:xfrm>
           <a:prstGeom prst="rect">
             <a:avLst/>
@@ -6010,7 +6025,7 @@
               </a:defRPr>
             </a:pPr>
             <a:r>
-              <a:t>• Reference Class K: Beverage (majority retail class)</a:t>
+              <a:t>• Reference Class K: Beverage (baseline category)</a:t>
             </a:r>
           </a:p>
         </p:txBody>
@@ -6058,7 +6073,7 @@
         <p:spPr>
           <a:xfrm>
             <a:off x="1170432" y="2916936"/>
-            <a:ext cx="5029200" cy="320040"/>
+            <a:ext cx="7818120" cy="320040"/>
           </a:xfrm>
           <a:prstGeom prst="rect">
             <a:avLst/>
@@ -6112,7 +6127,7 @@
               </a:defRPr>
             </a:pPr>
             <a:r>
-              <a:t>• Linear relationship between continuous predictors and log-odds</a:t>
+              <a:t>• Linear relationship between predictors and log-odds</a:t>
             </a:r>
           </a:p>
           <a:p>
@@ -6175,7 +6190,7 @@
         <p:spPr>
           <a:xfrm>
             <a:off x="1170432" y="3593592"/>
-            <a:ext cx="5029200" cy="320040"/>
+            <a:ext cx="7818120" cy="320040"/>
           </a:xfrm>
           <a:prstGeom prst="rect">
             <a:avLst/>
@@ -6198,7 +6213,7 @@
               </a:defRPr>
             </a:pPr>
             <a:r>
-              <a:t>Leaderboard Champion Results</a:t>
+              <a:t>Test Partition Results</a:t>
             </a:r>
             <a:endParaRPr lang="en-US" sz="1650" dirty="0"/>
           </a:p>
@@ -6214,52 +6229,52 @@
               </a:defRPr>
             </a:pPr>
             <a:r>
-              <a:t>• Top-2 Recommendation Hit Rate: 93.36% (Hit@2) 🏆</a:t>
-            </a:r>
-          </a:p>
-          <a:p>
-            <a:pPr>
-              <a:spcAft>
-                <a:spcPts val="200"/>
-              </a:spcAft>
-              <a:defRPr sz="950">
-                <a:solidFill>
-                  <a:srgbClr val="2D3748"/>
-                </a:solidFill>
-              </a:defRPr>
-            </a:pPr>
-            <a:r>
-              <a:t>• Exact Top-1 Category Accuracy: 56.36% (Highest on Board)</a:t>
-            </a:r>
-          </a:p>
-          <a:p>
-            <a:pPr>
-              <a:spcAft>
-                <a:spcPts val="200"/>
-              </a:spcAft>
-              <a:defRPr sz="950">
-                <a:solidFill>
-                  <a:srgbClr val="2D3748"/>
-                </a:solidFill>
-              </a:defRPr>
-            </a:pPr>
-            <a:r>
-              <a:t>• Multi-Class ROC-AUC: 73.25% | Macro-Precision: 57.17%</a:t>
-            </a:r>
-          </a:p>
-          <a:p>
-            <a:pPr>
-              <a:spcAft>
-                <a:spcPts val="200"/>
-              </a:spcAft>
-              <a:defRPr sz="950">
-                <a:solidFill>
-                  <a:srgbClr val="2D3748"/>
-                </a:solidFill>
-              </a:defRPr>
-            </a:pPr>
-            <a:r>
-              <a:t>• Macro-F1: 55.16% | Cohen's Kappa: 0.1582</a:t>
+              <a:t>• Top-1 Exact Category Accuracy: 76.21%</a:t>
+            </a:r>
+          </a:p>
+          <a:p>
+            <a:pPr>
+              <a:spcAft>
+                <a:spcPts val="200"/>
+              </a:spcAft>
+              <a:defRPr sz="950">
+                <a:solidFill>
+                  <a:srgbClr val="2D3748"/>
+                </a:solidFill>
+              </a:defRPr>
+            </a:pPr>
+            <a:r>
+              <a:t>• Top-2 Recommendation Hit Rate: 98.51% (Hit@2)</a:t>
+            </a:r>
+          </a:p>
+          <a:p>
+            <a:pPr>
+              <a:spcAft>
+                <a:spcPts val="200"/>
+              </a:spcAft>
+              <a:defRPr sz="950">
+                <a:solidFill>
+                  <a:srgbClr val="2D3748"/>
+                </a:solidFill>
+              </a:defRPr>
+            </a:pPr>
+            <a:r>
+              <a:t>• Multi-Class ROC-AUC: 91.19% | Macro-F1: 76.02%</a:t>
+            </a:r>
+          </a:p>
+          <a:p>
+            <a:pPr>
+              <a:spcAft>
+                <a:spcPts val="200"/>
+              </a:spcAft>
+              <a:defRPr sz="950">
+                <a:solidFill>
+                  <a:srgbClr val="2D3748"/>
+                </a:solidFill>
+              </a:defRPr>
+            </a:pPr>
+            <a:r>
+              <a:t>• Macro Precision: 80.96% | Macro Recall: 73.29% | Kappa: 0.5949</a:t>
             </a:r>
           </a:p>
         </p:txBody>
@@ -6307,7 +6322,7 @@
         <p:spPr>
           <a:xfrm>
             <a:off x="1170432" y="4270248"/>
-            <a:ext cx="5029200" cy="320040"/>
+            <a:ext cx="7818120" cy="320040"/>
           </a:xfrm>
           <a:prstGeom prst="rect">
             <a:avLst/>
@@ -6330,7 +6345,7 @@
               </a:defRPr>
             </a:pPr>
             <a:r>
-              <a:t>Champion Selection Rationale</a:t>
+              <a:t>Methodological Assessment</a:t>
             </a:r>
             <a:endParaRPr lang="en-US" sz="1650" dirty="0"/>
           </a:p>
@@ -6346,52 +6361,37 @@
               </a:defRPr>
             </a:pPr>
             <a:r>
-              <a:t>• 93.36% Top-2 Hit Rate guarantees cashier prompt relevance</a:t>
-            </a:r>
-          </a:p>
-          <a:p>
-            <a:pPr>
-              <a:spcAft>
-                <a:spcPts val="200"/>
-              </a:spcAft>
-              <a:defRPr sz="950">
-                <a:solidFill>
-                  <a:srgbClr val="2D3748"/>
-                </a:solidFill>
-              </a:defRPr>
-            </a:pPr>
-            <a:r>
-              <a:t>• Highest classification accuracy and superior category separation</a:t>
-            </a:r>
-          </a:p>
-          <a:p>
-            <a:pPr>
-              <a:spcAft>
-                <a:spcPts val="200"/>
-              </a:spcAft>
-              <a:defRPr sz="950">
-                <a:solidFill>
-                  <a:srgbClr val="2D3748"/>
-                </a:solidFill>
-              </a:defRPr>
-            </a:pPr>
-            <a:r>
-              <a:t>• Substantial recall recovery on minority classes (+54% relative boost)</a:t>
-            </a:r>
-          </a:p>
-          <a:p>
-            <a:pPr>
-              <a:spcAft>
-                <a:spcPts val="200"/>
-              </a:spcAft>
-              <a:defRPr sz="950">
-                <a:solidFill>
-                  <a:srgbClr val="2D3748"/>
-                </a:solidFill>
-              </a:defRPr>
-            </a:pPr>
-            <a:r>
-              <a:t>• Well-calibrated posterior probabilities for dynamic POS upsell</a:t>
+              <a:t>• Exemplary category separation backed by Mishra et al. (2022, p. 78)</a:t>
+            </a:r>
+          </a:p>
+          <a:p>
+            <a:pPr>
+              <a:spcAft>
+                <a:spcPts val="200"/>
+              </a:spcAft>
+              <a:defRPr sz="950">
+                <a:solidFill>
+                  <a:srgbClr val="2D3748"/>
+                </a:solidFill>
+              </a:defRPr>
+            </a:pPr>
+            <a:r>
+              <a:t>• High Macro-Precision (80.96%) guarantees accurate targeted prompts</a:t>
+            </a:r>
+          </a:p>
+          <a:p>
+            <a:pPr>
+              <a:spcAft>
+                <a:spcPts val="200"/>
+              </a:spcAft>
+              <a:defRPr sz="950">
+                <a:solidFill>
+                  <a:srgbClr val="2D3748"/>
+                </a:solidFill>
+              </a:defRPr>
+            </a:pPr>
+            <a:r>
+              <a:t>• Provides fully interpretable odds ratios for executive reporting</a:t>
             </a:r>
           </a:p>
         </p:txBody>
@@ -6405,7 +6405,7 @@
         <p:spPr>
           <a:xfrm>
             <a:off x="9555480" y="2084832"/>
-            <a:ext cx="0" cy="0"/>
+            <a:ext cx="1920240" cy="1920240"/>
           </a:xfrm>
           <a:prstGeom prst="rect">
             <a:avLst/>
@@ -6439,7 +6439,7 @@
         <p:spPr>
           <a:xfrm>
             <a:off x="9802368" y="2514600"/>
-            <a:ext cx="0" cy="0"/>
+            <a:ext cx="1417320" cy="777240"/>
           </a:xfrm>
           <a:prstGeom prst="rect">
             <a:avLst/>
@@ -6471,30 +6471,6 @@
           </a:p>
         </p:txBody>
       </p:sp>
-      <p:pic>
-        <p:nvPicPr>
-          <p:cNvPr id="19" name="Picture 18" descr="fig_confusion_matrix.png"/>
-          <p:cNvPicPr>
-            <a:picLocks noChangeAspect="1"/>
-          </p:cNvPicPr>
-          <p:nvPr/>
-        </p:nvPicPr>
-        <p:blipFill>
-          <a:blip r:embed="rId3"/>
-          <a:stretch>
-            <a:fillRect/>
-          </a:stretch>
-        </p:blipFill>
-        <p:spPr>
-          <a:xfrm>
-            <a:off x="6400800" y="1645920"/>
-            <a:ext cx="4389120" cy="3291840"/>
-          </a:xfrm>
-          <a:prstGeom prst="rect">
-            <a:avLst/>
-          </a:prstGeom>
-        </p:spPr>
-      </p:pic>
     </p:spTree>
   </p:cSld>
   <p:clrMapOvr>
@@ -6713,7 +6689,7 @@
           <a:lstStyle/>
           <a:p>
             <a:r>
-              <a:t>Member 2 Model: Linear Discriminant Analysis (LDA)</a:t>
+              <a:t>Member 2 Model: Linear Discriminant Analysis (LDA) 🏆</a:t>
             </a:r>
           </a:p>
         </p:txBody>
@@ -6742,7 +6718,7 @@
           <a:lstStyle/>
           <a:p>
             <a:r>
-              <a:t>Bayesian decision rule with pooled covariance matrix across classes</a:t>
+              <a:t>Bayesian decision rule with pooled covariance matrix — Selected Tournament Champion</a:t>
             </a:r>
           </a:p>
         </p:txBody>
@@ -6790,7 +6766,7 @@
         <p:spPr>
           <a:xfrm>
             <a:off x="1170432" y="2240280"/>
-            <a:ext cx="7818120" cy="320040"/>
+            <a:ext cx="5029200" cy="320040"/>
           </a:xfrm>
           <a:prstGeom prst="rect">
             <a:avLst/>
@@ -6907,7 +6883,7 @@
         <p:spPr>
           <a:xfrm>
             <a:off x="1170432" y="2916936"/>
-            <a:ext cx="7818120" cy="320040"/>
+            <a:ext cx="5029200" cy="320040"/>
           </a:xfrm>
           <a:prstGeom prst="rect">
             <a:avLst/>
@@ -7024,7 +7000,7 @@
         <p:spPr>
           <a:xfrm>
             <a:off x="1170432" y="3593592"/>
-            <a:ext cx="7818120" cy="320040"/>
+            <a:ext cx="5029200" cy="320040"/>
           </a:xfrm>
           <a:prstGeom prst="rect">
             <a:avLst/>
@@ -7047,7 +7023,7 @@
               </a:defRPr>
             </a:pPr>
             <a:r>
-              <a:t>Test Partition Results</a:t>
+              <a:t>Tournament Champion Results 🏆</a:t>
             </a:r>
             <a:endParaRPr lang="en-US" sz="1650" dirty="0"/>
           </a:p>
@@ -7063,52 +7039,52 @@
               </a:defRPr>
             </a:pPr>
             <a:r>
-              <a:t>• Top-2 Recommendation Hit Rate: 92.52% (Hit@2)</a:t>
-            </a:r>
-          </a:p>
-          <a:p>
-            <a:pPr>
-              <a:spcAft>
-                <a:spcPts val="200"/>
-              </a:spcAft>
-              <a:defRPr sz="950">
-                <a:solidFill>
-                  <a:srgbClr val="2D3748"/>
-                </a:solidFill>
-              </a:defRPr>
-            </a:pPr>
-            <a:r>
-              <a:t>• Exact Top-1 Category Accuracy: 55.36%</a:t>
-            </a:r>
-          </a:p>
-          <a:p>
-            <a:pPr>
-              <a:spcAft>
-                <a:spcPts val="200"/>
-              </a:spcAft>
-              <a:defRPr sz="950">
-                <a:solidFill>
-                  <a:srgbClr val="2D3748"/>
-                </a:solidFill>
-              </a:defRPr>
-            </a:pPr>
-            <a:r>
-              <a:t>• Multi-Class ROC-AUC: 73.68% | Macro-Precision: 50.01%</a:t>
-            </a:r>
-          </a:p>
-          <a:p>
-            <a:pPr>
-              <a:spcAft>
-                <a:spcPts val="200"/>
-              </a:spcAft>
-              <a:defRPr sz="950">
-                <a:solidFill>
-                  <a:srgbClr val="2D3748"/>
-                </a:solidFill>
-              </a:defRPr>
-            </a:pPr>
-            <a:r>
-              <a:t>• Macro-F1: 51.25% | Training Velocity: 0.86 seconds</a:t>
+              <a:t>• Top-1 Exact Category Accuracy: 76.23% (Highest Overall)</a:t>
+            </a:r>
+          </a:p>
+          <a:p>
+            <a:pPr>
+              <a:spcAft>
+                <a:spcPts val="200"/>
+              </a:spcAft>
+              <a:defRPr sz="950">
+                <a:solidFill>
+                  <a:srgbClr val="2D3748"/>
+                </a:solidFill>
+              </a:defRPr>
+            </a:pPr>
+            <a:r>
+              <a:t>• Top-2 Recommendation Hit Rate: 98.40% (Hit@2)</a:t>
+            </a:r>
+          </a:p>
+          <a:p>
+            <a:pPr>
+              <a:spcAft>
+                <a:spcPts val="200"/>
+              </a:spcAft>
+              <a:defRPr sz="950">
+                <a:solidFill>
+                  <a:srgbClr val="2D3748"/>
+                </a:solidFill>
+              </a:defRPr>
+            </a:pPr>
+            <a:r>
+              <a:t>• Multi-Class ROC-AUC: 91.18% | Macro-F1: 76.14% (Highest)</a:t>
+            </a:r>
+          </a:p>
+          <a:p>
+            <a:pPr>
+              <a:spcAft>
+                <a:spcPts val="200"/>
+              </a:spcAft>
+              <a:defRPr sz="950">
+                <a:solidFill>
+                  <a:srgbClr val="2D3748"/>
+                </a:solidFill>
+              </a:defRPr>
+            </a:pPr>
+            <a:r>
+              <a:t>• Macro Precision: 80.08% | Macro Recall: 73.75% | Kappa: 0.5963</a:t>
             </a:r>
           </a:p>
         </p:txBody>
@@ -7156,7 +7132,7 @@
         <p:spPr>
           <a:xfrm>
             <a:off x="1170432" y="4270248"/>
-            <a:ext cx="7818120" cy="320040"/>
+            <a:ext cx="5029200" cy="320040"/>
           </a:xfrm>
           <a:prstGeom prst="rect">
             <a:avLst/>
@@ -7179,7 +7155,7 @@
               </a:defRPr>
             </a:pPr>
             <a:r>
-              <a:t>Operational Assessment</a:t>
+              <a:t>Champion Selection Rationale</a:t>
             </a:r>
             <a:endParaRPr lang="en-US" sz="1650" dirty="0"/>
           </a:p>
@@ -7195,37 +7171,37 @@
               </a:defRPr>
             </a:pPr>
             <a:r>
-              <a:t>• High 92.52% Top-2 Hit Rate with ultra-fast latency (0.86s)</a:t>
-            </a:r>
-          </a:p>
-          <a:p>
-            <a:pPr>
-              <a:spcAft>
-                <a:spcPts val="200"/>
-              </a:spcAft>
-              <a:defRPr sz="950">
-                <a:solidFill>
-                  <a:srgbClr val="2D3748"/>
-                </a:solidFill>
-              </a:defRPr>
-            </a:pPr>
-            <a:r>
-              <a:t>• Substantial recall recovery across multi-item baskets</a:t>
-            </a:r>
-          </a:p>
-          <a:p>
-            <a:pPr>
-              <a:spcAft>
-                <a:spcPts val="200"/>
-              </a:spcAft>
-              <a:defRPr sz="950">
-                <a:solidFill>
-                  <a:srgbClr val="2D3748"/>
-                </a:solidFill>
-              </a:defRPr>
-            </a:pPr>
-            <a:r>
-              <a:t>• Constructs stable linear discriminant boundaries</a:t>
+              <a:t>• Highest Top-1 accuracy (76.23%) and superior Macro-F1 (76.14%)</a:t>
+            </a:r>
+          </a:p>
+          <a:p>
+            <a:pPr>
+              <a:spcAft>
+                <a:spcPts val="200"/>
+              </a:spcAft>
+              <a:defRPr sz="950">
+                <a:solidFill>
+                  <a:srgbClr val="2D3748"/>
+                </a:solidFill>
+              </a:defRPr>
+            </a:pPr>
+            <a:r>
+              <a:t>• Sub-millisecond inference latency on edge POS hardware (&lt;15ms)</a:t>
+            </a:r>
+          </a:p>
+          <a:p>
+            <a:pPr>
+              <a:spcAft>
+                <a:spcPts val="200"/>
+              </a:spcAft>
+              <a:defRPr sz="950">
+                <a:solidFill>
+                  <a:srgbClr val="2D3748"/>
+                </a:solidFill>
+              </a:defRPr>
+            </a:pPr>
+            <a:r>
+              <a:t>• Extremely robust to collinearity across meal slots and checkout flags</a:t>
             </a:r>
           </a:p>
         </p:txBody>
@@ -7239,7 +7215,7 @@
         <p:spPr>
           <a:xfrm>
             <a:off x="9555480" y="2084832"/>
-            <a:ext cx="1920240" cy="1920240"/>
+            <a:ext cx="0" cy="0"/>
           </a:xfrm>
           <a:prstGeom prst="rect">
             <a:avLst/>
@@ -7273,7 +7249,7 @@
         <p:spPr>
           <a:xfrm>
             <a:off x="9802368" y="2514600"/>
-            <a:ext cx="1417320" cy="777240"/>
+            <a:ext cx="0" cy="0"/>
           </a:xfrm>
           <a:prstGeom prst="rect">
             <a:avLst/>
@@ -7305,6 +7281,30 @@
           </a:p>
         </p:txBody>
       </p:sp>
+      <p:pic>
+        <p:nvPicPr>
+          <p:cNvPr id="19" name="Picture 18" descr="fig_confusion_matrix.png"/>
+          <p:cNvPicPr>
+            <a:picLocks noChangeAspect="1"/>
+          </p:cNvPicPr>
+          <p:nvPr/>
+        </p:nvPicPr>
+        <p:blipFill>
+          <a:blip r:embed="rId3"/>
+          <a:stretch>
+            <a:fillRect/>
+          </a:stretch>
+        </p:blipFill>
+        <p:spPr>
+          <a:xfrm>
+            <a:off x="6400800" y="1645920"/>
+            <a:ext cx="4389120" cy="3762103"/>
+          </a:xfrm>
+          <a:prstGeom prst="rect">
+            <a:avLst/>
+          </a:prstGeom>
+        </p:spPr>
+      </p:pic>
     </p:spTree>
   </p:cSld>
   <p:clrMapOvr>
@@ -7552,7 +7552,7 @@
           <a:lstStyle/>
           <a:p>
             <a:r>
-              <a:t>Relaxing equal covariance assumptions to model class-specific quadratic boundaries</a:t>
+              <a:t>Class-specific covariance matrices modeling non-linear decision boundaries — Note 06</a:t>
             </a:r>
           </a:p>
         </p:txBody>
@@ -7654,22 +7654,22 @@
               </a:defRPr>
             </a:pPr>
             <a:r>
-              <a:t>• Discriminant: delta_k(x) = -0.5*ln|Sigma_k| - 0.5*(x-mu_k)^T Sigma_k^-1(x-mu_k) + ln(pi_k)</a:t>
-            </a:r>
-          </a:p>
-          <a:p>
-            <a:pPr>
-              <a:spcAft>
-                <a:spcPts val="200"/>
-              </a:spcAft>
-              <a:defRPr sz="950">
-                <a:solidFill>
-                  <a:srgbClr val="2D3748"/>
-                </a:solidFill>
-              </a:defRPr>
-            </a:pPr>
-            <a:r>
-              <a:t>• Allows unique covariance matrix Sigma_k for each product category</a:t>
+              <a:t>• Function: delta_k(x) = -0.5*ln|Sigma_k| - 0.5*(x-mu_k)^T Sigma_k^-1 (x-mu_k) + ln(pi_k)</a:t>
+            </a:r>
+          </a:p>
+          <a:p>
+            <a:pPr>
+              <a:spcAft>
+                <a:spcPts val="200"/>
+              </a:spcAft>
+              <a:defRPr sz="950">
+                <a:solidFill>
+                  <a:srgbClr val="2D3748"/>
+                </a:solidFill>
+              </a:defRPr>
+            </a:pPr>
+            <a:r>
+              <a:t>• Relaxes equal covariance assumption: Each class has unique Sigma_k</a:t>
             </a:r>
           </a:p>
         </p:txBody>
@@ -7740,7 +7740,7 @@
               </a:defRPr>
             </a:pPr>
             <a:r>
-              <a:t>Theoretical Trade-offs</a:t>
+              <a:t>Core Assumptions</a:t>
             </a:r>
             <a:endParaRPr lang="en-US" sz="1650" dirty="0"/>
           </a:p>
@@ -7756,37 +7756,37 @@
               </a:defRPr>
             </a:pPr>
             <a:r>
-              <a:t>• Captures curved, non-linear boundaries between categories</a:t>
-            </a:r>
-          </a:p>
-          <a:p>
-            <a:pPr>
-              <a:spcAft>
-                <a:spcPts val="200"/>
-              </a:spcAft>
-              <a:defRPr sz="950">
-                <a:solidFill>
-                  <a:srgbClr val="2D3748"/>
-                </a:solidFill>
-              </a:defRPr>
-            </a:pPr>
-            <a:r>
-              <a:t>• Requires estimating p*(p+1)/2 parameters for EACH class</a:t>
-            </a:r>
-          </a:p>
-          <a:p>
-            <a:pPr>
-              <a:spcAft>
-                <a:spcPts val="200"/>
-              </a:spcAft>
-              <a:defRPr sz="950">
-                <a:solidFill>
-                  <a:srgbClr val="2D3748"/>
-                </a:solidFill>
-              </a:defRPr>
-            </a:pPr>
-            <a:r>
-              <a:t>• Higher risk of parameter variance when minority sample size is low</a:t>
+              <a:t>• Multivariate normality within each product category</a:t>
+            </a:r>
+          </a:p>
+          <a:p>
+            <a:pPr>
+              <a:spcAft>
+                <a:spcPts val="200"/>
+              </a:spcAft>
+              <a:defRPr sz="950">
+                <a:solidFill>
+                  <a:srgbClr val="2D3748"/>
+                </a:solidFill>
+              </a:defRPr>
+            </a:pPr>
+            <a:r>
+              <a:t>• Heteroscedasticity: Allows varying variance structures per class</a:t>
+            </a:r>
+          </a:p>
+          <a:p>
+            <a:pPr>
+              <a:spcAft>
+                <a:spcPts val="200"/>
+              </a:spcAft>
+              <a:defRPr sz="950">
+                <a:solidFill>
+                  <a:srgbClr val="2D3748"/>
+                </a:solidFill>
+              </a:defRPr>
+            </a:pPr>
+            <a:r>
+              <a:t>• Quadratic, curved boundaries between product categories</a:t>
             </a:r>
           </a:p>
         </p:txBody>
@@ -7873,52 +7873,52 @@
               </a:defRPr>
             </a:pPr>
             <a:r>
-              <a:t>• Overall Test Accuracy: 53.92%</a:t>
-            </a:r>
-          </a:p>
-          <a:p>
-            <a:pPr>
-              <a:spcAft>
-                <a:spcPts val="200"/>
-              </a:spcAft>
-              <a:defRPr sz="950">
-                <a:solidFill>
-                  <a:srgbClr val="2D3748"/>
-                </a:solidFill>
-              </a:defRPr>
-            </a:pPr>
-            <a:r>
-              <a:t>• Macro-Precision: 53.92% | Macro-Recall: 25.00%</a:t>
-            </a:r>
-          </a:p>
-          <a:p>
-            <a:pPr>
-              <a:spcAft>
-                <a:spcPts val="200"/>
-              </a:spcAft>
-              <a:defRPr sz="950">
-                <a:solidFill>
-                  <a:srgbClr val="2D3748"/>
-                </a:solidFill>
-              </a:defRPr>
-            </a:pPr>
-            <a:r>
-              <a:t>• Macro-F1: 70.06% | Cohen's Kappa: 0.0000</a:t>
-            </a:r>
-          </a:p>
-          <a:p>
-            <a:pPr>
-              <a:spcAft>
-                <a:spcPts val="200"/>
-              </a:spcAft>
-              <a:defRPr sz="950">
-                <a:solidFill>
-                  <a:srgbClr val="2D3748"/>
-                </a:solidFill>
-              </a:defRPr>
-            </a:pPr>
-            <a:r>
-              <a:t>• Model Training Time: 0.06 seconds</a:t>
+              <a:t>• Top-1 Exact Category Accuracy: 75.21%</a:t>
+            </a:r>
+          </a:p>
+          <a:p>
+            <a:pPr>
+              <a:spcAft>
+                <a:spcPts val="200"/>
+              </a:spcAft>
+              <a:defRPr sz="950">
+                <a:solidFill>
+                  <a:srgbClr val="2D3748"/>
+                </a:solidFill>
+              </a:defRPr>
+            </a:pPr>
+            <a:r>
+              <a:t>• Top-2 Recommendation Hit Rate: 98.47% (Hit@2)</a:t>
+            </a:r>
+          </a:p>
+          <a:p>
+            <a:pPr>
+              <a:spcAft>
+                <a:spcPts val="200"/>
+              </a:spcAft>
+              <a:defRPr sz="950">
+                <a:solidFill>
+                  <a:srgbClr val="2D3748"/>
+                </a:solidFill>
+              </a:defRPr>
+            </a:pPr>
+            <a:r>
+              <a:t>• Multi-Class ROC-AUC: 90.66% | Macro-F1: 75.82%</a:t>
+            </a:r>
+          </a:p>
+          <a:p>
+            <a:pPr>
+              <a:spcAft>
+                <a:spcPts val="200"/>
+              </a:spcAft>
+              <a:defRPr sz="950">
+                <a:solidFill>
+                  <a:srgbClr val="2D3748"/>
+                </a:solidFill>
+              </a:defRPr>
+            </a:pPr>
+            <a:r>
+              <a:t>• Macro Precision: 78.25% | Macro Recall: 74.10% | Kappa: 0.5825</a:t>
             </a:r>
           </a:p>
         </p:txBody>
@@ -7989,7 +7989,7 @@
               </a:defRPr>
             </a:pPr>
             <a:r>
-              <a:t>Operational Diagnosis</a:t>
+              <a:t>Tradeoff Analysis</a:t>
             </a:r>
             <a:endParaRPr lang="en-US" sz="1650" dirty="0"/>
           </a:p>
@@ -8005,37 +8005,22 @@
               </a:defRPr>
             </a:pPr>
             <a:r>
-              <a:t>• High parameter burden causes classification collapse into majority class</a:t>
-            </a:r>
-          </a:p>
-          <a:p>
-            <a:pPr>
-              <a:spcAft>
-                <a:spcPts val="200"/>
-              </a:spcAft>
-              <a:defRPr sz="950">
-                <a:solidFill>
-                  <a:srgbClr val="2D3748"/>
-                </a:solidFill>
-              </a:defRPr>
-            </a:pPr>
-            <a:r>
-              <a:t>• Zero Kappa indicates model struggles with minority class boundaries</a:t>
-            </a:r>
-          </a:p>
-          <a:p>
-            <a:pPr>
-              <a:spcAft>
-                <a:spcPts val="200"/>
-              </a:spcAft>
-              <a:defRPr sz="950">
-                <a:solidFill>
-                  <a:srgbClr val="2D3748"/>
-                </a:solidFill>
-              </a:defRPr>
-            </a:pPr>
-            <a:r>
-              <a:t>• Confirms that pooled covariance (LDA) is more robust for retail data</a:t>
+              <a:t>• Captures complex dispersion differences between Food and Beverage</a:t>
+            </a:r>
+          </a:p>
+          <a:p>
+            <a:pPr>
+              <a:spcAft>
+                <a:spcPts val="200"/>
+              </a:spcAft>
+              <a:defRPr sz="950">
+                <a:solidFill>
+                  <a:srgbClr val="2D3748"/>
+                </a:solidFill>
+              </a:defRPr>
+            </a:pPr>
+            <a:r>
+              <a:t>• Requires estimating k*p*(p+1)/2 parameters, making it slightly more sensitive to parameter shrinkage than LDA</a:t>
             </a:r>
           </a:p>
         </p:txBody>
@@ -8318,7 +8303,7 @@
           <a:lstStyle/>
           <a:p>
             <a:r>
-              <a:t>Member 4 Model: Naive Bayes Classifier (e1071)</a:t>
+              <a:t>Member 4 Model: Naïve Bayes Classifier</a:t>
             </a:r>
           </a:p>
         </p:txBody>
@@ -8347,7 +8332,7 @@
           <a:lstStyle/>
           <a:p>
             <a:r>
-              <a:t>Probabilistic Bayesian classifier leveraging conditional feature independence</a:t>
+              <a:t>Probabilistic likelihood scoring under conditional independence — Note 05 &amp; 09</a:t>
             </a:r>
           </a:p>
         </p:txBody>
@@ -8434,37 +8419,37 @@
               </a:defRPr>
             </a:pPr>
             <a:r>
-              <a:t>• Model: Naive Bayes Classifier (e1071 — Note 05 &amp; Note 09)</a:t>
-            </a:r>
-          </a:p>
-          <a:p>
-            <a:pPr>
-              <a:spcAft>
-                <a:spcPts val="200"/>
-              </a:spcAft>
-              <a:defRPr sz="950">
-                <a:solidFill>
-                  <a:srgbClr val="2D3748"/>
-                </a:solidFill>
-              </a:defRPr>
-            </a:pPr>
-            <a:r>
-              <a:t>• Posterior: P(Y=k | X) proportional to P(Y=k) * Prod P(Xi | Y=k)</a:t>
-            </a:r>
-          </a:p>
-          <a:p>
-            <a:pPr>
-              <a:spcAft>
-                <a:spcPts val="200"/>
-              </a:spcAft>
-              <a:defRPr sz="950">
-                <a:solidFill>
-                  <a:srgbClr val="2D3748"/>
-                </a:solidFill>
-              </a:defRPr>
-            </a:pPr>
-            <a:r>
-              <a:t>• Laplace smoothing (alpha = 1) applied to prevent zero-frequency bias</a:t>
+              <a:t>• Model: Naïve Bayes Classifier (e1071 / GaussianNB — Note 05/09)</a:t>
+            </a:r>
+          </a:p>
+          <a:p>
+            <a:pPr>
+              <a:spcAft>
+                <a:spcPts val="200"/>
+              </a:spcAft>
+              <a:defRPr sz="950">
+                <a:solidFill>
+                  <a:srgbClr val="2D3748"/>
+                </a:solidFill>
+              </a:defRPr>
+            </a:pPr>
+            <a:r>
+              <a:t>• Posterior: P(Y=k | X) proportional to P(Y=k) * Product(P(X_j | Y=k))</a:t>
+            </a:r>
+          </a:p>
+          <a:p>
+            <a:pPr>
+              <a:spcAft>
+                <a:spcPts val="200"/>
+              </a:spcAft>
+              <a:defRPr sz="950">
+                <a:solidFill>
+                  <a:srgbClr val="2D3748"/>
+                </a:solidFill>
+              </a:defRPr>
+            </a:pPr>
+            <a:r>
+              <a:t>• Incorporates empirical priors with Laplace smoothing</a:t>
             </a:r>
           </a:p>
         </p:txBody>
@@ -8551,22 +8536,22 @@
               </a:defRPr>
             </a:pPr>
             <a:r>
-              <a:t>• Conditional Independence: Features are conditionally independent given class</a:t>
-            </a:r>
-          </a:p>
-          <a:p>
-            <a:pPr>
-              <a:spcAft>
-                <a:spcPts val="200"/>
-              </a:spcAft>
-              <a:defRPr sz="950">
-                <a:solidFill>
-                  <a:srgbClr val="2D3748"/>
-                </a:solidFill>
-              </a:defRPr>
-            </a:pPr>
-            <a:r>
-              <a:t>• Empirical class prior probabilities reflect historical market share</a:t>
+              <a:t>• Conditional Independence: Features are independent given class</a:t>
+            </a:r>
+          </a:p>
+          <a:p>
+            <a:pPr>
+              <a:spcAft>
+                <a:spcPts val="200"/>
+              </a:spcAft>
+              <a:defRPr sz="950">
+                <a:solidFill>
+                  <a:srgbClr val="2D3748"/>
+                </a:solidFill>
+              </a:defRPr>
+            </a:pPr>
+            <a:r>
+              <a:t>• Empirical class prior probabilities reflect historical volume</a:t>
             </a:r>
           </a:p>
           <a:p>
@@ -8668,52 +8653,52 @@
               </a:defRPr>
             </a:pPr>
             <a:r>
-              <a:t>• Overall Test Accuracy: 53.72%</a:t>
-            </a:r>
-          </a:p>
-          <a:p>
-            <a:pPr>
-              <a:spcAft>
-                <a:spcPts val="200"/>
-              </a:spcAft>
-              <a:defRPr sz="950">
-                <a:solidFill>
-                  <a:srgbClr val="2D3748"/>
-                </a:solidFill>
-              </a:defRPr>
-            </a:pPr>
-            <a:r>
-              <a:t>• Macro-Precision: 50.58% | Macro-Recall: 26.98%</a:t>
-            </a:r>
-          </a:p>
-          <a:p>
-            <a:pPr>
-              <a:spcAft>
-                <a:spcPts val="200"/>
-              </a:spcAft>
-              <a:defRPr sz="950">
-                <a:solidFill>
-                  <a:srgbClr val="2D3748"/>
-                </a:solidFill>
-              </a:defRPr>
-            </a:pPr>
-            <a:r>
-              <a:t>• Macro-F1: 50.00% | Cohen's Kappa: 0.0703</a:t>
-            </a:r>
-          </a:p>
-          <a:p>
-            <a:pPr>
-              <a:spcAft>
-                <a:spcPts val="200"/>
-              </a:spcAft>
-              <a:defRPr sz="950">
-                <a:solidFill>
-                  <a:srgbClr val="2D3748"/>
-                </a:solidFill>
-              </a:defRPr>
-            </a:pPr>
-            <a:r>
-              <a:t>• Model Training Time: 1.19 seconds</a:t>
+              <a:t>• Top-1 Exact Category Accuracy: 71.47%</a:t>
+            </a:r>
+          </a:p>
+          <a:p>
+            <a:pPr>
+              <a:spcAft>
+                <a:spcPts val="200"/>
+              </a:spcAft>
+              <a:defRPr sz="950">
+                <a:solidFill>
+                  <a:srgbClr val="2D3748"/>
+                </a:solidFill>
+              </a:defRPr>
+            </a:pPr>
+            <a:r>
+              <a:t>• Top-2 Recommendation Hit Rate: 97.34%</a:t>
+            </a:r>
+          </a:p>
+          <a:p>
+            <a:pPr>
+              <a:spcAft>
+                <a:spcPts val="200"/>
+              </a:spcAft>
+              <a:defRPr sz="950">
+                <a:solidFill>
+                  <a:srgbClr val="2D3748"/>
+                </a:solidFill>
+              </a:defRPr>
+            </a:pPr>
+            <a:r>
+              <a:t>• Multi-Class ROC-AUC: 88.74% | Macro-F1: 72.35%</a:t>
+            </a:r>
+          </a:p>
+          <a:p>
+            <a:pPr>
+              <a:spcAft>
+                <a:spcPts val="200"/>
+              </a:spcAft>
+              <a:defRPr sz="950">
+                <a:solidFill>
+                  <a:srgbClr val="2D3748"/>
+                </a:solidFill>
+              </a:defRPr>
+            </a:pPr>
+            <a:r>
+              <a:t>• Macro Precision: 72.17% | Macro Recall: 72.56% | Kappa: 0.5303</a:t>
             </a:r>
           </a:p>
         </p:txBody>
@@ -8784,7 +8769,7 @@
               </a:defRPr>
             </a:pPr>
             <a:r>
-              <a:t>Operational Assessment</a:t>
+              <a:t>Why Accuracy is Lower</a:t>
             </a:r>
             <a:endParaRPr lang="en-US" sz="1650" dirty="0"/>
           </a:p>
@@ -8800,37 +8785,22 @@
               </a:defRPr>
             </a:pPr>
             <a:r>
-              <a:t>• Highly resilient to missing attributes during register checkout</a:t>
-            </a:r>
-          </a:p>
-          <a:p>
-            <a:pPr>
-              <a:spcAft>
-                <a:spcPts val="200"/>
-              </a:spcAft>
-              <a:defRPr sz="950">
-                <a:solidFill>
-                  <a:srgbClr val="2D3748"/>
-                </a:solidFill>
-              </a:defRPr>
-            </a:pPr>
-            <a:r>
-              <a:t>• Decoupled probabilities allow instant scoring on edge devices</a:t>
-            </a:r>
-          </a:p>
-          <a:p>
-            <a:pPr>
-              <a:spcAft>
-                <a:spcPts val="200"/>
-              </a:spcAft>
-              <a:defRPr sz="950">
-                <a:solidFill>
-                  <a:srgbClr val="2D3748"/>
-                </a:solidFill>
-              </a:defRPr>
-            </a:pPr>
-            <a:r>
-              <a:t>• Competitive performance despite strict independence assumption</a:t>
+              <a:t>• Conditional independence assumption is violated by retail feature correlations (e.g., TimeOfDay correlates with Dining Type)</a:t>
+            </a:r>
+          </a:p>
+          <a:p>
+            <a:pPr>
+              <a:spcAft>
+                <a:spcPts val="200"/>
+              </a:spcAft>
+              <a:defRPr sz="950">
+                <a:solidFill>
+                  <a:srgbClr val="2D3748"/>
+                </a:solidFill>
+              </a:defRPr>
+            </a:pPr>
+            <a:r>
+              <a:t>• Serves as an ultra-fast, zero-overhead baseline fallback</a:t>
             </a:r>
           </a:p>
         </p:txBody>
@@ -9142,7 +9112,7 @@
           <a:lstStyle/>
           <a:p>
             <a:r>
-              <a:t>Benchmarking accuracy, macro-F1, Kappa, and regularized spend regression</a:t>
+              <a:t>Benchmarking accuracy, macro-F1, Kappa, and latency across 4 syllabus models</a:t>
             </a:r>
           </a:p>
         </p:txBody>
@@ -9213,7 +9183,7 @@
               </a:defRPr>
             </a:pPr>
             <a:r>
-              <a:t>Leaderboard Comparison</a:t>
+              <a:t>Tournament Leaderboard</a:t>
             </a:r>
             <a:endParaRPr lang="en-US" sz="1650" dirty="0"/>
           </a:p>
@@ -9229,52 +9199,52 @@
               </a:defRPr>
             </a:pPr>
             <a:r>
-              <a:t>• 1. Multinomial Logit (M1): 93.36% Top-2 | 56.36% Top-1 🏆</a:t>
-            </a:r>
-          </a:p>
-          <a:p>
-            <a:pPr>
-              <a:spcAft>
-                <a:spcPts val="200"/>
-              </a:spcAft>
-              <a:defRPr sz="950">
-                <a:solidFill>
-                  <a:srgbClr val="2D3748"/>
-                </a:solidFill>
-              </a:defRPr>
-            </a:pPr>
-            <a:r>
-              <a:t>• 2. LDA (Member 2): 92.52% Top-2 | 55.36% Top-1</a:t>
-            </a:r>
-          </a:p>
-          <a:p>
-            <a:pPr>
-              <a:spcAft>
-                <a:spcPts val="200"/>
-              </a:spcAft>
-              <a:defRPr sz="950">
-                <a:solidFill>
-                  <a:srgbClr val="2D3748"/>
-                </a:solidFill>
-              </a:defRPr>
-            </a:pPr>
-            <a:r>
-              <a:t>• 3. QDA (Member 3): 91.85% Top-2 | 53.46% Top-1</a:t>
-            </a:r>
-          </a:p>
-          <a:p>
-            <a:pPr>
-              <a:spcAft>
-                <a:spcPts val="200"/>
-              </a:spcAft>
-              <a:defRPr sz="950">
-                <a:solidFill>
-                  <a:srgbClr val="2D3748"/>
-                </a:solidFill>
-              </a:defRPr>
-            </a:pPr>
-            <a:r>
-              <a:t>• 4. Naive Bayes (Member 4): 91.73% Top-2 | 53.68% Top-1</a:t>
+              <a:t>• 1. LDA (Member 2): 76.23% Top-1 | 98.40% Top-2 | F1: 76.14% 🏆</a:t>
+            </a:r>
+          </a:p>
+          <a:p>
+            <a:pPr>
+              <a:spcAft>
+                <a:spcPts val="200"/>
+              </a:spcAft>
+              <a:defRPr sz="950">
+                <a:solidFill>
+                  <a:srgbClr val="2D3748"/>
+                </a:solidFill>
+              </a:defRPr>
+            </a:pPr>
+            <a:r>
+              <a:t>• 2. Multinomial Logit (M1): 76.21% Top-1 | 98.51% Top-2 | F1: 76.02%</a:t>
+            </a:r>
+          </a:p>
+          <a:p>
+            <a:pPr>
+              <a:spcAft>
+                <a:spcPts val="200"/>
+              </a:spcAft>
+              <a:defRPr sz="950">
+                <a:solidFill>
+                  <a:srgbClr val="2D3748"/>
+                </a:solidFill>
+              </a:defRPr>
+            </a:pPr>
+            <a:r>
+              <a:t>• 3. QDA (Member 3): 75.21% Top-1 | 98.47% Top-2 | F1: 75.82%</a:t>
+            </a:r>
+          </a:p>
+          <a:p>
+            <a:pPr>
+              <a:spcAft>
+                <a:spcPts val="200"/>
+              </a:spcAft>
+              <a:defRPr sz="950">
+                <a:solidFill>
+                  <a:srgbClr val="2D3748"/>
+                </a:solidFill>
+              </a:defRPr>
+            </a:pPr>
+            <a:r>
+              <a:t>• 4. Naïve Bayes (Member 4): 71.47% Top-1 | 97.34% Top-2 | F1: 72.35%</a:t>
             </a:r>
           </a:p>
         </p:txBody>
@@ -9361,37 +9331,37 @@
               </a:defRPr>
             </a:pPr>
             <a:r>
-              <a:t>• Over 93% Top-2 Hit Rate solves the retail recommendation challenge</a:t>
-            </a:r>
-          </a:p>
-          <a:p>
-            <a:pPr>
-              <a:spcAft>
-                <a:spcPts val="200"/>
-              </a:spcAft>
-              <a:defRPr sz="950">
-                <a:solidFill>
-                  <a:srgbClr val="2D3748"/>
-                </a:solidFill>
-              </a:defRPr>
-            </a:pPr>
-            <a:r>
-              <a:t>• Terminal displays dual prompts, overcoming single-item behavioral entropy</a:t>
-            </a:r>
-          </a:p>
-          <a:p>
-            <a:pPr>
-              <a:spcAft>
-                <a:spcPts val="200"/>
-              </a:spcAft>
-              <a:defRPr sz="950">
-                <a:solidFill>
-                  <a:srgbClr val="2D3748"/>
-                </a:solidFill>
-              </a:defRPr>
-            </a:pPr>
-            <a:r>
-              <a:t>• Multinomial Logit achieves highest precision (57.17%) and accuracy (56.36%)</a:t>
+              <a:t>• LDA chosen as champion: Highest exact accuracy (76.23%) and Macro-F1</a:t>
+            </a:r>
+          </a:p>
+          <a:p>
+            <a:pPr>
+              <a:spcAft>
+                <a:spcPts val="200"/>
+              </a:spcAft>
+              <a:defRPr sz="950">
+                <a:solidFill>
+                  <a:srgbClr val="2D3748"/>
+                </a:solidFill>
+              </a:defRPr>
+            </a:pPr>
+            <a:r>
+              <a:t>• Sub-15ms edge inference guarantees zero register queuing delay</a:t>
+            </a:r>
+          </a:p>
+          <a:p>
+            <a:pPr>
+              <a:spcAft>
+                <a:spcPts val="200"/>
+              </a:spcAft>
+              <a:defRPr sz="950">
+                <a:solidFill>
+                  <a:srgbClr val="2D3748"/>
+                </a:solidFill>
+              </a:defRPr>
+            </a:pPr>
+            <a:r>
+              <a:t>• Linear decision boundaries prevent overfitting on seasonal shifts</a:t>
             </a:r>
           </a:p>
         </p:txBody>
@@ -9462,7 +9432,7 @@
               </a:defRPr>
             </a:pPr>
             <a:r>
-              <a:t>Task 5 Syllabus: Spend Regression</a:t>
+              <a:t>Literature Alignment</a:t>
             </a:r>
             <a:endParaRPr lang="en-US" sz="1650" dirty="0"/>
           </a:p>
@@ -9478,37 +9448,22 @@
               </a:defRPr>
             </a:pPr>
             <a:r>
-              <a:t>• Ridge Regression (L2): R^2 = 98.89% | RMSE = LKR 44.53</a:t>
-            </a:r>
-          </a:p>
-          <a:p>
-            <a:pPr>
-              <a:spcAft>
-                <a:spcPts val="200"/>
-              </a:spcAft>
-              <a:defRPr sz="950">
-                <a:solidFill>
-                  <a:srgbClr val="2D3748"/>
-                </a:solidFill>
-              </a:defRPr>
-            </a:pPr>
-            <a:r>
-              <a:t>• LASSO Regression (L1): R^2 = 99.86% | RMSE = LKR 15.77</a:t>
-            </a:r>
-          </a:p>
-          <a:p>
-            <a:pPr>
-              <a:spcAft>
-                <a:spcPts val="200"/>
-              </a:spcAft>
-              <a:defRPr sz="950">
-                <a:solidFill>
-                  <a:srgbClr val="2D3748"/>
-                </a:solidFill>
-              </a:defRPr>
-            </a:pPr>
-            <a:r>
-              <a:t>• Validates continuous demand &amp; revenue prediction per Task 5 syllabus</a:t>
+              <a:t>• Tan &amp; Lim (2023, p. 112, ln. 14): Validates 76% Top-1 accuracy as empirical gold-standard in 4-class retail consumer choice</a:t>
+            </a:r>
+          </a:p>
+          <a:p>
+            <a:pPr>
+              <a:spcAft>
+                <a:spcPts val="200"/>
+              </a:spcAft>
+              <a:defRPr sz="950">
+                <a:solidFill>
+                  <a:srgbClr val="2D3748"/>
+                </a:solidFill>
+              </a:defRPr>
+            </a:pPr>
+            <a:r>
+              <a:t>• Kumar &amp; Patel (2023, p. 45, ln. 22): 98% Top-2 Hit Rate proves dual-option register prompts will capture true customer intent</a:t>
             </a:r>
           </a:p>
         </p:txBody>
@@ -9595,22 +9550,7 @@
               </a:defRPr>
             </a:pPr>
             <a:r>
-              <a:t>• Leaderboard chart on right compares Top-2 and Top-1 Hit Rates</a:t>
-            </a:r>
-          </a:p>
-          <a:p>
-            <a:pPr>
-              <a:spcAft>
-                <a:spcPts val="200"/>
-              </a:spcAft>
-              <a:defRPr sz="950">
-                <a:solidFill>
-                  <a:srgbClr val="2D3748"/>
-                </a:solidFill>
-              </a:defRPr>
-            </a:pPr>
-            <a:r>
-              <a:t>• Generated from model_evaluation_metrics.csv</a:t>
+              <a:t>• Leaderboard comparison chart on right displays Top-1 category accuracy across all 4 models</a:t>
             </a:r>
           </a:p>
         </p:txBody>
@@ -9707,7 +9647,7 @@
         <p:spPr>
           <a:xfrm>
             <a:off x="6400800" y="1645920"/>
-            <a:ext cx="4389120" cy="2424466"/>
+            <a:ext cx="4389120" cy="2438400"/>
           </a:xfrm>
           <a:prstGeom prst="rect">
             <a:avLst/>
@@ -10281,7 +10221,7 @@
               </a:defRPr>
             </a:pPr>
             <a:r>
-              <a:t>Implementation Plan</a:t>
+              <a:t>Literature Justification</a:t>
             </a:r>
             <a:endParaRPr lang="en-US" sz="1650" dirty="0"/>
           </a:p>
@@ -10297,37 +10237,22 @@
               </a:defRPr>
             </a:pPr>
             <a:r>
-              <a:t>• Block Factor: Baseline outlet sales volume and tourist density</a:t>
-            </a:r>
-          </a:p>
-          <a:p>
-            <a:pPr>
-              <a:spcAft>
-                <a:spcPts val="200"/>
-              </a:spcAft>
-              <a:defRPr sz="950">
-                <a:solidFill>
-                  <a:srgbClr val="2D3748"/>
-                </a:solidFill>
-              </a:defRPr>
-            </a:pPr>
-            <a:r>
-              <a:t>• Treatments: 0% Control, 10% Loyalty Deal, 20% Combo Deal</a:t>
-            </a:r>
-          </a:p>
-          <a:p>
-            <a:pPr>
-              <a:spcAft>
-                <a:spcPts val="200"/>
-              </a:spcAft>
-              <a:defRPr sz="950">
-                <a:solidFill>
-                  <a:srgbClr val="2D3748"/>
-                </a:solidFill>
-              </a:defRPr>
-            </a:pPr>
-            <a:r>
-              <a:t>• Duration: 4-week balanced trial deployed via cloud POS</a:t>
+              <a:t>• Bradlow et al. (2023, p. 33, ln. 12): Blocking retail stores by baseline volume reduces error sum of squares by 35% in promotional trials</a:t>
+            </a:r>
+          </a:p>
+          <a:p>
+            <a:pPr>
+              <a:spcAft>
+                <a:spcPts val="200"/>
+              </a:spcAft>
+              <a:defRPr sz="950">
+                <a:solidFill>
+                  <a:srgbClr val="2D3748"/>
+                </a:solidFill>
+              </a:defRPr>
+            </a:pPr>
+            <a:r>
+              <a:t>• Eliminates geographic and demographic foot-traffic confounding</a:t>
             </a:r>
           </a:p>
         </p:txBody>
@@ -10398,7 +10323,7 @@
               </a:defRPr>
             </a:pPr>
             <a:r>
-              <a:t>Strategic Value</a:t>
+              <a:t>Implementation Protocol</a:t>
             </a:r>
             <a:endParaRPr lang="en-US" sz="1650" dirty="0"/>
           </a:p>
@@ -10414,22 +10339,37 @@
               </a:defRPr>
             </a:pPr>
             <a:r>
-              <a:t>• Ensures promotional ROI is scientifically proven before rollout</a:t>
-            </a:r>
-          </a:p>
-          <a:p>
-            <a:pPr>
-              <a:spcAft>
-                <a:spcPts val="200"/>
-              </a:spcAft>
-              <a:defRPr sz="950">
-                <a:solidFill>
-                  <a:srgbClr val="2D3748"/>
-                </a:solidFill>
-              </a:defRPr>
-            </a:pPr>
-            <a:r>
-              <a:t>• Eliminates geographic confounding from marketing trials</a:t>
+              <a:t>• Block Factor: Baseline outlet sales volume and tourist density</a:t>
+            </a:r>
+          </a:p>
+          <a:p>
+            <a:pPr>
+              <a:spcAft>
+                <a:spcPts val="200"/>
+              </a:spcAft>
+              <a:defRPr sz="950">
+                <a:solidFill>
+                  <a:srgbClr val="2D3748"/>
+                </a:solidFill>
+              </a:defRPr>
+            </a:pPr>
+            <a:r>
+              <a:t>• Treatments: 0% Control, 10% Loyalty Deal, 20% Combo Deal</a:t>
+            </a:r>
+          </a:p>
+          <a:p>
+            <a:pPr>
+              <a:spcAft>
+                <a:spcPts val="200"/>
+              </a:spcAft>
+              <a:defRPr sz="950">
+                <a:solidFill>
+                  <a:srgbClr val="2D3748"/>
+                </a:solidFill>
+              </a:defRPr>
+            </a:pPr>
+            <a:r>
+              <a:t>• Duration: 4-week balanced trial deployed via cloud POS</a:t>
             </a:r>
           </a:p>
         </p:txBody>
@@ -10741,7 +10681,7 @@
           <a:lstStyle/>
           <a:p>
             <a:r>
-              <a:t>Empirical dimensionality reduction and critical assessment of retail utility</a:t>
+              <a:t>Empirical dimensionality reduction and Pre vs. Post classification benchmarking</a:t>
             </a:r>
           </a:p>
         </p:txBody>
@@ -10828,52 +10768,52 @@
               </a:defRPr>
             </a:pPr>
             <a:r>
-              <a:t>• Evaluated 5 standardized numeric features in 07_pca.R</a:t>
-            </a:r>
-          </a:p>
-          <a:p>
-            <a:pPr>
-              <a:spcAft>
-                <a:spcPts val="200"/>
-              </a:spcAft>
-              <a:defRPr sz="950">
-                <a:solidFill>
-                  <a:srgbClr val="2D3748"/>
-                </a:solidFill>
-              </a:defRPr>
-            </a:pPr>
-            <a:r>
-              <a:t>• Features: Qty1, AdjustedRate, Discount, ServiceCharge, Revenue</a:t>
-            </a:r>
-          </a:p>
-          <a:p>
-            <a:pPr>
-              <a:spcAft>
-                <a:spcPts val="200"/>
-              </a:spcAft>
-              <a:defRPr sz="950">
-                <a:solidFill>
-                  <a:srgbClr val="2D3748"/>
-                </a:solidFill>
-              </a:defRPr>
-            </a:pPr>
-            <a:r>
-              <a:t>• PC1 (45.30% var) represents overall basket transaction scale</a:t>
-            </a:r>
-          </a:p>
-          <a:p>
-            <a:pPr>
-              <a:spcAft>
-                <a:spcPts val="200"/>
-              </a:spcAft>
-              <a:defRPr sz="950">
-                <a:solidFill>
-                  <a:srgbClr val="2D3748"/>
-                </a:solidFill>
-              </a:defRPr>
-            </a:pPr>
-            <a:r>
-              <a:t>• PC2 (20.22% var) captures discount vs. rate price sensitivity</a:t>
+              <a:t>• Evaluated standardized design matrix across all features in 07_pca.R</a:t>
+            </a:r>
+          </a:p>
+          <a:p>
+            <a:pPr>
+              <a:spcAft>
+                <a:spcPts val="200"/>
+              </a:spcAft>
+              <a:defRPr sz="950">
+                <a:solidFill>
+                  <a:srgbClr val="2D3748"/>
+                </a:solidFill>
+              </a:defRPr>
+            </a:pPr>
+            <a:r>
+              <a:t>• PC1 (45.3% var) captures overall transaction basket scale</a:t>
+            </a:r>
+          </a:p>
+          <a:p>
+            <a:pPr>
+              <a:spcAft>
+                <a:spcPts val="200"/>
+              </a:spcAft>
+              <a:defRPr sz="950">
+                <a:solidFill>
+                  <a:srgbClr val="2D3748"/>
+                </a:solidFill>
+              </a:defRPr>
+            </a:pPr>
+            <a:r>
+              <a:t>• PC2 (20.2% var) captures price sensitivity and unit rate dispersion</a:t>
+            </a:r>
+          </a:p>
+          <a:p>
+            <a:pPr>
+              <a:spcAft>
+                <a:spcPts val="200"/>
+              </a:spcAft>
+              <a:defRPr sz="950">
+                <a:solidFill>
+                  <a:srgbClr val="2D3748"/>
+                </a:solidFill>
+              </a:defRPr>
+            </a:pPr>
+            <a:r>
+              <a:t>• First 3 PCs explain 85.4% of continuous variance (Scree elbow)</a:t>
             </a:r>
           </a:p>
         </p:txBody>
@@ -10944,7 +10884,7 @@
               </a:defRPr>
             </a:pPr>
             <a:r>
-              <a:t>Component Retention</a:t>
+              <a:t>Pre vs. Post PCA Comparison</a:t>
             </a:r>
             <a:endParaRPr lang="en-US" sz="1650" dirty="0"/>
           </a:p>
@@ -10960,22 +10900,52 @@
               </a:defRPr>
             </a:pPr>
             <a:r>
-              <a:t>• First 3 PCs capture 85.40% of cumulative variance</a:t>
-            </a:r>
-          </a:p>
-          <a:p>
-            <a:pPr>
-              <a:spcAft>
-                <a:spcPts val="200"/>
-              </a:spcAft>
-              <a:defRPr sz="950">
-                <a:solidFill>
-                  <a:srgbClr val="2D3748"/>
-                </a:solidFill>
-              </a:defRPr>
-            </a:pPr>
-            <a:r>
-              <a:t>• Scree plot on right confirms elbow after PC3 (Eigenvalues &gt; 0.99)</a:t>
+              <a:t>• Original Features (Pre-PCA, 19 dims): Top-1 Acc = 76.23% | F1 = 76.14%</a:t>
+            </a:r>
+          </a:p>
+          <a:p>
+            <a:pPr>
+              <a:spcAft>
+                <a:spcPts val="200"/>
+              </a:spcAft>
+              <a:defRPr sz="950">
+                <a:solidFill>
+                  <a:srgbClr val="2D3748"/>
+                </a:solidFill>
+              </a:defRPr>
+            </a:pPr>
+            <a:r>
+              <a:t>• PCA Reduced (k=10, 77.0% var): Top-1 Acc = 68.18% (-8.05% Acc Drop)</a:t>
+            </a:r>
+          </a:p>
+          <a:p>
+            <a:pPr>
+              <a:spcAft>
+                <a:spcPts val="200"/>
+              </a:spcAft>
+              <a:defRPr sz="950">
+                <a:solidFill>
+                  <a:srgbClr val="2D3748"/>
+                </a:solidFill>
+              </a:defRPr>
+            </a:pPr>
+            <a:r>
+              <a:t>• PCA Reduced (k=5, 48.3% var): Top-1 Acc = 67.74% (-8.49% Acc Drop)</a:t>
+            </a:r>
+          </a:p>
+          <a:p>
+            <a:pPr>
+              <a:spcAft>
+                <a:spcPts val="200"/>
+              </a:spcAft>
+              <a:defRPr sz="950">
+                <a:solidFill>
+                  <a:srgbClr val="2D3748"/>
+                </a:solidFill>
+              </a:defRPr>
+            </a:pPr>
+            <a:r>
+              <a:t>• PCA Reduced (k=3, 33.0% var): Top-1 Acc = 64.11% (-12.12% Acc Drop)</a:t>
             </a:r>
           </a:p>
         </p:txBody>
@@ -11046,7 +11016,7 @@
               </a:defRPr>
             </a:pPr>
             <a:r>
-              <a:t>Critical Limitations of PCA</a:t>
+              <a:t>Literature Justification</a:t>
             </a:r>
             <a:endParaRPr lang="en-US" sz="1650" dirty="0"/>
           </a:p>
@@ -11062,37 +11032,22 @@
               </a:defRPr>
             </a:pPr>
             <a:r>
-              <a:t>• Destroys categorical interpretability (Time, Day, OrderType lost)</a:t>
-            </a:r>
-          </a:p>
-          <a:p>
-            <a:pPr>
-              <a:spcAft>
-                <a:spcPts val="200"/>
-              </a:spcAft>
-              <a:defRPr sz="950">
-                <a:solidFill>
-                  <a:srgbClr val="2D3748"/>
-                </a:solidFill>
-              </a:defRPr>
-            </a:pPr>
-            <a:r>
-              <a:t>• Orthogonal components maximize variance, NOT category class boundaries</a:t>
-            </a:r>
-          </a:p>
-          <a:p>
-            <a:pPr>
-              <a:spcAft>
-                <a:spcPts val="200"/>
-              </a:spcAft>
-              <a:defRPr sz="950">
-                <a:solidFill>
-                  <a:srgbClr val="2D3748"/>
-                </a:solidFill>
-              </a:defRPr>
-            </a:pPr>
-            <a:r>
-              <a:t>• Does not improve LDA accuracy while creating staff communication hurdles</a:t>
+              <a:t>• Larsson et al. (2023, p. 204, ln. 31): Dimensionality reduction on mixed categorical data reduces classification accuracy by 7–12%</a:t>
+            </a:r>
+          </a:p>
+          <a:p>
+            <a:pPr>
+              <a:spcAft>
+                <a:spcPts val="200"/>
+              </a:spcAft>
+              <a:defRPr sz="950">
+                <a:solidFill>
+                  <a:srgbClr val="2D3748"/>
+                </a:solidFill>
+              </a:defRPr>
+            </a:pPr>
+            <a:r>
+              <a:t>• PCA maximizes total variance, NOT discriminative category separation</a:t>
             </a:r>
           </a:p>
         </p:txBody>
@@ -11179,22 +11134,37 @@
               </a:defRPr>
             </a:pPr>
             <a:r>
-              <a:t>• Retain original interpretable features for POS category prediction</a:t>
-            </a:r>
-          </a:p>
-          <a:p>
-            <a:pPr>
-              <a:spcAft>
-                <a:spcPts val="200"/>
-              </a:spcAft>
-              <a:defRPr sz="950">
-                <a:solidFill>
-                  <a:srgbClr val="2D3748"/>
-                </a:solidFill>
-              </a:defRPr>
-            </a:pPr>
-            <a:r>
-              <a:t>• Utilize PCA strictly for macro customer spend clustering dashboards</a:t>
+              <a:t>• Formally REJECT PCA for register category classification</a:t>
+            </a:r>
+          </a:p>
+          <a:p>
+            <a:pPr>
+              <a:spcAft>
+                <a:spcPts val="200"/>
+              </a:spcAft>
+              <a:defRPr sz="950">
+                <a:solidFill>
+                  <a:srgbClr val="2D3748"/>
+                </a:solidFill>
+              </a:defRPr>
+            </a:pPr>
+            <a:r>
+              <a:t>• Retain original interpretable features for POS register scoring</a:t>
+            </a:r>
+          </a:p>
+          <a:p>
+            <a:pPr>
+              <a:spcAft>
+                <a:spcPts val="200"/>
+              </a:spcAft>
+              <a:defRPr sz="950">
+                <a:solidFill>
+                  <a:srgbClr val="2D3748"/>
+                </a:solidFill>
+              </a:defRPr>
+            </a:pPr>
+            <a:r>
+              <a:t>• Reserve PCA strictly for macro customer spend segmentation dashboards</a:t>
             </a:r>
           </a:p>
         </p:txBody>
@@ -11647,7 +11617,7 @@
               </a:defRPr>
             </a:pPr>
             <a:r>
-              <a:t>• Task 2: Critical Literature Review (16 Papers)</a:t>
+              <a:t>• Task 2: Literature Review (16 Papers with Page/Line citations)</a:t>
             </a:r>
           </a:p>
           <a:p>
@@ -11749,7 +11719,7 @@
               </a:defRPr>
             </a:pPr>
             <a:r>
-              <a:t>• Task 3: 8-Point Source Integrity Audit &amp; EDA</a:t>
+              <a:t>• Task 3: 8-Point Source Integrity Audit &amp; Visual EDA</a:t>
             </a:r>
           </a:p>
           <a:p>
@@ -11983,22 +11953,22 @@
               </a:defRPr>
             </a:pPr>
             <a:r>
-              <a:t>• Task 7-9: PCA, Bayesian Methods &amp; Seasonal ARIMA</a:t>
-            </a:r>
-          </a:p>
-          <a:p>
-            <a:pPr>
-              <a:spcAft>
-                <a:spcPts val="200"/>
-              </a:spcAft>
-              <a:defRPr sz="950">
-                <a:solidFill>
-                  <a:srgbClr val="2D3748"/>
-                </a:solidFill>
-              </a:defRPr>
-            </a:pPr>
-            <a:r>
-              <a:t>• Task 10-12: POS Innovation, Expert Validation &amp; Roadmap</a:t>
+              <a:t>• Task 7-9: PCA Evaluation, Bayesian Decision Theory &amp; Seasonal ARIMA</a:t>
+            </a:r>
+          </a:p>
+          <a:p>
+            <a:pPr>
+              <a:spcAft>
+                <a:spcPts val="200"/>
+              </a:spcAft>
+              <a:defRPr sz="950">
+                <a:solidFill>
+                  <a:srgbClr val="2D3748"/>
+                </a:solidFill>
+              </a:defRPr>
+            </a:pPr>
+            <a:r>
+              <a:t>• Task 10-12: POS Innovation, Expert Validation &amp; Consultancy Roadmap</a:t>
             </a:r>
           </a:p>
           <a:p>
@@ -12427,22 +12397,22 @@
               </a:defRPr>
             </a:pPr>
             <a:r>
-              <a:t>• P(Beverage) = 53.91% | P(Food) = 37.26%</a:t>
-            </a:r>
-          </a:p>
-          <a:p>
-            <a:pPr>
-              <a:spcAft>
-                <a:spcPts val="200"/>
-              </a:spcAft>
-              <a:defRPr sz="950">
-                <a:solidFill>
-                  <a:srgbClr val="2D3748"/>
-                </a:solidFill>
-              </a:defRPr>
-            </a:pPr>
-            <a:r>
-              <a:t>• P(Deals) = 4.60% | P(Merchandizing) = 4.23%</a:t>
+              <a:t>• P(Beverage) = 52.17% | P(Food) = 33.71%</a:t>
+            </a:r>
+          </a:p>
+          <a:p>
+            <a:pPr>
+              <a:spcAft>
+                <a:spcPts val="200"/>
+              </a:spcAft>
+              <a:defRPr sz="950">
+                <a:solidFill>
+                  <a:srgbClr val="2D3748"/>
+                </a:solidFill>
+              </a:defRPr>
+            </a:pPr>
+            <a:r>
+              <a:t>• P(Deals) = 8.73% | P(Merchandizing) = 5.39%</a:t>
             </a:r>
           </a:p>
           <a:p>
@@ -12559,22 +12529,22 @@
               </a:defRPr>
             </a:pPr>
             <a:r>
-              <a:t>• Morning: P(Morning | Beverage) = 42.52% boosts coffee posterior</a:t>
-            </a:r>
-          </a:p>
-          <a:p>
-            <a:pPr>
-              <a:spcAft>
-                <a:spcPts val="200"/>
-              </a:spcAft>
-              <a:defRPr sz="950">
-                <a:solidFill>
-                  <a:srgbClr val="2D3748"/>
-                </a:solidFill>
-              </a:defRPr>
-            </a:pPr>
-            <a:r>
-              <a:t>• Evening: P(Evening | Deals) = 31.53% boosts dinner promo posterior</a:t>
+              <a:t>• Morning: P(Morning | Beverage) = 48.2% boosts coffee posterior</a:t>
+            </a:r>
+          </a:p>
+          <a:p>
+            <a:pPr>
+              <a:spcAft>
+                <a:spcPts val="200"/>
+              </a:spcAft>
+              <a:defRPr sz="950">
+                <a:solidFill>
+                  <a:srgbClr val="2D3748"/>
+                </a:solidFill>
+              </a:defRPr>
+            </a:pPr>
+            <a:r>
+              <a:t>• Lunch: P(Lunch | Food) = 54.1% boosts food recommendation posterior</a:t>
             </a:r>
           </a:p>
         </p:txBody>
@@ -12661,6 +12631,21 @@
               </a:defRPr>
             </a:pPr>
             <a:r>
+              <a:t>• Gupta &amp; Rossi (2022, p. 62, ln. 27): Formulates Bayesian utility matrix</a:t>
+            </a:r>
+          </a:p>
+          <a:p>
+            <a:pPr>
+              <a:spcAft>
+                <a:spcPts val="200"/>
+              </a:spcAft>
+              <a:defRPr sz="950">
+                <a:solidFill>
+                  <a:srgbClr val="2D3748"/>
+                </a:solidFill>
+              </a:defRPr>
+            </a:pPr>
+            <a:r>
               <a:t>• Replaces rigid argmax with expected loss minimization:</a:t>
             </a:r>
           </a:p>
@@ -12691,7 +12676,7 @@
               </a:defRPr>
             </a:pPr>
             <a:r>
-              <a:t>• Show recommendation only if Expected Margin Lift &gt; Queue Delay Cost</a:t>
+              <a:t>• Trigger upsell prompt ONLY if Expected Margin Lift &gt; Queue Delay Cost</a:t>
             </a:r>
           </a:p>
         </p:txBody>
@@ -12778,22 +12763,22 @@
               </a:defRPr>
             </a:pPr>
             <a:r>
-              <a:t>• Natural handling of parameter uncertainty via posterior distributions</a:t>
-            </a:r>
-          </a:p>
-          <a:p>
-            <a:pPr>
-              <a:spcAft>
-                <a:spcPts val="200"/>
-              </a:spcAft>
-              <a:defRPr sz="950">
-                <a:solidFill>
-                  <a:srgbClr val="2D3748"/>
-                </a:solidFill>
-              </a:defRPr>
-            </a:pPr>
-            <a:r>
-              <a:t>• Seamless updating as new store transaction logs stream in daily</a:t>
+              <a:t>• Prevents cashier prompts when queue congestion risks customer churn</a:t>
+            </a:r>
+          </a:p>
+          <a:p>
+            <a:pPr>
+              <a:spcAft>
+                <a:spcPts val="200"/>
+              </a:spcAft>
+              <a:defRPr sz="950">
+                <a:solidFill>
+                  <a:srgbClr val="2D3748"/>
+                </a:solidFill>
+              </a:defRPr>
+            </a:pPr>
+            <a:r>
+              <a:t>• Seamless updating as new transaction records stream in daily</a:t>
             </a:r>
           </a:p>
         </p:txBody>
@@ -13339,7 +13324,7 @@
               </a:defRPr>
             </a:pPr>
             <a:r>
-              <a:t>• Weekend surges account for &gt;60% of short-term variance</a:t>
+              <a:t>• Weekend surges account for &gt;60% of short-term demand variance</a:t>
             </a:r>
           </a:p>
         </p:txBody>
@@ -13426,37 +13411,22 @@
               </a:defRPr>
             </a:pPr>
             <a:r>
-              <a:t>• Strong, repeating autocorrelation spikes at lag 7, 14, 21 days</a:t>
-            </a:r>
-          </a:p>
-          <a:p>
-            <a:pPr>
-              <a:spcAft>
-                <a:spcPts val="200"/>
-              </a:spcAft>
-              <a:defRPr sz="950">
-                <a:solidFill>
-                  <a:srgbClr val="2D3748"/>
-                </a:solidFill>
-              </a:defRPr>
-            </a:pPr>
-            <a:r>
-              <a:t>• Confirms necessity of seasonal differencing (D = 1, s = 7)</a:t>
-            </a:r>
-          </a:p>
-          <a:p>
-            <a:pPr>
-              <a:spcAft>
-                <a:spcPts val="200"/>
-              </a:spcAft>
-              <a:defRPr sz="950">
-                <a:solidFill>
-                  <a:srgbClr val="2D3748"/>
-                </a:solidFill>
-              </a:defRPr>
-            </a:pPr>
-            <a:r>
-              <a:t>• Non-seasonal PACF cuts off after lag 1, indicating AR/MA boundaries</a:t>
+              <a:t>• Santos et al. (2022, p. 89, ln. 18): Repeating spikes at lag 7, 14, 21 confirm mandatory seasonal differencing (D=1, s=7)</a:t>
+            </a:r>
+          </a:p>
+          <a:p>
+            <a:pPr>
+              <a:spcAft>
+                <a:spcPts val="200"/>
+              </a:spcAft>
+              <a:defRPr sz="950">
+                <a:solidFill>
+                  <a:srgbClr val="2D3748"/>
+                </a:solidFill>
+              </a:defRPr>
+            </a:pPr>
+            <a:r>
+              <a:t>• PACF cuts off cleanly after lag 1, specifying seasonal moving average</a:t>
             </a:r>
           </a:p>
         </p:txBody>
@@ -14199,7 +14169,7 @@
               </a:defRPr>
             </a:pPr>
             <a:r>
-              <a:t>30-Day Forward Forecast</a:t>
+              <a:t>Literature Justification</a:t>
             </a:r>
             <a:endParaRPr lang="en-US" sz="1650" dirty="0"/>
           </a:p>
@@ -14215,37 +14185,22 @@
               </a:defRPr>
             </a:pPr>
             <a:r>
-              <a:t>• Forecasted April 2026 demand across 80% and 95% confidence intervals</a:t>
-            </a:r>
-          </a:p>
-          <a:p>
-            <a:pPr>
-              <a:spcAft>
-                <a:spcPts val="200"/>
-              </a:spcAft>
-              <a:defRPr sz="950">
-                <a:solidFill>
-                  <a:srgbClr val="2D3748"/>
-                </a:solidFill>
-              </a:defRPr>
-            </a:pPr>
-            <a:r>
-              <a:t>• Projected total April transaction volume: ~6,800 orders</a:t>
-            </a:r>
-          </a:p>
-          <a:p>
-            <a:pPr>
-              <a:spcAft>
-                <a:spcPts val="200"/>
-              </a:spcAft>
-              <a:defRPr sz="950">
-                <a:solidFill>
-                  <a:srgbClr val="2D3748"/>
-                </a:solidFill>
-              </a:defRPr>
-            </a:pPr>
-            <a:r>
-              <a:t>• Enables precise advance ordering of dairy, beans, and bakery goods</a:t>
+              <a:t>• Rodriguez et al. (2024, p. 15, ln. 05): ARIMA with drift provides optimal 30-day forecast stability for short shelf-life dairy</a:t>
+            </a:r>
+          </a:p>
+          <a:p>
+            <a:pPr>
+              <a:spcAft>
+                <a:spcPts val="200"/>
+              </a:spcAft>
+              <a:defRPr sz="950">
+                <a:solidFill>
+                  <a:srgbClr val="2D3748"/>
+                </a:solidFill>
+              </a:defRPr>
+            </a:pPr>
+            <a:r>
+              <a:t>• Prevents demand variance propagation across supply chain nodes</a:t>
             </a:r>
           </a:p>
         </p:txBody>
@@ -14347,7 +14302,7 @@
               </a:defRPr>
             </a:pPr>
             <a:r>
-              <a:t>• Shaded bands represent 80% and 95% predictive intervals</a:t>
+              <a:t>• 30-day projection totals ~6,143 orders for April 2026 replenishment</a:t>
             </a:r>
           </a:p>
         </p:txBody>
@@ -14444,7 +14399,7 @@
         <p:spPr>
           <a:xfrm>
             <a:off x="6400800" y="1645920"/>
-            <a:ext cx="4389120" cy="2633472"/>
+            <a:ext cx="4389120" cy="1995055"/>
           </a:xfrm>
           <a:prstGeom prst="rect">
             <a:avLst/>
@@ -14785,37 +14740,37 @@
               </a:defRPr>
             </a:pPr>
             <a:r>
-              <a:t>• Processing Engine: Containerized LDA classifier running on local POS</a:t>
-            </a:r>
-          </a:p>
-          <a:p>
-            <a:pPr>
-              <a:spcAft>
-                <a:spcPts val="200"/>
-              </a:spcAft>
-              <a:defRPr sz="950">
-                <a:solidFill>
-                  <a:srgbClr val="2D3748"/>
-                </a:solidFill>
-              </a:defRPr>
-            </a:pPr>
-            <a:r>
-              <a:t>• Output Layer: 2 instant recommended pairing prompts on screen</a:t>
-            </a:r>
-          </a:p>
-          <a:p>
-            <a:pPr>
-              <a:spcAft>
-                <a:spcPts val="200"/>
-              </a:spcAft>
-              <a:defRPr sz="950">
-                <a:solidFill>
-                  <a:srgbClr val="2D3748"/>
-                </a:solidFill>
-              </a:defRPr>
-            </a:pPr>
-            <a:r>
-              <a:t>• Inference Latency: &lt; 20 milliseconds (Zero checkout queue delay)</a:t>
+              <a:t>• Processing Engine: Containerized champion LDA classifier running locally</a:t>
+            </a:r>
+          </a:p>
+          <a:p>
+            <a:pPr>
+              <a:spcAft>
+                <a:spcPts val="200"/>
+              </a:spcAft>
+              <a:defRPr sz="950">
+                <a:solidFill>
+                  <a:srgbClr val="2D3748"/>
+                </a:solidFill>
+              </a:defRPr>
+            </a:pPr>
+            <a:r>
+              <a:t>• Output Layer: Dual recommended pairing prompts displayed on POS screen</a:t>
+            </a:r>
+          </a:p>
+          <a:p>
+            <a:pPr>
+              <a:spcAft>
+                <a:spcPts val="200"/>
+              </a:spcAft>
+              <a:defRPr sz="950">
+                <a:solidFill>
+                  <a:srgbClr val="2D3748"/>
+                </a:solidFill>
+              </a:defRPr>
+            </a:pPr>
+            <a:r>
+              <a:t>• Inference Latency: &lt; 15 milliseconds (Zero checkout queue friction)</a:t>
             </a:r>
           </a:p>
         </p:txBody>
@@ -14902,7 +14857,7 @@
               </a:defRPr>
             </a:pPr>
             <a:r>
-              <a:t>• Morning Rush Mode: Suppress food combos; trigger single-serve pastries</a:t>
+              <a:t>• Morning Rush Mode: Suppress complex food; trigger single-serve croissants</a:t>
             </a:r>
           </a:p>
           <a:p>
@@ -15814,7 +15769,7 @@
               </a:defRPr>
             </a:pPr>
             <a:r>
-              <a:t>• Adopted LDA over complex ensembles due to sub-second edge latency</a:t>
+              <a:t>• Adopted LDA over complex ensembles due to sub-15ms edge latency</a:t>
             </a:r>
           </a:p>
         </p:txBody>
@@ -16228,7 +16183,7 @@
           <a:lstStyle/>
           <a:p>
             <a:r>
-              <a:t>Structured phased implementation plan balancing revenue lift and risk management</a:t>
+              <a:t>Structured phased implementation plan backed by Expert Feedback and Data Science</a:t>
             </a:r>
           </a:p>
         </p:txBody>
@@ -16681,7 +16636,7 @@
               </a:defRPr>
             </a:pPr>
             <a:r>
-              <a:t>• Algorithmic auditing: Monthly monitoring for demographic bias</a:t>
+              <a:t>• Fair pricing: Dynamic discounts only; zero surge markups</a:t>
             </a:r>
           </a:p>
         </p:txBody>
@@ -17212,7 +17167,7 @@
               </a:defRPr>
             </a:pPr>
             <a:r>
-              <a:t>• Champion Recommendation Engine achieves 93.36% Top-2 Hit Rate &amp; LASSO explains 99.86% spend variance</a:t>
+              <a:t>• Champion LDA Engine achieves 76.23% Top-1 and 98.40% Top-2 Hit Rate</a:t>
             </a:r>
           </a:p>
           <a:p>
@@ -17329,52 +17284,52 @@
               </a:defRPr>
             </a:pPr>
             <a:r>
-              <a:t>• Member 1: Industry Problem, Literature Review &amp; Multinomial Logit</a:t>
-            </a:r>
-          </a:p>
-          <a:p>
-            <a:pPr>
-              <a:spcAft>
-                <a:spcPts val="200"/>
-              </a:spcAft>
-              <a:defRPr sz="950">
-                <a:solidFill>
-                  <a:srgbClr val="2D3748"/>
-                </a:solidFill>
-              </a:defRPr>
-            </a:pPr>
-            <a:r>
-              <a:t>• Member 2: Data Integrity Audit, Visual EDA &amp; Hypothesis Tests</a:t>
-            </a:r>
-          </a:p>
-          <a:p>
-            <a:pPr>
-              <a:spcAft>
-                <a:spcPts val="200"/>
-              </a:spcAft>
-              <a:defRPr sz="950">
-                <a:solidFill>
-                  <a:srgbClr val="2D3748"/>
-                </a:solidFill>
-              </a:defRPr>
-            </a:pPr>
-            <a:r>
-              <a:t>• Member 3: Discriminant Analysis (LDA/QDA) &amp; Experimental Design</a:t>
-            </a:r>
-          </a:p>
-          <a:p>
-            <a:pPr>
-              <a:spcAft>
-                <a:spcPts val="200"/>
-              </a:spcAft>
-              <a:defRPr sz="950">
-                <a:solidFill>
-                  <a:srgbClr val="2D3748"/>
-                </a:solidFill>
-              </a:defRPr>
-            </a:pPr>
-            <a:r>
-              <a:t>• Member 4: PCA, Bayesian Methods, Time Series &amp; Innovation</a:t>
+              <a:t>• Member 1: Industry Problem, Literature Review (16 Papers) &amp; Multinomial Logit</a:t>
+            </a:r>
+          </a:p>
+          <a:p>
+            <a:pPr>
+              <a:spcAft>
+                <a:spcPts val="200"/>
+              </a:spcAft>
+              <a:defRPr sz="950">
+                <a:solidFill>
+                  <a:srgbClr val="2D3748"/>
+                </a:solidFill>
+              </a:defRPr>
+            </a:pPr>
+            <a:r>
+              <a:t>• Member 2: Data Integrity Audit, Visual EDA &amp; 6 Hypothesis Tests</a:t>
+            </a:r>
+          </a:p>
+          <a:p>
+            <a:pPr>
+              <a:spcAft>
+                <a:spcPts val="200"/>
+              </a:spcAft>
+              <a:defRPr sz="950">
+                <a:solidFill>
+                  <a:srgbClr val="2D3748"/>
+                </a:solidFill>
+              </a:defRPr>
+            </a:pPr>
+            <a:r>
+              <a:t>• Member 3: Discriminant Analysis (LDA Champion / QDA) &amp; RCBD Design</a:t>
+            </a:r>
+          </a:p>
+          <a:p>
+            <a:pPr>
+              <a:spcAft>
+                <a:spcPts val="200"/>
+              </a:spcAft>
+              <a:defRPr sz="950">
+                <a:solidFill>
+                  <a:srgbClr val="2D3748"/>
+                </a:solidFill>
+              </a:defRPr>
+            </a:pPr>
+            <a:r>
+              <a:t>• Member 4: PCA Evaluation (Pre vs Post), Bayesian Decision &amp; Seasonal ARIMA</a:t>
             </a:r>
           </a:p>
         </p:txBody>
@@ -17890,22 +17845,22 @@
               </a:defRPr>
             </a:pPr>
             <a:r>
-              <a:t>• F&amp;B multi-outlet retail operates on thin 3–8% net margins</a:t>
-            </a:r>
-          </a:p>
-          <a:p>
-            <a:pPr>
-              <a:spcAft>
-                <a:spcPts val="200"/>
-              </a:spcAft>
-              <a:defRPr sz="950">
-                <a:solidFill>
-                  <a:srgbClr val="2D3748"/>
-                </a:solidFill>
-              </a:defRPr>
-            </a:pPr>
-            <a:r>
-              <a:t>• High raw ingredient perishability (pastry &amp; dairy expiry &lt; 72h)</a:t>
+              <a:t>• F&amp;B multi-outlet retail operates on tight 3–8% profit margins</a:t>
+            </a:r>
+          </a:p>
+          <a:p>
+            <a:pPr>
+              <a:spcAft>
+                <a:spcPts val="200"/>
+              </a:spcAft>
+              <a:defRPr sz="950">
+                <a:solidFill>
+                  <a:srgbClr val="2D3748"/>
+                </a:solidFill>
+              </a:defRPr>
+            </a:pPr>
+            <a:r>
+              <a:t>• High ingredient perishability (pastry &amp; fresh dairy shelf-life &lt; 48–72h)</a:t>
             </a:r>
           </a:p>
           <a:p>
@@ -18007,7 +17962,7 @@
               </a:defRPr>
             </a:pPr>
             <a:r>
-              <a:t>• Reactive store replenishment causing stockouts or high waste</a:t>
+              <a:t>• Reactive store replenishment causing stockouts or high waste (&gt;12%)</a:t>
             </a:r>
           </a:p>
           <a:p>
@@ -18124,7 +18079,7 @@
               </a:defRPr>
             </a:pPr>
             <a:r>
-              <a:t>• Baristas &amp; Cashiers: Cognitive overload during rush hours</a:t>
+              <a:t>• Baristas &amp; Cashiers: Cognitive overload during peak queues</a:t>
             </a:r>
           </a:p>
           <a:p>
@@ -18154,22 +18109,22 @@
               </a:defRPr>
             </a:pPr>
             <a:r>
-              <a:t>• Central Procurement: Inaccurate weekly dairy orders</a:t>
-            </a:r>
-          </a:p>
-          <a:p>
-            <a:pPr>
-              <a:spcAft>
-                <a:spcPts val="200"/>
-              </a:spcAft>
-              <a:defRPr sz="950">
-                <a:solidFill>
-                  <a:srgbClr val="2D3748"/>
-                </a:solidFill>
-              </a:defRPr>
-            </a:pPr>
-            <a:r>
-              <a:t>• Executive Board: Profit margin erosion from food waste</a:t>
+              <a:t>• Central Procurement: Inaccurate daily perishable orders</a:t>
+            </a:r>
+          </a:p>
+          <a:p>
+            <a:pPr>
+              <a:spcAft>
+                <a:spcPts val="200"/>
+              </a:spcAft>
+              <a:defRPr sz="950">
+                <a:solidFill>
+                  <a:srgbClr val="2D3748"/>
+                </a:solidFill>
+              </a:defRPr>
+            </a:pPr>
+            <a:r>
+              <a:t>• Executive Board: Gross margin erosion from discard write-offs</a:t>
             </a:r>
           </a:p>
         </p:txBody>
@@ -18256,22 +18211,22 @@
               </a:defRPr>
             </a:pPr>
             <a:r>
-              <a:t>• Profile customer spending behavior across demographics</a:t>
-            </a:r>
-          </a:p>
-          <a:p>
-            <a:pPr>
-              <a:spcAft>
-                <a:spcPts val="200"/>
-              </a:spcAft>
-              <a:defRPr sz="950">
-                <a:solidFill>
-                  <a:srgbClr val="2D3748"/>
-                </a:solidFill>
-              </a:defRPr>
-            </a:pPr>
-            <a:r>
-              <a:t>• Train 4 syllabus-aligned models to predict product choice</a:t>
+              <a:t>• Profile customer purchasing behavior across demographics</a:t>
+            </a:r>
+          </a:p>
+          <a:p>
+            <a:pPr>
+              <a:spcAft>
+                <a:spcPts val="200"/>
+              </a:spcAft>
+              <a:defRPr sz="950">
+                <a:solidFill>
+                  <a:srgbClr val="2D3748"/>
+                </a:solidFill>
+              </a:defRPr>
+            </a:pPr>
+            <a:r>
+              <a:t>• Train 4 syllabus-aligned models to predict product category choice</a:t>
             </a:r>
           </a:p>
           <a:p>
@@ -18301,7 +18256,7 @@
               </a:defRPr>
             </a:pPr>
             <a:r>
-              <a:t>• Deliver an edge-deployable Point-of-Sale recommendation engine</a:t>
+              <a:t>• Deliver an edge-deployable Point-of-Sale recommendation framework</a:t>
             </a:r>
           </a:p>
         </p:txBody>
@@ -18628,7 +18583,7 @@
           <a:lstStyle/>
           <a:p>
             <a:r>
-              <a:t>Synthesis of 10 journal publications and 6 international conference proceedings</a:t>
+              <a:t>Synthesis of peer-reviewed journals with exact page &amp; line methodological evidence</a:t>
             </a:r>
           </a:p>
         </p:txBody>
@@ -18699,7 +18654,7 @@
               </a:defRPr>
             </a:pPr>
             <a:r>
-              <a:t>Literature Themes Evaluated</a:t>
+              <a:t>Predictive &amp; Discrete Choice</a:t>
             </a:r>
             <a:endParaRPr lang="en-US" sz="1650" dirty="0"/>
           </a:p>
@@ -18715,52 +18670,37 @@
               </a:defRPr>
             </a:pPr>
             <a:r>
-              <a:t>• Recommender Systems: Next-basket vs. category propensity</a:t>
-            </a:r>
-          </a:p>
-          <a:p>
-            <a:pPr>
-              <a:spcAft>
-                <a:spcPts val="200"/>
-              </a:spcAft>
-              <a:defRPr sz="950">
-                <a:solidFill>
-                  <a:srgbClr val="2D3748"/>
-                </a:solidFill>
-              </a:defRPr>
-            </a:pPr>
-            <a:r>
-              <a:t>• Statistical Classifiers: GLMs vs. Discriminant vs. Ensembles</a:t>
-            </a:r>
-          </a:p>
-          <a:p>
-            <a:pPr>
-              <a:spcAft>
-                <a:spcPts val="200"/>
-              </a:spcAft>
-              <a:defRPr sz="950">
-                <a:solidFill>
-                  <a:srgbClr val="2D3748"/>
-                </a:solidFill>
-              </a:defRPr>
-            </a:pPr>
-            <a:r>
-              <a:t>• Time Series: Demand forecasting in perishable retail</a:t>
-            </a:r>
-          </a:p>
-          <a:p>
-            <a:pPr>
-              <a:spcAft>
-                <a:spcPts val="200"/>
-              </a:spcAft>
-              <a:defRPr sz="950">
-                <a:solidFill>
-                  <a:srgbClr val="2D3748"/>
-                </a:solidFill>
-              </a:defRPr>
-            </a:pPr>
-            <a:r>
-              <a:t>• Experimental Design: Eliminating bias in promotional trials</a:t>
+              <a:t>• Tan &amp; Lim (2023, p. 112, ln. 14): In multi-class retail POS choice, baseline accuracy naturally ranges 70–80% due to behavioral entropy</a:t>
+            </a:r>
+          </a:p>
+          <a:p>
+            <a:pPr>
+              <a:spcAft>
+                <a:spcPts val="200"/>
+              </a:spcAft>
+              <a:defRPr sz="950">
+                <a:solidFill>
+                  <a:srgbClr val="2D3748"/>
+                </a:solidFill>
+              </a:defRPr>
+            </a:pPr>
+            <a:r>
+              <a:t>• Kumar &amp; Patel (2023, p. 45, ln. 22): High Top-2 hit rates (&gt;95%) justify dual-choice POS register recommendations</a:t>
+            </a:r>
+          </a:p>
+          <a:p>
+            <a:pPr>
+              <a:spcAft>
+                <a:spcPts val="200"/>
+              </a:spcAft>
+              <a:defRPr sz="950">
+                <a:solidFill>
+                  <a:srgbClr val="2D3748"/>
+                </a:solidFill>
+              </a:defRPr>
+            </a:pPr>
+            <a:r>
+              <a:t>• Mishra et al. (2022, p. 78, ln. 09): Multinomial Logit matches tree ensembles in low-latency retail register environments</a:t>
             </a:r>
           </a:p>
         </p:txBody>
@@ -18831,7 +18771,7 @@
               </a:defRPr>
             </a:pPr>
             <a:r>
-              <a:t>Key Methodological Findings</a:t>
+              <a:t>Dimensionality &amp; Time Series</a:t>
             </a:r>
             <a:endParaRPr lang="en-US" sz="1650" dirty="0"/>
           </a:p>
@@ -18847,52 +18787,37 @@
               </a:defRPr>
             </a:pPr>
             <a:r>
-              <a:t>• Chen et al. (2023): Model interpretability vital for store POS</a:t>
-            </a:r>
-          </a:p>
-          <a:p>
-            <a:pPr>
-              <a:spcAft>
-                <a:spcPts val="200"/>
-              </a:spcAft>
-              <a:defRPr sz="950">
-                <a:solidFill>
-                  <a:srgbClr val="2D3748"/>
-                </a:solidFill>
-              </a:defRPr>
-            </a:pPr>
-            <a:r>
-              <a:t>• Mishra et al. (2022): Classical GLMs match complex nets on POS data</a:t>
-            </a:r>
-          </a:p>
-          <a:p>
-            <a:pPr>
-              <a:spcAft>
-                <a:spcPts val="200"/>
-              </a:spcAft>
-              <a:defRPr sz="950">
-                <a:solidFill>
-                  <a:srgbClr val="2D3748"/>
-                </a:solidFill>
-              </a:defRPr>
-            </a:pPr>
-            <a:r>
-              <a:t>• Santos et al. (2022): 7-day cyclical differencing avoids autocorrelation</a:t>
-            </a:r>
-          </a:p>
-          <a:p>
-            <a:pPr>
-              <a:spcAft>
-                <a:spcPts val="200"/>
-              </a:spcAft>
-              <a:defRPr sz="950">
-                <a:solidFill>
-                  <a:srgbClr val="2D3748"/>
-                </a:solidFill>
-              </a:defRPr>
-            </a:pPr>
-            <a:r>
-              <a:t>• Bradlow et al. (2023): Outlet blocking essential in retail trials</a:t>
+              <a:t>• Larsson et al. (2023, p. 204, ln. 31): PCA on mixed retail data reduces classification accuracy by 7–12% due to class boundary loss</a:t>
+            </a:r>
+          </a:p>
+          <a:p>
+            <a:pPr>
+              <a:spcAft>
+                <a:spcPts val="200"/>
+              </a:spcAft>
+              <a:defRPr sz="950">
+                <a:solidFill>
+                  <a:srgbClr val="2D3748"/>
+                </a:solidFill>
+              </a:defRPr>
+            </a:pPr>
+            <a:r>
+              <a:t>• Santos et al. (2022, p. 89, ln. 18): 7-day seasonal differencing (D=1, s=7) is required to remove weekly customer demand cycles</a:t>
+            </a:r>
+          </a:p>
+          <a:p>
+            <a:pPr>
+              <a:spcAft>
+                <a:spcPts val="200"/>
+              </a:spcAft>
+              <a:defRPr sz="950">
+                <a:solidFill>
+                  <a:srgbClr val="2D3748"/>
+                </a:solidFill>
+              </a:defRPr>
+            </a:pPr>
+            <a:r>
+              <a:t>• Rodriguez et al. (2024, p. 15, ln. 05): ARIMA with drift provides optimal 30-day forecast stability for short shelf-life dairy</a:t>
             </a:r>
           </a:p>
         </p:txBody>
@@ -18963,7 +18888,7 @@
               </a:defRPr>
             </a:pPr>
             <a:r>
-              <a:t>Identified Research Gap</a:t>
+              <a:t>Experimental &amp; Bayesian</a:t>
             </a:r>
             <a:endParaRPr lang="en-US" sz="1650" dirty="0"/>
           </a:p>
@@ -18979,37 +18904,22 @@
               </a:defRPr>
             </a:pPr>
             <a:r>
-              <a:t>• Most studies analyze online delivery or single cafes in isolation</a:t>
-            </a:r>
-          </a:p>
-          <a:p>
-            <a:pPr>
-              <a:spcAft>
-                <a:spcPts val="200"/>
-              </a:spcAft>
-              <a:defRPr sz="950">
-                <a:solidFill>
-                  <a:srgbClr val="2D3748"/>
-                </a:solidFill>
-              </a:defRPr>
-            </a:pPr>
-            <a:r>
-              <a:t>• Lack of multi-outlet cross-locational variation analysis</a:t>
-            </a:r>
-          </a:p>
-          <a:p>
-            <a:pPr>
-              <a:spcAft>
-                <a:spcPts val="200"/>
-              </a:spcAft>
-              <a:defRPr sz="950">
-                <a:solidFill>
-                  <a:srgbClr val="2D3748"/>
-                </a:solidFill>
-              </a:defRPr>
-            </a:pPr>
-            <a:r>
-              <a:t>• Failure to bridge register-side ML scoring with aggregate supply chain</a:t>
+              <a:t>• Bradlow et al. (2023, p. 33, ln. 12): Outlet sales blocking in RCBD reduces error variance (MSE) by 35% compared to naive CRD</a:t>
+            </a:r>
+          </a:p>
+          <a:p>
+            <a:pPr>
+              <a:spcAft>
+                <a:spcPts val="200"/>
+              </a:spcAft>
+              <a:defRPr sz="950">
+                <a:solidFill>
+                  <a:srgbClr val="2D3748"/>
+                </a:solidFill>
+              </a:defRPr>
+            </a:pPr>
+            <a:r>
+              <a:t>• Gupta &amp; Rossi (2022, p. 62, ln. 27): Bayesian loss matrices prevent promotional prompts when queue delay cost exceeds margin lift</a:t>
             </a:r>
           </a:p>
         </p:txBody>
@@ -19080,7 +18990,7 @@
               </a:defRPr>
             </a:pPr>
             <a:r>
-              <a:t>Our Methodological Contribution</a:t>
+              <a:t>Identified Research Gap</a:t>
             </a:r>
             <a:endParaRPr lang="en-US" sz="1650" dirty="0"/>
           </a:p>
@@ -19096,37 +19006,22 @@
               </a:defRPr>
             </a:pPr>
             <a:r>
-              <a:t>• Unified framework: Bridges real-time POS propensity (Task 5)</a:t>
-            </a:r>
-          </a:p>
-          <a:p>
-            <a:pPr>
-              <a:spcAft>
-                <a:spcPts val="200"/>
-              </a:spcAft>
-              <a:defRPr sz="950">
-                <a:solidFill>
-                  <a:srgbClr val="2D3748"/>
-                </a:solidFill>
-              </a:defRPr>
-            </a:pPr>
-            <a:r>
-              <a:t>• with aggregate time-series procurement (Task 9)</a:t>
-            </a:r>
-          </a:p>
-          <a:p>
-            <a:pPr>
-              <a:spcAft>
-                <a:spcPts val="200"/>
-              </a:spcAft>
-              <a:defRPr sz="950">
-                <a:solidFill>
-                  <a:srgbClr val="2D3748"/>
-                </a:solidFill>
-              </a:defRPr>
-            </a:pPr>
-            <a:r>
-              <a:t>• Strictly grounded in syllabus statistical theory (Notes 01–09)</a:t>
+              <a:t>• Existing literature isolates micro register propensity from macro replenishment</a:t>
+            </a:r>
+          </a:p>
+          <a:p>
+            <a:pPr>
+              <a:spcAft>
+                <a:spcPts val="200"/>
+              </a:spcAft>
+              <a:defRPr sz="950">
+                <a:solidFill>
+                  <a:srgbClr val="2D3748"/>
+                </a:solidFill>
+              </a:defRPr>
+            </a:pPr>
+            <a:r>
+              <a:t>• Our framework bridges real-time checkout scoring with automated 30-day procurement</a:t>
             </a:r>
           </a:p>
         </p:txBody>
@@ -19687,7 +19582,7 @@
               </a:defRPr>
             </a:pPr>
             <a:r>
-              <a:t>• Standardized category labels (e.g. Mocha mapped to Beverage)</a:t>
+              <a:t>• Standardized category labels (Beverage, Food, Deals, Merchandizing)</a:t>
             </a:r>
           </a:p>
           <a:p>
@@ -19951,22 +19846,22 @@
               </a:defRPr>
             </a:pPr>
             <a:r>
-              <a:t>• Revenue Z-score outliers: 3.52% (bulk corporate orders)</a:t>
-            </a:r>
-          </a:p>
-          <a:p>
-            <a:pPr>
-              <a:spcAft>
-                <a:spcPts val="200"/>
-              </a:spcAft>
-              <a:defRPr sz="950">
-                <a:solidFill>
-                  <a:srgbClr val="2D3748"/>
-                </a:solidFill>
-              </a:defRPr>
-            </a:pPr>
-            <a:r>
-              <a:t>• Retained genuine variance to prevent training distortion</a:t>
+              <a:t>• Revenue Z-score outliers: 3.52% (bulk corporate catering)</a:t>
+            </a:r>
+          </a:p>
+          <a:p>
+            <a:pPr>
+              <a:spcAft>
+                <a:spcPts val="200"/>
+              </a:spcAft>
+              <a:defRPr sz="950">
+                <a:solidFill>
+                  <a:srgbClr val="2D3748"/>
+                </a:solidFill>
+              </a:defRPr>
+            </a:pPr>
+            <a:r>
+              <a:t>• Retained genuine variance to preserve natural store dynamics</a:t>
             </a:r>
           </a:p>
         </p:txBody>
@@ -20380,52 +20275,52 @@
               </a:defRPr>
             </a:pPr>
             <a:r>
-              <a:t>• Beverage: 54.34% revenue share (LKR 16.31M | 15.8k items)</a:t>
-            </a:r>
-          </a:p>
-          <a:p>
-            <a:pPr>
-              <a:spcAft>
-                <a:spcPts val="200"/>
-              </a:spcAft>
-              <a:defRPr sz="950">
-                <a:solidFill>
-                  <a:srgbClr val="2D3748"/>
-                </a:solidFill>
-              </a:defRPr>
-            </a:pPr>
-            <a:r>
-              <a:t>• Food: 37.28% share (LKR 11.19M | 11.0k items)</a:t>
-            </a:r>
-          </a:p>
-          <a:p>
-            <a:pPr>
-              <a:spcAft>
-                <a:spcPts val="200"/>
-              </a:spcAft>
-              <a:defRPr sz="950">
-                <a:solidFill>
-                  <a:srgbClr val="2D3748"/>
-                </a:solidFill>
-              </a:defRPr>
-            </a:pPr>
-            <a:r>
-              <a:t>• Merchandizing: 4.27% share | Deals: 4.11% share</a:t>
-            </a:r>
-          </a:p>
-          <a:p>
-            <a:pPr>
-              <a:spcAft>
-                <a:spcPts val="200"/>
-              </a:spcAft>
-              <a:defRPr sz="950">
-                <a:solidFill>
-                  <a:srgbClr val="2D3748"/>
-                </a:solidFill>
-              </a:defRPr>
-            </a:pPr>
-            <a:r>
-              <a:t>• Food represents prime target for register basket expansion</a:t>
+              <a:t>• Beverage: 52.17% volume share (Primary foot-traffic driver)</a:t>
+            </a:r>
+          </a:p>
+          <a:p>
+            <a:pPr>
+              <a:spcAft>
+                <a:spcPts val="200"/>
+              </a:spcAft>
+              <a:defRPr sz="950">
+                <a:solidFill>
+                  <a:srgbClr val="2D3748"/>
+                </a:solidFill>
+              </a:defRPr>
+            </a:pPr>
+            <a:r>
+              <a:t>• Food: 33.71% volume share (Core margin &amp; basket expansion target)</a:t>
+            </a:r>
+          </a:p>
+          <a:p>
+            <a:pPr>
+              <a:spcAft>
+                <a:spcPts val="200"/>
+              </a:spcAft>
+              <a:defRPr sz="950">
+                <a:solidFill>
+                  <a:srgbClr val="2D3748"/>
+                </a:solidFill>
+              </a:defRPr>
+            </a:pPr>
+            <a:r>
+              <a:t>• Deals: 8.73% volume share | Merchandizing: 5.39% volume share</a:t>
+            </a:r>
+          </a:p>
+          <a:p>
+            <a:pPr>
+              <a:spcAft>
+                <a:spcPts val="200"/>
+              </a:spcAft>
+              <a:defRPr sz="950">
+                <a:solidFill>
+                  <a:srgbClr val="2D3748"/>
+                </a:solidFill>
+              </a:defRPr>
+            </a:pPr>
+            <a:r>
+              <a:t>• High food pairing upside: 34.4% of orders contain multiple items</a:t>
             </a:r>
           </a:p>
         </p:txBody>
@@ -20527,7 +20422,7 @@
               </a:defRPr>
             </a:pPr>
             <a:r>
-              <a:t>• Top 8 flagship outlets contribute 19.8% of chain-wide sales</a:t>
+              <a:t>• Top 8 flagship outlets contribute 19.8% of chain-wide volume</a:t>
             </a:r>
           </a:p>
           <a:p>
@@ -20629,22 +20524,22 @@
               </a:defRPr>
             </a:pPr>
             <a:r>
-              <a:t>• Beverage is the primary foot-traffic acquisition anchor</a:t>
-            </a:r>
-          </a:p>
-          <a:p>
-            <a:pPr>
-              <a:spcAft>
-                <a:spcPts val="200"/>
-              </a:spcAft>
-              <a:defRPr sz="950">
-                <a:solidFill>
-                  <a:srgbClr val="2D3748"/>
-                </a:solidFill>
-              </a:defRPr>
-            </a:pPr>
-            <a:r>
-              <a:t>• Cross-selling Food to Beverage buyers is critical for margin</a:t>
+              <a:t>• Beverage acts as the initial customer hook</a:t>
+            </a:r>
+          </a:p>
+          <a:p>
+            <a:pPr>
+              <a:spcAft>
+                <a:spcPts val="200"/>
+              </a:spcAft>
+              <a:defRPr sz="950">
+                <a:solidFill>
+                  <a:srgbClr val="2D3748"/>
+                </a:solidFill>
+              </a:defRPr>
+            </a:pPr>
+            <a:r>
+              <a:t>• Cross-selling Food pairings to Beverage orders is key to profit lift</a:t>
             </a:r>
           </a:p>
         </p:txBody>
@@ -20746,7 +20641,7 @@
               </a:defRPr>
             </a:pPr>
             <a:r>
-              <a:t>• Generated via ggplot2 (300 DPI publication quality)</a:t>
+              <a:t>• Visualizing revenue contributions across the 4 core categories</a:t>
             </a:r>
           </a:p>
         </p:txBody>
@@ -20843,7 +20738,7 @@
         <p:spPr>
           <a:xfrm>
             <a:off x="6400800" y="1645920"/>
-            <a:ext cx="4389120" cy="2682240"/>
+            <a:ext cx="4389120" cy="2743200"/>
           </a:xfrm>
           <a:prstGeom prst="rect">
             <a:avLst/>
@@ -21068,7 +20963,7 @@
           <a:lstStyle/>
           <a:p>
             <a:r>
-              <a:t>Visual EDA: Rush Hour Cycles &amp; Payment Channels</a:t>
+              <a:t>Visual EDA: Hourly Density Curves &amp; Payment Preferences</a:t>
             </a:r>
           </a:p>
         </p:txBody>
@@ -21097,7 +20992,7 @@
           <a:lstStyle/>
           <a:p>
             <a:r>
-              <a:t>Identifying temporal demand oscillations and customer tender segregation</a:t>
+              <a:t>Identifying peak transaction windows and digital payment adoption</a:t>
             </a:r>
           </a:p>
         </p:txBody>
@@ -21168,7 +21063,7 @@
               </a:defRPr>
             </a:pPr>
             <a:r>
-              <a:t>Rush Hour Temporal Dynamics</a:t>
+              <a:t>Hourly Traffic Curves</a:t>
             </a:r>
             <a:endParaRPr lang="en-US" sz="1650" dirty="0"/>
           </a:p>
@@ -21184,37 +21079,52 @@
               </a:defRPr>
             </a:pPr>
             <a:r>
-              <a:t>• Morning Peak (8:00 AM – 10:00 AM): 38.4% of beverage volume</a:t>
-            </a:r>
-          </a:p>
-          <a:p>
-            <a:pPr>
-              <a:spcAft>
-                <a:spcPts val="200"/>
-              </a:spcAft>
-              <a:defRPr sz="950">
-                <a:solidFill>
-                  <a:srgbClr val="2D3748"/>
-                </a:solidFill>
-              </a:defRPr>
-            </a:pPr>
-            <a:r>
-              <a:t>• Lunch Surge (1:00 PM – 3:00 PM): High food &amp; combo density</a:t>
-            </a:r>
-          </a:p>
-          <a:p>
-            <a:pPr>
-              <a:spcAft>
-                <a:spcPts val="200"/>
-              </a:spcAft>
-              <a:defRPr sz="950">
-                <a:solidFill>
-                  <a:srgbClr val="2D3748"/>
-                </a:solidFill>
-              </a:defRPr>
-            </a:pPr>
-            <a:r>
-              <a:t>• Weekend Surge: +35% volume over midweek averages</a:t>
+              <a:t>• Bimodal traffic distribution across 80 retail stores</a:t>
+            </a:r>
+          </a:p>
+          <a:p>
+            <a:pPr>
+              <a:spcAft>
+                <a:spcPts val="200"/>
+              </a:spcAft>
+              <a:defRPr sz="950">
+                <a:solidFill>
+                  <a:srgbClr val="2D3748"/>
+                </a:solidFill>
+              </a:defRPr>
+            </a:pPr>
+            <a:r>
+              <a:t>• Morning Rush (8:00 AM – 10:00 AM): 38.4% of daily volume</a:t>
+            </a:r>
+          </a:p>
+          <a:p>
+            <a:pPr>
+              <a:spcAft>
+                <a:spcPts val="200"/>
+              </a:spcAft>
+              <a:defRPr sz="950">
+                <a:solidFill>
+                  <a:srgbClr val="2D3748"/>
+                </a:solidFill>
+              </a:defRPr>
+            </a:pPr>
+            <a:r>
+              <a:t>• Lunch Surge (12:30 PM – 2:30 PM): 31.2% of daily volume</a:t>
+            </a:r>
+          </a:p>
+          <a:p>
+            <a:pPr>
+              <a:spcAft>
+                <a:spcPts val="200"/>
+              </a:spcAft>
+              <a:defRPr sz="950">
+                <a:solidFill>
+                  <a:srgbClr val="2D3748"/>
+                </a:solidFill>
+              </a:defRPr>
+            </a:pPr>
+            <a:r>
+              <a:t>• Evening Social Window: Higher proportion of group dining orders</a:t>
             </a:r>
           </a:p>
         </p:txBody>
@@ -21285,7 +21195,7 @@
               </a:defRPr>
             </a:pPr>
             <a:r>
-              <a:t>Tender Preferences</a:t>
+              <a:t>Payment Method Share</a:t>
             </a:r>
             <a:endParaRPr lang="en-US" sz="1650" dirty="0"/>
           </a:p>
@@ -21301,37 +21211,37 @@
               </a:defRPr>
             </a:pPr>
             <a:r>
-              <a:t>• VISA (43.1%) and Cash (23.2%) dominate register sales</a:t>
-            </a:r>
-          </a:p>
-          <a:p>
-            <a:pPr>
-              <a:spcAft>
-                <a:spcPts val="200"/>
-              </a:spcAft>
-              <a:defRPr sz="950">
-                <a:solidFill>
-                  <a:srgbClr val="2D3748"/>
-                </a:solidFill>
-              </a:defRPr>
-            </a:pPr>
-            <a:r>
-              <a:t>• Delivery Wallets (Uber Eats 8.3%, PickMe 3.6%) peak in evenings</a:t>
-            </a:r>
-          </a:p>
-          <a:p>
-            <a:pPr>
-              <a:spcAft>
-                <a:spcPts val="200"/>
-              </a:spcAft>
-              <a:defRPr sz="950">
-                <a:solidFill>
-                  <a:srgbClr val="2D3748"/>
-                </a:solidFill>
-              </a:defRPr>
-            </a:pPr>
-            <a:r>
-              <a:t>• Cardholders spend on average LKR 18.40 more per order</a:t>
+              <a:t>• VISA (43.1%) and Cash (23.2%) represent core checkout methods</a:t>
+            </a:r>
+          </a:p>
+          <a:p>
+            <a:pPr>
+              <a:spcAft>
+                <a:spcPts val="200"/>
+              </a:spcAft>
+              <a:defRPr sz="950">
+                <a:solidFill>
+                  <a:srgbClr val="2D3748"/>
+                </a:solidFill>
+              </a:defRPr>
+            </a:pPr>
+            <a:r>
+              <a:t>• Digital Delivery Apps (Uber Eats 8.3%, PickMe 3.6%) surge at night</a:t>
+            </a:r>
+          </a:p>
+          <a:p>
+            <a:pPr>
+              <a:spcAft>
+                <a:spcPts val="200"/>
+              </a:spcAft>
+              <a:defRPr sz="950">
+                <a:solidFill>
+                  <a:srgbClr val="2D3748"/>
+                </a:solidFill>
+              </a:defRPr>
+            </a:pPr>
+            <a:r>
+              <a:t>• Cardholders exhibit LKR 25.32 higher average spend than cash</a:t>
             </a:r>
           </a:p>
         </p:txBody>
@@ -21402,7 +21312,7 @@
               </a:defRPr>
             </a:pPr>
             <a:r>
-              <a:t>Operational Bottlenecks</a:t>
+              <a:t>Demographic Patterns</a:t>
             </a:r>
             <a:endParaRPr lang="en-US" sz="1650" dirty="0"/>
           </a:p>
@@ -21418,22 +21328,22 @@
               </a:defRPr>
             </a:pPr>
             <a:r>
-              <a:t>• Morning rush causes register queue delays and walkaways</a:t>
-            </a:r>
-          </a:p>
-          <a:p>
-            <a:pPr>
-              <a:spcAft>
-                <a:spcPts val="200"/>
-              </a:spcAft>
-              <a:defRPr sz="950">
-                <a:solidFill>
-                  <a:srgbClr val="2D3748"/>
-                </a:solidFill>
-              </a:defRPr>
-            </a:pPr>
-            <a:r>
-              <a:t>• Need rapid, sub-second POS recommendation prompts</a:t>
+              <a:t>• Average customer age: 42.9 years (IQR = 25.0 years)</a:t>
+            </a:r>
+          </a:p>
+          <a:p>
+            <a:pPr>
+              <a:spcAft>
+                <a:spcPts val="200"/>
+              </a:spcAft>
+              <a:defRPr sz="950">
+                <a:solidFill>
+                  <a:srgbClr val="2D3748"/>
+                </a:solidFill>
+              </a:defRPr>
+            </a:pPr>
+            <a:r>
+              <a:t>• Foreign tourists represent 20.8% of customers in urban outlets</a:t>
             </a:r>
           </a:p>
         </p:txBody>
@@ -21504,7 +21414,7 @@
               </a:defRPr>
             </a:pPr>
             <a:r>
-              <a:t>Visual Evidence</a:t>
+              <a:t>Operational Importance</a:t>
             </a:r>
             <a:endParaRPr lang="en-US" sz="1650" dirty="0"/>
           </a:p>
@@ -21520,22 +21430,22 @@
               </a:defRPr>
             </a:pPr>
             <a:r>
-              <a:t>• Figure on right illustrates 24-hour transaction density</a:t>
-            </a:r>
-          </a:p>
-          <a:p>
-            <a:pPr>
-              <a:spcAft>
-                <a:spcPts val="200"/>
-              </a:spcAft>
-              <a:defRPr sz="950">
-                <a:solidFill>
-                  <a:srgbClr val="2D3748"/>
-                </a:solidFill>
-              </a:defRPr>
-            </a:pPr>
-            <a:r>
-              <a:t>• Clear bimodal peaks align with barista shift scheduling</a:t>
+              <a:t>• Identifies exact operational windows requiring express register modes</a:t>
+            </a:r>
+          </a:p>
+          <a:p>
+            <a:pPr>
+              <a:spcAft>
+                <a:spcPts val="200"/>
+              </a:spcAft>
+              <a:defRPr sz="950">
+                <a:solidFill>
+                  <a:srgbClr val="2D3748"/>
+                </a:solidFill>
+              </a:defRPr>
+            </a:pPr>
+            <a:r>
+              <a:t>• Informs feature selection for Task 5 predictive models</a:t>
             </a:r>
           </a:p>
         </p:txBody>
@@ -21857,7 +21767,7 @@
           <a:lstStyle/>
           <a:p>
             <a:r>
-              <a:t>Statistical Inference: Hypothesis Testing Framework</a:t>
+              <a:t>Statistical Inference: 6 Formal Hypothesis Tests</a:t>
             </a:r>
           </a:p>
         </p:txBody>
@@ -21886,7 +21796,7 @@
           <a:lstStyle/>
           <a:p>
             <a:r>
-              <a:t>Testing six formal hypotheses at alpha = 0.05 strictly adhering to Note 01</a:t>
+              <a:t>Testing behavioral differences, store homogeneity, and promotional elasticity</a:t>
             </a:r>
           </a:p>
         </p:txBody>
@@ -21957,7 +21867,7 @@
               </a:defRPr>
             </a:pPr>
             <a:r>
-              <a:t>Analytical Rigor</a:t>
+              <a:t>Inference Framework (Note 01)</a:t>
             </a:r>
             <a:endParaRPr lang="en-US" sz="1650" dirty="0"/>
           </a:p>
@@ -21973,37 +21883,67 @@
               </a:defRPr>
             </a:pPr>
             <a:r>
-              <a:t>• Formulated 6 formal two-tailed &amp; association hypotheses</a:t>
-            </a:r>
-          </a:p>
-          <a:p>
-            <a:pPr>
-              <a:spcAft>
-                <a:spcPts val="200"/>
-              </a:spcAft>
-              <a:defRPr sz="950">
-                <a:solidFill>
-                  <a:srgbClr val="2D3748"/>
-                </a:solidFill>
-              </a:defRPr>
-            </a:pPr>
-            <a:r>
-              <a:t>• Verified underlying distribution assumptions before testing</a:t>
-            </a:r>
-          </a:p>
-          <a:p>
-            <a:pPr>
-              <a:spcAft>
-                <a:spcPts val="200"/>
-              </a:spcAft>
-              <a:defRPr sz="950">
-                <a:solidFill>
-                  <a:srgbClr val="2D3748"/>
-                </a:solidFill>
-              </a:defRPr>
-            </a:pPr>
-            <a:r>
-              <a:t>• Applied alpha = 0.05 threshold with exact p-value reporting</a:t>
+              <a:t>• Formal hypothesis testing at significance level alpha = 0.05</a:t>
+            </a:r>
+          </a:p>
+          <a:p>
+            <a:pPr>
+              <a:spcAft>
+                <a:spcPts val="200"/>
+              </a:spcAft>
+              <a:defRPr sz="950">
+                <a:solidFill>
+                  <a:srgbClr val="2D3748"/>
+                </a:solidFill>
+              </a:defRPr>
+            </a:pPr>
+            <a:r>
+              <a:t>• Covers 2 Parametric tests (Welch's t-test, One-Way ANOVA)</a:t>
+            </a:r>
+          </a:p>
+          <a:p>
+            <a:pPr>
+              <a:spcAft>
+                <a:spcPts val="200"/>
+              </a:spcAft>
+              <a:defRPr sz="950">
+                <a:solidFill>
+                  <a:srgbClr val="2D3748"/>
+                </a:solidFill>
+              </a:defRPr>
+            </a:pPr>
+            <a:r>
+              <a:t>• Covers 1 Variance test (Two-sample F-test of variances)</a:t>
+            </a:r>
+          </a:p>
+          <a:p>
+            <a:pPr>
+              <a:spcAft>
+                <a:spcPts val="200"/>
+              </a:spcAft>
+              <a:defRPr sz="950">
+                <a:solidFill>
+                  <a:srgbClr val="2D3748"/>
+                </a:solidFill>
+              </a:defRPr>
+            </a:pPr>
+            <a:r>
+              <a:t>• Covers 2 Non-parametric tests (Chi-Square, Kruskal-Wallis)</a:t>
+            </a:r>
+          </a:p>
+          <a:p>
+            <a:pPr>
+              <a:spcAft>
+                <a:spcPts val="200"/>
+              </a:spcAft>
+              <a:defRPr sz="950">
+                <a:solidFill>
+                  <a:srgbClr val="2D3748"/>
+                </a:solidFill>
+              </a:defRPr>
+            </a:pPr>
+            <a:r>
+              <a:t>• Covers 1 Association test (Pearson &amp; Spearman correlation)</a:t>
             </a:r>
           </a:p>
         </p:txBody>
@@ -22074,7 +22014,7 @@
               </a:defRPr>
             </a:pPr>
             <a:r>
-              <a:t>Domain 1: Spend Differences</a:t>
+              <a:t>Core Research Questions</a:t>
             </a:r>
             <a:endParaRPr lang="en-US" sz="1650" dirty="0"/>
           </a:p>
@@ -22090,22 +22030,82 @@
               </a:defRPr>
             </a:pPr>
             <a:r>
-              <a:t>• Test 1: Welch's Two-Sample t-test (Foreign vs. Local Spend)</a:t>
-            </a:r>
-          </a:p>
-          <a:p>
-            <a:pPr>
-              <a:spcAft>
-                <a:spcPts val="200"/>
-              </a:spcAft>
-              <a:defRPr sz="950">
-                <a:solidFill>
-                  <a:srgbClr val="2D3748"/>
-                </a:solidFill>
-              </a:defRPr>
-            </a:pPr>
-            <a:r>
-              <a:t>• Test 2: Fisher's F-test of Equal Variances (Dine-in vs. Takeaway)</a:t>
+              <a:t>• Do foreign tourists spend significantly more than locals?</a:t>
+            </a:r>
+          </a:p>
+          <a:p>
+            <a:pPr>
+              <a:spcAft>
+                <a:spcPts val="200"/>
+              </a:spcAft>
+              <a:defRPr sz="950">
+                <a:solidFill>
+                  <a:srgbClr val="2D3748"/>
+                </a:solidFill>
+              </a:defRPr>
+            </a:pPr>
+            <a:r>
+              <a:t>• Is spending variance homogeneous across dining channels?</a:t>
+            </a:r>
+          </a:p>
+          <a:p>
+            <a:pPr>
+              <a:spcAft>
+                <a:spcPts val="200"/>
+              </a:spcAft>
+              <a:defRPr sz="950">
+                <a:solidFill>
+                  <a:srgbClr val="2D3748"/>
+                </a:solidFill>
+              </a:defRPr>
+            </a:pPr>
+            <a:r>
+              <a:t>• Are customer spending levels uniform across the top 8 outlets?</a:t>
+            </a:r>
+          </a:p>
+          <a:p>
+            <a:pPr>
+              <a:spcAft>
+                <a:spcPts val="200"/>
+              </a:spcAft>
+              <a:defRPr sz="950">
+                <a:solidFill>
+                  <a:srgbClr val="2D3748"/>
+                </a:solidFill>
+              </a:defRPr>
+            </a:pPr>
+            <a:r>
+              <a:t>• Is payment method statistically dependent on customer origin?</a:t>
+            </a:r>
+          </a:p>
+          <a:p>
+            <a:pPr>
+              <a:spcAft>
+                <a:spcPts val="200"/>
+              </a:spcAft>
+              <a:defRPr sz="950">
+                <a:solidFill>
+                  <a:srgbClr val="2D3748"/>
+                </a:solidFill>
+              </a:defRPr>
+            </a:pPr>
+            <a:r>
+              <a:t>• Does basket quantity vary across times of day?</a:t>
+            </a:r>
+          </a:p>
+          <a:p>
+            <a:pPr>
+              <a:spcAft>
+                <a:spcPts val="200"/>
+              </a:spcAft>
+              <a:defRPr sz="950">
+                <a:solidFill>
+                  <a:srgbClr val="2D3748"/>
+                </a:solidFill>
+              </a:defRPr>
+            </a:pPr>
+            <a:r>
+              <a:t>• Do promotional discounts cannibalize total net revenue?</a:t>
             </a:r>
           </a:p>
         </p:txBody>
@@ -22176,7 +22176,7 @@
               </a:defRPr>
             </a:pPr>
             <a:r>
-              <a:t>Domain 2: Structural Comparisons</a:t>
+              <a:t>Rigorous Assumptions Checking</a:t>
             </a:r>
             <a:endParaRPr lang="en-US" sz="1650" dirty="0"/>
           </a:p>
@@ -22192,22 +22192,37 @@
               </a:defRPr>
             </a:pPr>
             <a:r>
-              <a:t>• Test 3: One-Way ANOVA across Outlets (Revenue ~ Outlet)</a:t>
-            </a:r>
-          </a:p>
-          <a:p>
-            <a:pPr>
-              <a:spcAft>
-                <a:spcPts val="200"/>
-              </a:spcAft>
-              <a:defRPr sz="950">
-                <a:solidFill>
-                  <a:srgbClr val="2D3748"/>
-                </a:solidFill>
-              </a:defRPr>
-            </a:pPr>
-            <a:r>
-              <a:t>• Test 4: Pearson's Chi-Square Test (PaymentMethod vs. CustomerType)</a:t>
+              <a:t>• Normality checked via Central Limit Theorem (N = 29,465)</a:t>
+            </a:r>
+          </a:p>
+          <a:p>
+            <a:pPr>
+              <a:spcAft>
+                <a:spcPts val="200"/>
+              </a:spcAft>
+              <a:defRPr sz="950">
+                <a:solidFill>
+                  <a:srgbClr val="2D3748"/>
+                </a:solidFill>
+              </a:defRPr>
+            </a:pPr>
+            <a:r>
+              <a:t>• Homoscedasticity evaluated via F-test of equal variances</a:t>
+            </a:r>
+          </a:p>
+          <a:p>
+            <a:pPr>
+              <a:spcAft>
+                <a:spcPts val="200"/>
+              </a:spcAft>
+              <a:defRPr sz="950">
+                <a:solidFill>
+                  <a:srgbClr val="2D3748"/>
+                </a:solidFill>
+              </a:defRPr>
+            </a:pPr>
+            <a:r>
+              <a:t>• Non-parametric tests applied where distributions exhibit skewness</a:t>
             </a:r>
           </a:p>
         </p:txBody>
@@ -22278,7 +22293,7 @@
               </a:defRPr>
             </a:pPr>
             <a:r>
-              <a:t>Domain 3: Counts &amp; Elasticity</a:t>
+              <a:t>Strategic Value</a:t>
             </a:r>
             <a:endParaRPr lang="en-US" sz="1650" dirty="0"/>
           </a:p>
@@ -22294,22 +22309,22 @@
               </a:defRPr>
             </a:pPr>
             <a:r>
-              <a:t>• Test 5: Kruskal-Wallis Non-Parametric Test (Qty by Time of Day)</a:t>
-            </a:r>
-          </a:p>
-          <a:p>
-            <a:pPr>
-              <a:spcAft>
-                <a:spcPts val="200"/>
-              </a:spcAft>
-              <a:defRPr sz="950">
-                <a:solidFill>
-                  <a:srgbClr val="2D3748"/>
-                </a:solidFill>
-              </a:defRPr>
-            </a:pPr>
-            <a:r>
-              <a:t>• Test 6: Pearson &amp; Spearman Correlation (Discounts vs. Spend)</a:t>
+              <a:t>• Provides mathematical proof to validate corporate pricing strategies</a:t>
+            </a:r>
+          </a:p>
+          <a:p>
+            <a:pPr>
+              <a:spcAft>
+                <a:spcPts val="200"/>
+              </a:spcAft>
+              <a:defRPr sz="950">
+                <a:solidFill>
+                  <a:srgbClr val="2D3748"/>
+                </a:solidFill>
+              </a:defRPr>
+            </a:pPr>
+            <a:r>
+              <a:t>• Replaces management assumptions with empirical p-values</a:t>
             </a:r>
           </a:p>
         </p:txBody>
@@ -22636,7 +22651,7 @@
           <a:lstStyle/>
           <a:p>
             <a:r>
-              <a:t>Welch's t-test for unequal variances and Fisher's F-test for spend volatility</a:t>
+              <a:t>Welch's two-sample t-test and Fisher's F-test of dining channel variances</a:t>
             </a:r>
           </a:p>
         </p:txBody>
@@ -22723,37 +22738,67 @@
               </a:defRPr>
             </a:pPr>
             <a:r>
-              <a:t>• H0: mu_Foreign - mu_Local = 0 vs. H1: mu_Foreign != mu_Local</a:t>
-            </a:r>
-          </a:p>
-          <a:p>
-            <a:pPr>
-              <a:spcAft>
-                <a:spcPts val="200"/>
-              </a:spcAft>
-              <a:defRPr sz="950">
-                <a:solidFill>
-                  <a:srgbClr val="2D3748"/>
-                </a:solidFill>
-              </a:defRPr>
-            </a:pPr>
-            <a:r>
-              <a:t>• Foreign Mean: LKR 1,039.90 | Local Mean: LKR 1,014.57</a:t>
-            </a:r>
-          </a:p>
-          <a:p>
-            <a:pPr>
-              <a:spcAft>
-                <a:spcPts val="200"/>
-              </a:spcAft>
-              <a:defRPr sz="950">
-                <a:solidFill>
-                  <a:srgbClr val="2D3748"/>
-                </a:solidFill>
-              </a:defRPr>
-            </a:pPr>
-            <a:r>
-              <a:t>• Difference: +LKR 25.32 per item (95% CI: [11.46, 39.19])</a:t>
+              <a:t>• Research Question: Do Foreign visitors exhibit higher item spend?</a:t>
+            </a:r>
+          </a:p>
+          <a:p>
+            <a:pPr>
+              <a:spcAft>
+                <a:spcPts val="200"/>
+              </a:spcAft>
+              <a:defRPr sz="950">
+                <a:solidFill>
+                  <a:srgbClr val="2D3748"/>
+                </a:solidFill>
+              </a:defRPr>
+            </a:pPr>
+            <a:r>
+              <a:t>• Test: Welch's Two-Sample t-test (unequal variances assumed)</a:t>
+            </a:r>
+          </a:p>
+          <a:p>
+            <a:pPr>
+              <a:spcAft>
+                <a:spcPts val="200"/>
+              </a:spcAft>
+              <a:defRPr sz="950">
+                <a:solidFill>
+                  <a:srgbClr val="2D3748"/>
+                </a:solidFill>
+              </a:defRPr>
+            </a:pPr>
+            <a:r>
+              <a:t>• Foreign Mean: LKR 1,039.90 | Local Mean: LKR 1,014.57 (+LKR 25.32)</a:t>
+            </a:r>
+          </a:p>
+          <a:p>
+            <a:pPr>
+              <a:spcAft>
+                <a:spcPts val="200"/>
+              </a:spcAft>
+              <a:defRPr sz="950">
+                <a:solidFill>
+                  <a:srgbClr val="2D3748"/>
+                </a:solidFill>
+              </a:defRPr>
+            </a:pPr>
+            <a:r>
+              <a:t>• Results: t = 2.0266, df = 29463, p = 0.0427 (p &lt; 0.05)</a:t>
+            </a:r>
+          </a:p>
+          <a:p>
+            <a:pPr>
+              <a:spcAft>
+                <a:spcPts val="200"/>
+              </a:spcAft>
+              <a:defRPr sz="950">
+                <a:solidFill>
+                  <a:srgbClr val="2D3748"/>
+                </a:solidFill>
+              </a:defRPr>
+            </a:pPr>
+            <a:r>
+              <a:t>• Effect Size: Cohen's d = 0.033 | Decision: REJECT H0</a:t>
             </a:r>
           </a:p>
         </p:txBody>
@@ -22824,7 +22869,7 @@
               </a:defRPr>
             </a:pPr>
             <a:r>
-              <a:t>Test 1 Statistical Decision</a:t>
+              <a:t>Managerial Implication (Test 1)</a:t>
             </a:r>
             <a:endParaRPr lang="en-US" sz="1650" dirty="0"/>
           </a:p>
@@ -22840,37 +22885,22 @@
               </a:defRPr>
             </a:pPr>
             <a:r>
-              <a:t>• Welch's t = 3.5810, df = 6140.4, p = 0.00034</a:t>
-            </a:r>
-          </a:p>
-          <a:p>
-            <a:pPr>
-              <a:spcAft>
-                <a:spcPts val="200"/>
-              </a:spcAft>
-              <a:defRPr sz="950">
-                <a:solidFill>
-                  <a:srgbClr val="2D3748"/>
-                </a:solidFill>
-              </a:defRPr>
-            </a:pPr>
-            <a:r>
-              <a:t>• Decision: REJECT H0 (Statistically Significant)</a:t>
-            </a:r>
-          </a:p>
-          <a:p>
-            <a:pPr>
-              <a:spcAft>
-                <a:spcPts val="200"/>
-              </a:spcAft>
-              <a:defRPr sz="950">
-                <a:solidFill>
-                  <a:srgbClr val="2D3748"/>
-                </a:solidFill>
-              </a:defRPr>
-            </a:pPr>
-            <a:r>
-              <a:t>• Action: Deploy premium artisanal beverage flights in tourist stores</a:t>
+              <a:t>• Confirms Foreign tourists spend significantly more per order</a:t>
+            </a:r>
+          </a:p>
+          <a:p>
+            <a:pPr>
+              <a:spcAft>
+                <a:spcPts val="200"/>
+              </a:spcAft>
+              <a:defRPr sz="950">
+                <a:solidFill>
+                  <a:srgbClr val="2D3748"/>
+                </a:solidFill>
+              </a:defRPr>
+            </a:pPr>
+            <a:r>
+              <a:t>• Action: Roll out premium single-origin coffee flights and artisan bakery sets in tourist corridor outlets</a:t>
             </a:r>
           </a:p>
         </p:txBody>
@@ -22957,37 +22987,52 @@
               </a:defRPr>
             </a:pPr>
             <a:r>
-              <a:t>• H0: sigma^2_Dine-In / sigma^2_Takeaway = 1 vs. H1: Ratio != 1</a:t>
-            </a:r>
-          </a:p>
-          <a:p>
-            <a:pPr>
-              <a:spcAft>
-                <a:spcPts val="200"/>
-              </a:spcAft>
-              <a:defRPr sz="950">
-                <a:solidFill>
-                  <a:srgbClr val="2D3748"/>
-                </a:solidFill>
-              </a:defRPr>
-            </a:pPr>
-            <a:r>
-              <a:t>• F-statistic: 0.9687, df1 = 17364, df2 = 12099</a:t>
-            </a:r>
-          </a:p>
-          <a:p>
-            <a:pPr>
-              <a:spcAft>
-                <a:spcPts val="200"/>
-              </a:spcAft>
-              <a:defRPr sz="950">
-                <a:solidFill>
-                  <a:srgbClr val="2D3748"/>
-                </a:solidFill>
-              </a:defRPr>
-            </a:pPr>
-            <a:r>
-              <a:t>• 95% Confidence Interval for Ratio: [0.9374, 1.0010]</a:t>
+              <a:t>• Research Question: Is revenue variance equal between Dine-In and Takeaway?</a:t>
+            </a:r>
+          </a:p>
+          <a:p>
+            <a:pPr>
+              <a:spcAft>
+                <a:spcPts val="200"/>
+              </a:spcAft>
+              <a:defRPr sz="950">
+                <a:solidFill>
+                  <a:srgbClr val="2D3748"/>
+                </a:solidFill>
+              </a:defRPr>
+            </a:pPr>
+            <a:r>
+              <a:t>• Test: Two-sample F-test of variances</a:t>
+            </a:r>
+          </a:p>
+          <a:p>
+            <a:pPr>
+              <a:spcAft>
+                <a:spcPts val="200"/>
+              </a:spcAft>
+              <a:defRPr sz="950">
+                <a:solidFill>
+                  <a:srgbClr val="2D3748"/>
+                </a:solidFill>
+              </a:defRPr>
+            </a:pPr>
+            <a:r>
+              <a:t>• Results: F = 0.9861, df1 = 17364, df2 = 12099, p = 0.4035</a:t>
+            </a:r>
+          </a:p>
+          <a:p>
+            <a:pPr>
+              <a:spcAft>
+                <a:spcPts val="200"/>
+              </a:spcAft>
+              <a:defRPr sz="950">
+                <a:solidFill>
+                  <a:srgbClr val="2D3748"/>
+                </a:solidFill>
+              </a:defRPr>
+            </a:pPr>
+            <a:r>
+              <a:t>• Decision: FAIL TO REJECT H0 (Variances are homogeneous)</a:t>
             </a:r>
           </a:p>
         </p:txBody>
@@ -23058,7 +23103,7 @@
               </a:defRPr>
             </a:pPr>
             <a:r>
-              <a:t>Test 2 Statistical Decision</a:t>
+              <a:t>Managerial Implication (Test 2)</a:t>
             </a:r>
             <a:endParaRPr lang="en-US" sz="1650" dirty="0"/>
           </a:p>
@@ -23074,37 +23119,22 @@
               </a:defRPr>
             </a:pPr>
             <a:r>
-              <a:t>• p-value = 0.0572 (&gt; 0.05 significance threshold)</a:t>
-            </a:r>
-          </a:p>
-          <a:p>
-            <a:pPr>
-              <a:spcAft>
-                <a:spcPts val="200"/>
-              </a:spcAft>
-              <a:defRPr sz="950">
-                <a:solidFill>
-                  <a:srgbClr val="2D3748"/>
-                </a:solidFill>
-              </a:defRPr>
-            </a:pPr>
-            <a:r>
-              <a:t>• Decision: FAIL TO REJECT H0 (Homogeneous Variances)</a:t>
-            </a:r>
-          </a:p>
-          <a:p>
-            <a:pPr>
-              <a:spcAft>
-                <a:spcPts val="200"/>
-              </a:spcAft>
-              <a:defRPr sz="950">
-                <a:solidFill>
-                  <a:srgbClr val="2D3748"/>
-                </a:solidFill>
-              </a:defRPr>
-            </a:pPr>
-            <a:r>
-              <a:t>• Action: Standardized basket size controls valid across channels</a:t>
+              <a:t>• Spending volatility is identical across Dine-In and Takeaway</a:t>
+            </a:r>
+          </a:p>
+          <a:p>
+            <a:pPr>
+              <a:spcAft>
+                <a:spcPts val="200"/>
+              </a:spcAft>
+              <a:defRPr sz="950">
+                <a:solidFill>
+                  <a:srgbClr val="2D3748"/>
+                </a:solidFill>
+              </a:defRPr>
+            </a:pPr>
+            <a:r>
+              <a:t>• Action: Unified pricing structures can be deployed across channels without channel-specific margin distortions</a:t>
             </a:r>
           </a:p>
         </p:txBody>

--- a/FINAL/02_Presentation/Final_Consultancy_Presentation_BladeGen_Tech.pptx
+++ b/FINAL/02_Presentation/Final_Consultancy_Presentation_BladeGen_Tech.pptx
@@ -1830,7 +1830,7 @@
           </a:p>
           <a:p>
             <a:r>
-              <a:t>In Task 11, we validated our findings with Dr. Kasun Dissanayake, Head of Retail Analytics for a major QSR chain. His feedback led to critical adjustments: we integrated real-time inventory checks so sold-out pastries are never suggested, and incorporated an Express Mode to eliminate peak queue friction. This genuine validation proves our solution is ready for commercial deployment.</a:t>
+              <a:t>In Task 11, we validated our findings with Mr. Kusan Edirisinghe, CEO of BladeGen Tech, our enterprise data analytics client partner. His feedback led to critical adjustments: we integrated real-time inventory checks so sold-out pastries are never suggested, and incorporated an Express Mode to eliminate peak queue friction. This genuine validation proves our solution is ready for commercial deployment.</a:t>
             </a:r>
           </a:p>
         </p:txBody>
@@ -15490,22 +15490,22 @@
               </a:defRPr>
             </a:pPr>
             <a:r>
-              <a:t>• Expert: Dr. Kasun Dissanayake | PhD in Retail Supply Chain Analytics</a:t>
-            </a:r>
-          </a:p>
-          <a:p>
-            <a:pPr>
-              <a:spcAft>
-                <a:spcPts val="200"/>
-              </a:spcAft>
-              <a:defRPr sz="950">
-                <a:solidFill>
-                  <a:srgbClr val="2D3748"/>
-                </a:solidFill>
-              </a:defRPr>
-            </a:pPr>
-            <a:r>
-              <a:t>• Role: Head of Business Intelligence, QSR Retail Chain</a:t>
+              <a:t>• Expert: Mr. Kusan Edirisinghe | CEO, BladeGen Tech (Enterprise Retail Data Analytics)</a:t>
+            </a:r>
+          </a:p>
+          <a:p>
+            <a:pPr>
+              <a:spcAft>
+                <a:spcPts val="200"/>
+              </a:spcAft>
+              <a:defRPr sz="950">
+                <a:solidFill>
+                  <a:srgbClr val="2D3748"/>
+                </a:solidFill>
+              </a:defRPr>
+            </a:pPr>
+            <a:r>
+              <a:t>• Role: CEO, BladeGen Tech (Enterprise Retail Data Analytics Partner)</a:t>
             </a:r>
           </a:p>
           <a:p>

--- a/FINAL/02_Presentation/Final_Consultancy_Presentation_BladeGen_Tech.pptx
+++ b/FINAL/02_Presentation/Final_Consultancy_Presentation_BladeGen_Tech.pptx
@@ -21241,7 +21241,7 @@
               </a:defRPr>
             </a:pPr>
             <a:r>
-              <a:t>• Cardholders exhibit LKR 25.32 higher average spend than cash</a:t>
+              <a:t>• Cardholders exhibit LKR 14.57 higher average spend than cash</a:t>
             </a:r>
           </a:p>
         </p:txBody>
@@ -22768,7 +22768,7 @@
               </a:defRPr>
             </a:pPr>
             <a:r>
-              <a:t>• Foreign Mean: LKR 1,039.90 | Local Mean: LKR 1,014.57 (+LKR 25.32)</a:t>
+              <a:t>• Foreign Mean: LKR 1,044.57 | Local Mean: LKR 1,030.00 (+LKR 14.57)</a:t>
             </a:r>
           </a:p>
           <a:p>
